--- a/ta/demo8/slides/demo8-walkthrough-slides.pptx
+++ b/ta/demo8/slides/demo8-walkthrough-slides.pptx
@@ -41,6 +41,9 @@
     <p:sldId id="289" r:id="rId40"/>
     <p:sldId id="290" r:id="rId41"/>
     <p:sldId id="291" r:id="rId42"/>
+    <p:sldId id="292" r:id="rId43"/>
+    <p:sldId id="293" r:id="rId44"/>
+    <p:sldId id="294" r:id="rId45"/>
   </p:sldIdLst>
   <p:sldSz cx="12191695" cy="6858000" type="screen4x3"/>
   <p:notesSz cx="6858000" cy="9144000"/>
@@ -8961,7 +8964,7 @@
                 </a:solidFill>
                 <a:latin typeface="Georgia"/>
               </a:rPr>
-              <a:t>Color signal vs ecology signal</a:t>
+              <a:t>Where did the ecology data come from?</a:t>
             </a:r>
           </a:p>
         </p:txBody>
@@ -8996,36 +8999,46 @@
                 </a:solidFill>
                 <a:latin typeface="Aptos"/>
               </a:rPr>
-              <a:t>do close relatives share how they live more than how they look?</a:t>
-            </a:r>
-          </a:p>
-        </p:txBody>
-      </p:sp>
-      <p:pic>
-        <p:nvPicPr>
-          <p:cNvPr id="5" name="Picture 4" descr="signal-color-vs-ecology-1.png"/>
-          <p:cNvPicPr>
-            <a:picLocks noChangeAspect="1"/>
-          </p:cNvPicPr>
-          <p:nvPr/>
-        </p:nvPicPr>
-        <p:blipFill>
-          <a:blip r:embed="rId2"/>
-          <a:stretch>
-            <a:fillRect/>
-          </a:stretch>
-        </p:blipFill>
-        <p:spPr>
-          <a:xfrm>
-            <a:off x="502920" y="1617345"/>
-            <a:ext cx="8229600" cy="4629150"/>
-          </a:xfrm>
-          <a:prstGeom prst="rect">
-            <a:avLst/>
-          </a:prstGeom>
-          <a:effectLst/>
-        </p:spPr>
-      </p:pic>
+              <a:t>the species_traits.csv you've been using</a:t>
+            </a:r>
+          </a:p>
+        </p:txBody>
+      </p:sp>
+      <p:sp>
+        <p:nvSpPr>
+          <p:cNvPr id="5" name="TextBox 4"/>
+          <p:cNvSpPr txBox="1"/>
+          <p:nvPr/>
+        </p:nvSpPr>
+        <p:spPr>
+          <a:xfrm>
+            <a:off x="502920" y="1508760"/>
+            <a:ext cx="11155680" cy="777240"/>
+          </a:xfrm>
+          <a:prstGeom prst="rect">
+            <a:avLst/>
+          </a:prstGeom>
+          <a:noFill/>
+        </p:spPr>
+        <p:txBody>
+          <a:bodyPr wrap="square" anchor="t">
+            <a:spAutoFit/>
+          </a:bodyPr>
+          <a:lstStyle/>
+          <a:p>
+            <a:pPr algn="l"/>
+            <a:r>
+              <a:rPr sz="2400" b="0" i="0">
+                <a:solidFill>
+                  <a:srgbClr val="F6F6F8"/>
+                </a:solidFill>
+                <a:latin typeface="Aptos"/>
+              </a:rPr>
+              <a:t>The CSV in §1.8 was built by querying FishBase directly. Now you'll see the API call.</a:t>
+            </a:r>
+          </a:p>
+        </p:txBody>
+      </p:sp>
       <p:sp>
         <p:nvSpPr>
           <p:cNvPr id="6" name="TextBox 5"/>
@@ -9034,8 +9047,8 @@
         </p:nvSpPr>
         <p:spPr>
           <a:xfrm>
-            <a:off x="8823960" y="1783080"/>
-            <a:ext cx="3154680" cy="4572000"/>
+            <a:off x="640080" y="2468880"/>
+            <a:ext cx="10972800" cy="3657600"/>
           </a:xfrm>
           <a:prstGeom prst="rect">
             <a:avLst/>
@@ -9050,11 +9063,11 @@
           <a:p>
             <a:pPr algn="l">
               <a:spcAft>
-                <a:spcPts val="1000"/>
+                <a:spcPts val="1120"/>
               </a:spcAft>
             </a:pPr>
             <a:r>
-              <a:rPr sz="1400">
+              <a:rPr sz="2000">
                 <a:solidFill>
                   <a:srgbClr val="D4A853"/>
                 </a:solidFill>
@@ -9063,32 +9076,32 @@
               <a:t>•  </a:t>
             </a:r>
             <a:r>
-              <a:rPr sz="1400" b="1">
-                <a:solidFill>
-                  <a:srgbClr val="D4A853"/>
-                </a:solidFill>
-                <a:latin typeface="Aptos"/>
-              </a:rPr>
-              <a:t>Ecology bars above color bars</a:t>
-            </a:r>
-            <a:r>
-              <a:rPr sz="1400">
-                <a:solidFill>
-                  <a:srgbClr val="F6F6F8"/>
-                </a:solidFill>
-                <a:latin typeface="Aptos"/>
-              </a:rPr>
-              <a:t> — ecology is more phylogenetically conserved than pattern.</a:t>
+              <a:rPr sz="2000" b="1">
+                <a:solidFill>
+                  <a:srgbClr val="D4A853"/>
+                </a:solidFill>
+                <a:latin typeface="Aptos"/>
+              </a:rPr>
+              <a:t>FishBase</a:t>
+            </a:r>
+            <a:r>
+              <a:rPr sz="2000">
+                <a:solidFill>
+                  <a:srgbClr val="F6F6F8"/>
+                </a:solidFill>
+                <a:latin typeface="Aptos"/>
+              </a:rPr>
+              <a:t> — free, curated database of fish ecology and morphology. ~35,000 species.</a:t>
             </a:r>
           </a:p>
           <a:p>
             <a:pPr algn="l">
               <a:spcAft>
-                <a:spcPts val="1000"/>
+                <a:spcPts val="1120"/>
               </a:spcAft>
             </a:pPr>
             <a:r>
-              <a:rPr sz="1400">
+              <a:rPr sz="2000">
                 <a:solidFill>
                   <a:srgbClr val="D4A853"/>
                 </a:solidFill>
@@ -9097,32 +9110,32 @@
               <a:t>•  </a:t>
             </a:r>
             <a:r>
-              <a:rPr sz="1400" b="1">
-                <a:solidFill>
-                  <a:srgbClr val="D4A853"/>
-                </a:solidFill>
-                <a:latin typeface="Aptos"/>
-              </a:rPr>
-              <a:t>Interpretation</a:t>
-            </a:r>
-            <a:r>
-              <a:rPr sz="1400">
-                <a:solidFill>
-                  <a:srgbClr val="F6F6F8"/>
-                </a:solidFill>
-                <a:latin typeface="Aptos"/>
-              </a:rPr>
-              <a:t> — close relatives are tied by how they live more than how they look.</a:t>
+              <a:rPr sz="2000" b="1">
+                <a:solidFill>
+                  <a:srgbClr val="D4A853"/>
+                </a:solidFill>
+                <a:latin typeface="Aptos"/>
+              </a:rPr>
+              <a:t>rfishbase</a:t>
+            </a:r>
+            <a:r>
+              <a:rPr sz="2000">
+                <a:solidFill>
+                  <a:srgbClr val="F6F6F8"/>
+                </a:solidFill>
+                <a:latin typeface="Aptos"/>
+              </a:rPr>
+              <a:t> — an R package that talks to it — species() and ecology() are the two key calls.</a:t>
             </a:r>
           </a:p>
           <a:p>
             <a:pPr algn="l">
               <a:spcAft>
-                <a:spcPts val="1000"/>
+                <a:spcPts val="1120"/>
               </a:spcAft>
             </a:pPr>
             <a:r>
-              <a:rPr sz="1400">
+              <a:rPr sz="2000">
                 <a:solidFill>
                   <a:srgbClr val="D4A853"/>
                 </a:solidFill>
@@ -9131,32 +9144,32 @@
               <a:t>•  </a:t>
             </a:r>
             <a:r>
-              <a:rPr sz="1400" b="1">
-                <a:solidFill>
-                  <a:srgbClr val="D4A853"/>
-                </a:solidFill>
-                <a:latin typeface="Aptos"/>
-              </a:rPr>
-              <a:t>In our 19-tip sample</a:t>
-            </a:r>
-            <a:r>
-              <a:rPr sz="1400">
-                <a:solidFill>
-                  <a:srgbClr val="F6F6F8"/>
-                </a:solidFill>
-                <a:latin typeface="Aptos"/>
-              </a:rPr>
-              <a:t> — the bars overlap — sample size is the limiting factor.</a:t>
+              <a:rPr sz="2000" b="1">
+                <a:solidFill>
+                  <a:srgbClr val="D4A853"/>
+                </a:solidFill>
+                <a:latin typeface="Aptos"/>
+              </a:rPr>
+              <a:t>Why teach this</a:t>
+            </a:r>
+            <a:r>
+              <a:rPr sz="2000">
+                <a:solidFill>
+                  <a:srgbClr val="F6F6F8"/>
+                </a:solidFill>
+                <a:latin typeface="Aptos"/>
+              </a:rPr>
+              <a:t> — any time you want to layer ecology onto a phylogeny, you'll use the same recipe.</a:t>
             </a:r>
           </a:p>
           <a:p>
             <a:pPr algn="l">
               <a:spcAft>
-                <a:spcPts val="1000"/>
+                <a:spcPts val="1120"/>
               </a:spcAft>
             </a:pPr>
             <a:r>
-              <a:rPr sz="1400">
+              <a:rPr sz="2000">
                 <a:solidFill>
                   <a:srgbClr val="D4A853"/>
                 </a:solidFill>
@@ -9165,22 +9178,22 @@
               <a:t>•  </a:t>
             </a:r>
             <a:r>
-              <a:rPr sz="1400" b="1">
-                <a:solidFill>
-                  <a:srgbClr val="D4A853"/>
-                </a:solidFill>
-                <a:latin typeface="Aptos"/>
-              </a:rPr>
-              <a:t>Your family</a:t>
-            </a:r>
-            <a:r>
-              <a:rPr sz="1400">
-                <a:solidFill>
-                  <a:srgbClr val="F6F6F8"/>
-                </a:solidFill>
-                <a:latin typeface="Aptos"/>
-              </a:rPr>
-              <a:t> — may show the pattern more sharply if it has deeper splits.</a:t>
+              <a:rPr sz="2000" b="1">
+                <a:solidFill>
+                  <a:srgbClr val="D4A853"/>
+                </a:solidFill>
+                <a:latin typeface="Aptos"/>
+              </a:rPr>
+              <a:t>Pin to v3.1.10</a:t>
+            </a:r>
+            <a:r>
+              <a:rPr sz="2000">
+                <a:solidFill>
+                  <a:srgbClr val="F6F6F8"/>
+                </a:solidFill>
+                <a:latin typeface="Aptos"/>
+              </a:rPr>
+              <a:t> — newer rfishbase depends on duckdb (C++ toolchain). 3.1.10 installs cleanly.</a:t>
             </a:r>
           </a:p>
         </p:txBody>
@@ -9311,7 +9324,7 @@
                 </a:solidFill>
                 <a:latin typeface="Georgia"/>
               </a:rPr>
-              <a:t>Part 2 take-home for Chaetodontidae</a:t>
+              <a:t>rfishbase in four moves</a:t>
             </a:r>
           </a:p>
         </p:txBody>
@@ -9346,7 +9359,7 @@
                 </a:solidFill>
                 <a:latin typeface="Aptos"/>
               </a:rPr>
-              <a:t>the result we'll stress-test in Part 3</a:t>
+              <a:t>what worksheet §2.8 actually runs</a:t>
             </a:r>
           </a:p>
         </p:txBody>
@@ -9381,7 +9394,7 @@
                 </a:solidFill>
                 <a:latin typeface="Aptos"/>
               </a:rPr>
-              <a:t>Pattern orientation is conserved within butterflyfishes; everything else is evolutionarily labile.</a:t>
+              <a:t>FishBase uses 'Genus species' (space). Our bundle uses 'Genus_species' (underscore). Translate at the API boundary.</a:t>
             </a:r>
           </a:p>
         </p:txBody>
@@ -9394,8 +9407,8 @@
         </p:nvSpPr>
         <p:spPr>
           <a:xfrm>
-            <a:off x="822960" y="2468880"/>
-            <a:ext cx="10972800" cy="3566160"/>
+            <a:off x="640080" y="2514600"/>
+            <a:ext cx="10972800" cy="3383280"/>
           </a:xfrm>
           <a:prstGeom prst="rect">
             <a:avLst/>
@@ -9414,7 +9427,7 @@
               </a:spcAft>
             </a:pPr>
             <a:r>
-              <a:rPr sz="1900">
+              <a:rPr sz="2000">
                 <a:solidFill>
                   <a:srgbClr val="D4A853"/>
                 </a:solidFill>
@@ -9423,22 +9436,22 @@
               <a:t>•  </a:t>
             </a:r>
             <a:r>
-              <a:rPr sz="1900" b="1">
-                <a:solidFill>
-                  <a:srgbClr val="D4A853"/>
-                </a:solidFill>
-                <a:latin typeface="Aptos"/>
-              </a:rPr>
-              <a:t>Conserved</a:t>
-            </a:r>
-            <a:r>
-              <a:rPr sz="1900">
-                <a:solidFill>
-                  <a:srgbClr val="F6F6F8"/>
-                </a:solidFill>
-                <a:latin typeface="Aptos"/>
-              </a:rPr>
-              <a:t> — A (pattern aspect ratio) — bar-y stays bar-y, stripe-y stays stripe-y.</a:t>
+              <a:rPr sz="2000" b="1">
+                <a:solidFill>
+                  <a:srgbClr val="D4A853"/>
+                </a:solidFill>
+                <a:latin typeface="Aptos"/>
+              </a:rPr>
+              <a:t>1. Convert keys</a:t>
+            </a:r>
+            <a:r>
+              <a:rPr sz="2000">
+                <a:solidFill>
+                  <a:srgbClr val="F6F6F8"/>
+                </a:solidFill>
+                <a:latin typeface="Aptos"/>
+              </a:rPr>
+              <a:t> — species_fb &lt;- gsub("_", " ", species)</a:t>
             </a:r>
           </a:p>
           <a:p>
@@ -9448,7 +9461,7 @@
               </a:spcAft>
             </a:pPr>
             <a:r>
-              <a:rPr sz="1900">
+              <a:rPr sz="2000">
                 <a:solidFill>
                   <a:srgbClr val="D4A853"/>
                 </a:solidFill>
@@ -9457,22 +9470,22 @@
               <a:t>•  </a:t>
             </a:r>
             <a:r>
-              <a:rPr sz="1900" b="1">
-                <a:solidFill>
-                  <a:srgbClr val="D4A853"/>
-                </a:solidFill>
-                <a:latin typeface="Aptos"/>
-              </a:rPr>
-              <a:t>Labile</a:t>
-            </a:r>
-            <a:r>
-              <a:rPr sz="1900">
-                <a:solidFill>
-                  <a:srgbClr val="F6F6F8"/>
-                </a:solidFill>
-                <a:latin typeface="Aptos"/>
-              </a:rPr>
-              <a:t> — m, Jc, Jt, m_dS, m_dL — complexity, palette use, transition variety, and both boundary strengths.</a:t>
+              <a:rPr sz="2000" b="1">
+                <a:solidFill>
+                  <a:srgbClr val="D4A853"/>
+                </a:solidFill>
+                <a:latin typeface="Aptos"/>
+              </a:rPr>
+              <a:t>2. Pull traits with species()</a:t>
+            </a:r>
+            <a:r>
+              <a:rPr sz="2000">
+                <a:solidFill>
+                  <a:srgbClr val="F6F6F8"/>
+                </a:solidFill>
+                <a:latin typeface="Aptos"/>
+              </a:rPr>
+              <a:t> — Length, DepthRangeDeep, Vulnerability — all in one fields= call.</a:t>
             </a:r>
           </a:p>
           <a:p>
@@ -9482,7 +9495,7 @@
               </a:spcAft>
             </a:pPr>
             <a:r>
-              <a:rPr sz="1900">
+              <a:rPr sz="2000">
                 <a:solidFill>
                   <a:srgbClr val="D4A853"/>
                 </a:solidFill>
@@ -9491,22 +9504,22 @@
               <a:t>•  </a:t>
             </a:r>
             <a:r>
-              <a:rPr sz="1900" b="1">
-                <a:solidFill>
-                  <a:srgbClr val="D4A853"/>
-                </a:solidFill>
-                <a:latin typeface="Aptos"/>
-              </a:rPr>
-              <a:t>Bivariate story</a:t>
-            </a:r>
-            <a:r>
-              <a:rPr sz="1900">
-                <a:solidFill>
-                  <a:srgbClr val="F6F6F8"/>
-                </a:solidFill>
-                <a:latin typeface="Aptos"/>
-              </a:rPr>
-              <a:t> — after PGLS, m_dL ~ m_dS gains a significant positive slope; A ~ m stays flat.</a:t>
+              <a:rPr sz="2000" b="1">
+                <a:solidFill>
+                  <a:srgbClr val="D4A853"/>
+                </a:solidFill>
+                <a:latin typeface="Aptos"/>
+              </a:rPr>
+              <a:t>3. Pull diet with ecology()</a:t>
+            </a:r>
+            <a:r>
+              <a:rPr sz="2000">
+                <a:solidFill>
+                  <a:srgbClr val="F6F6F8"/>
+                </a:solidFill>
+                <a:latin typeface="Aptos"/>
+              </a:rPr>
+              <a:t> — FoodTroph + DietTroph; coalesce to Troph and average across multiple study rows per species.</a:t>
             </a:r>
           </a:p>
           <a:p>
@@ -9516,7 +9529,7 @@
               </a:spcAft>
             </a:pPr>
             <a:r>
-              <a:rPr sz="1900">
+              <a:rPr sz="2000">
                 <a:solidFill>
                   <a:srgbClr val="D4A853"/>
                 </a:solidFill>
@@ -9525,22 +9538,22 @@
               <a:t>•  </a:t>
             </a:r>
             <a:r>
-              <a:rPr sz="1900" b="1">
-                <a:solidFill>
-                  <a:srgbClr val="D4A853"/>
-                </a:solidFill>
-                <a:latin typeface="Aptos"/>
-              </a:rPr>
-              <a:t>Matches Frédérich</a:t>
-            </a:r>
-            <a:r>
-              <a:rPr sz="1900">
-                <a:solidFill>
-                  <a:srgbClr val="F6F6F8"/>
-                </a:solidFill>
-                <a:latin typeface="Aptos"/>
-              </a:rPr>
-              <a:t> — qualitatively — color patterns largely evolve fast. The exception is A.</a:t>
+              <a:rPr sz="2000" b="1">
+                <a:solidFill>
+                  <a:srgbClr val="D4A853"/>
+                </a:solidFill>
+                <a:latin typeface="Aptos"/>
+              </a:rPr>
+              <a:t>4. Merge + re-key</a:t>
+            </a:r>
+            <a:r>
+              <a:rPr sz="2000">
+                <a:solidFill>
+                  <a:srgbClr val="F6F6F8"/>
+                </a:solidFill>
+                <a:latin typeface="Aptos"/>
+              </a:rPr>
+              <a:t> — merge sp + ec by Species, then gsub back to underscore form so it joins your bundle's species column.</a:t>
             </a:r>
           </a:p>
         </p:txBody>
@@ -9553,7 +9566,7 @@
         </p:nvSpPr>
         <p:spPr>
           <a:xfrm>
-            <a:off x="822960" y="6126480"/>
+            <a:off x="640080" y="6126480"/>
             <a:ext cx="10972800" cy="365760"/>
           </a:xfrm>
           <a:prstGeom prst="rect">
@@ -9569,13 +9582,13 @@
           <a:p>
             <a:pPr algn="l"/>
             <a:r>
-              <a:rPr sz="2000" b="0" i="1">
-                <a:solidFill>
-                  <a:srgbClr val="E07A5F"/>
-                </a:solidFill>
-                <a:latin typeface="Aptos"/>
-              </a:rPr>
-              <a:t>Part 3 asks: how much of that survives noisy measurements?</a:t>
+              <a:rPr sz="1800" b="0" i="1">
+                <a:solidFill>
+                  <a:srgbClr val="81B29A"/>
+                </a:solidFill>
+                <a:latin typeface="Aptos"/>
+              </a:rPr>
+              <a:t>Total: ~30 sec for a 19-species family. Cached for repeated runs.</a:t>
             </a:r>
           </a:p>
         </p:txBody>
@@ -9706,7 +9719,7 @@
                 </a:solidFill>
                 <a:latin typeface="Georgia"/>
               </a:rPr>
-              <a:t>Why a single number is a lie</a:t>
+              <a:t>Your turn — same recipe, your bundle</a:t>
             </a:r>
           </a:p>
         </p:txBody>
@@ -9741,36 +9754,46 @@
                 </a:solidFill>
                 <a:latin typeface="Aptos"/>
               </a:rPr>
-              <a:t>every pavo statistic came from one photograph</a:t>
-            </a:r>
-          </a:p>
-        </p:txBody>
-      </p:sp>
-      <p:pic>
-        <p:nvPicPr>
-          <p:cNvPr id="5" name="Picture 4" descr="one-photo-lie.png"/>
-          <p:cNvPicPr>
-            <a:picLocks noChangeAspect="1"/>
-          </p:cNvPicPr>
-          <p:nvPr/>
-        </p:nvPicPr>
-        <p:blipFill>
-          <a:blip r:embed="rId2"/>
-          <a:stretch>
-            <a:fillRect/>
-          </a:stretch>
-        </p:blipFill>
-        <p:spPr>
-          <a:xfrm>
-            <a:off x="687747" y="1691640"/>
-            <a:ext cx="7585624" cy="4572000"/>
-          </a:xfrm>
-          <a:prstGeom prst="rect">
-            <a:avLst/>
-          </a:prstGeom>
-          <a:effectLst/>
-        </p:spPr>
-      </p:pic>
+              <a:t>the §2.8 chunks run unchanged on whichever family you point at</a:t>
+            </a:r>
+          </a:p>
+        </p:txBody>
+      </p:sp>
+      <p:sp>
+        <p:nvSpPr>
+          <p:cNvPr id="5" name="TextBox 4"/>
+          <p:cNvSpPr txBox="1"/>
+          <p:nvPr/>
+        </p:nvSpPr>
+        <p:spPr>
+          <a:xfrm>
+            <a:off x="502920" y="1508760"/>
+            <a:ext cx="11155680" cy="777240"/>
+          </a:xfrm>
+          <a:prstGeom prst="rect">
+            <a:avLst/>
+          </a:prstGeom>
+          <a:noFill/>
+        </p:spPr>
+        <p:txBody>
+          <a:bodyPr wrap="square" anchor="t">
+            <a:spAutoFit/>
+          </a:bodyPr>
+          <a:lstStyle/>
+          <a:p>
+            <a:pPr algn="l"/>
+            <a:r>
+              <a:rPr sz="2400" b="0" i="0">
+                <a:solidFill>
+                  <a:srgbClr val="F6F6F8"/>
+                </a:solidFill>
+                <a:latin typeface="Aptos"/>
+              </a:rPr>
+              <a:t>rfishbase doesn't know which family you're in. It works on any vector of Genus_species strings.</a:t>
+            </a:r>
+          </a:p>
+        </p:txBody>
+      </p:sp>
       <p:sp>
         <p:nvSpPr>
           <p:cNvPr id="6" name="TextBox 5"/>
@@ -9779,8 +9802,8 @@
         </p:nvSpPr>
         <p:spPr>
           <a:xfrm>
-            <a:off x="8595360" y="1920240"/>
-            <a:ext cx="3383280" cy="4206240"/>
+            <a:off x="640080" y="2468880"/>
+            <a:ext cx="10972800" cy="3657600"/>
           </a:xfrm>
           <a:prstGeom prst="rect">
             <a:avLst/>
@@ -9795,11 +9818,11 @@
           <a:p>
             <a:pPr algn="l">
               <a:spcAft>
-                <a:spcPts val="1040"/>
+                <a:spcPts val="1120"/>
               </a:spcAft>
             </a:pPr>
             <a:r>
-              <a:rPr sz="1500">
+              <a:rPr sz="1800">
                 <a:solidFill>
                   <a:srgbClr val="D4A853"/>
                 </a:solidFill>
@@ -9808,32 +9831,32 @@
               <a:t>•  </a:t>
             </a:r>
             <a:r>
-              <a:rPr sz="1500" b="1">
-                <a:solidFill>
-                  <a:srgbClr val="D4A853"/>
-                </a:solidFill>
-                <a:latin typeface="Aptos"/>
-              </a:rPr>
-              <a:t>Same fish</a:t>
-            </a:r>
-            <a:r>
-              <a:rPr sz="1500">
-                <a:solidFill>
-                  <a:srgbClr val="F6F6F8"/>
-                </a:solidFill>
-                <a:latin typeface="Aptos"/>
-              </a:rPr>
-              <a:t> — Same species, same individual.</a:t>
+              <a:rPr sz="1800" b="1">
+                <a:solidFill>
+                  <a:srgbClr val="D4A853"/>
+                </a:solidFill>
+                <a:latin typeface="Aptos"/>
+              </a:rPr>
+              <a:t>Same chunks, your data</a:t>
+            </a:r>
+            <a:r>
+              <a:rPr sz="1800">
+                <a:solidFill>
+                  <a:srgbClr val="F6F6F8"/>
+                </a:solidFill>
+                <a:latin typeface="Aptos"/>
+              </a:rPr>
+              <a:t> — after the in-class picker step, your species vector is your family's species — re-run §2.8 and rfishbase fetches FishBase data for them.</a:t>
             </a:r>
           </a:p>
           <a:p>
             <a:pPr algn="l">
               <a:spcAft>
-                <a:spcPts val="1040"/>
+                <a:spcPts val="1120"/>
               </a:spcAft>
             </a:pPr>
             <a:r>
-              <a:rPr sz="1500">
+              <a:rPr sz="1800">
                 <a:solidFill>
                   <a:srgbClr val="D4A853"/>
                 </a:solidFill>
@@ -9842,32 +9865,32 @@
               <a:t>•  </a:t>
             </a:r>
             <a:r>
-              <a:rPr sz="1500" b="1">
-                <a:solidFill>
-                  <a:srgbClr val="D4A853"/>
-                </a:solidFill>
-                <a:latin typeface="Aptos"/>
-              </a:rPr>
-              <a:t>Different photos</a:t>
-            </a:r>
-            <a:r>
-              <a:rPr sz="1500">
-                <a:solidFill>
-                  <a:srgbClr val="F6F6F8"/>
-                </a:solidFill>
-                <a:latin typeface="Aptos"/>
-              </a:rPr>
-              <a:t> — Different angle, light, framing.</a:t>
+              <a:rPr sz="1800" b="1">
+                <a:solidFill>
+                  <a:srgbClr val="D4A853"/>
+                </a:solidFill>
+                <a:latin typeface="Aptos"/>
+              </a:rPr>
+              <a:t>Sanity-check vs CSV</a:t>
+            </a:r>
+            <a:r>
+              <a:rPr sz="1800">
+                <a:solidFill>
+                  <a:srgbClr val="F6F6F8"/>
+                </a:solidFill>
+                <a:latin typeface="Aptos"/>
+              </a:rPr>
+              <a:t> — the worksheet prints max |Δ| per trait. Near zero = your live pull reproduces the CSV. Differences usually mean FishBase has updated values.</a:t>
             </a:r>
           </a:p>
           <a:p>
             <a:pPr algn="l">
               <a:spcAft>
-                <a:spcPts val="1040"/>
+                <a:spcPts val="1120"/>
               </a:spcAft>
             </a:pPr>
             <a:r>
-              <a:rPr sz="1500">
+              <a:rPr sz="1800">
                 <a:solidFill>
                   <a:srgbClr val="D4A853"/>
                 </a:solidFill>
@@ -9876,32 +9899,32 @@
               <a:t>•  </a:t>
             </a:r>
             <a:r>
-              <a:rPr sz="1500" b="1">
-                <a:solidFill>
-                  <a:srgbClr val="D4A853"/>
-                </a:solidFill>
-                <a:latin typeface="Aptos"/>
-              </a:rPr>
-              <a:t>Different pavo values</a:t>
-            </a:r>
-            <a:r>
-              <a:rPr sz="1500">
-                <a:solidFill>
-                  <a:srgbClr val="F6F6F8"/>
-                </a:solidFill>
-                <a:latin typeface="Aptos"/>
-              </a:rPr>
-              <a:t> — the 'truth' is a distribution.</a:t>
+              <a:rPr sz="1800" b="1">
+                <a:solidFill>
+                  <a:srgbClr val="D4A853"/>
+                </a:solidFill>
+                <a:latin typeface="Aptos"/>
+              </a:rPr>
+              <a:t>Watch missing values</a:t>
+            </a:r>
+            <a:r>
+              <a:rPr sz="1800">
+                <a:solidFill>
+                  <a:srgbClr val="F6F6F8"/>
+                </a:solidFill>
+                <a:latin typeface="Aptos"/>
+              </a:rPr>
+              <a:t> — not every species has all four traits. The missing-count line tells you which traits to drop from your PGLS / K calls.</a:t>
             </a:r>
           </a:p>
           <a:p>
             <a:pPr algn="l">
               <a:spcAft>
-                <a:spcPts val="1040"/>
+                <a:spcPts val="1120"/>
               </a:spcAft>
             </a:pPr>
             <a:r>
-              <a:rPr sz="1500">
+              <a:rPr sz="1800">
                 <a:solidFill>
                   <a:srgbClr val="D4A853"/>
                 </a:solidFill>
@@ -9910,22 +9933,22 @@
               <a:t>•  </a:t>
             </a:r>
             <a:r>
-              <a:rPr sz="1500" b="1">
-                <a:solidFill>
-                  <a:srgbClr val="D4A853"/>
-                </a:solidFill>
-                <a:latin typeface="Aptos"/>
-              </a:rPr>
-              <a:t>Part 3</a:t>
-            </a:r>
-            <a:r>
-              <a:rPr sz="1500">
-                <a:solidFill>
-                  <a:srgbClr val="F6F6F8"/>
-                </a:solidFill>
-                <a:latin typeface="Aptos"/>
-              </a:rPr>
-              <a:t> — asks how much that distribution matters.</a:t>
+              <a:rPr sz="1800" b="1">
+                <a:solidFill>
+                  <a:srgbClr val="D4A853"/>
+                </a:solidFill>
+                <a:latin typeface="Aptos"/>
+              </a:rPr>
+              <a:t>Network out?</a:t>
+            </a:r>
+            <a:r>
+              <a:rPr sz="1800">
+                <a:solidFill>
+                  <a:srgbClr val="F6F6F8"/>
+                </a:solidFill>
+                <a:latin typeface="Aptos"/>
+              </a:rPr>
+              <a:t> — fall back to the bundled CSV — it ships with every export and contains the same fields.</a:t>
             </a:r>
           </a:p>
         </p:txBody>
@@ -10056,7 +10079,7 @@
                 </a:solidFill>
                 <a:latin typeface="Georgia"/>
               </a:rPr>
-              <a:t>The 5-image error stack</a:t>
+              <a:t>Color signal vs ecology signal</a:t>
             </a:r>
           </a:p>
         </p:txBody>
@@ -10091,14 +10114,14 @@
                 </a:solidFill>
                 <a:latin typeface="Aptos"/>
               </a:rPr>
-              <a:t>one species photographed 5 times → 5 pavo values per variable</a:t>
+              <a:t>do close relatives share how they live more than how they look?</a:t>
             </a:r>
           </a:p>
         </p:txBody>
       </p:sp>
       <p:pic>
         <p:nvPicPr>
-          <p:cNvPr id="5" name="Picture 4" descr="error-strip-1.png"/>
+          <p:cNvPr id="5" name="Picture 4" descr="signal-color-vs-ecology-1.png"/>
           <p:cNvPicPr>
             <a:picLocks noChangeAspect="1"/>
           </p:cNvPicPr>
@@ -10164,7 +10187,7 @@
                 </a:solidFill>
                 <a:latin typeface="Aptos"/>
               </a:rPr>
-              <a:t>Dots</a:t>
+              <a:t>Ecology bars above color bars</a:t>
             </a:r>
             <a:r>
               <a:rPr sz="1400">
@@ -10173,7 +10196,7 @@
                 </a:solidFill>
                 <a:latin typeface="Aptos"/>
               </a:rPr>
-              <a:t> — one pavo value per photograph.</a:t>
+              <a:t> — ecology is more phylogenetically conserved than pattern.</a:t>
             </a:r>
           </a:p>
           <a:p>
@@ -10198,7 +10221,7 @@
                 </a:solidFill>
                 <a:latin typeface="Aptos"/>
               </a:rPr>
-              <a:t>Bar</a:t>
+              <a:t>Interpretation</a:t>
             </a:r>
             <a:r>
               <a:rPr sz="1400">
@@ -10207,7 +10230,7 @@
                 </a:solidFill>
                 <a:latin typeface="Aptos"/>
               </a:rPr>
-              <a:t> — the 5-photo mean.</a:t>
+              <a:t> — close relatives are tied by how they live more than how they look.</a:t>
             </a:r>
           </a:p>
           <a:p>
@@ -10232,7 +10255,7 @@
                 </a:solidFill>
                 <a:latin typeface="Aptos"/>
               </a:rPr>
-              <a:t>Tight clusters</a:t>
+              <a:t>In our 19-tip sample</a:t>
             </a:r>
             <a:r>
               <a:rPr sz="1400">
@@ -10241,7 +10264,7 @@
                 </a:solidFill>
                 <a:latin typeface="Aptos"/>
               </a:rPr>
-              <a:t> — pavo is reliable for that variable.</a:t>
+              <a:t> — the bars overlap — sample size is the limiting factor.</a:t>
             </a:r>
           </a:p>
           <a:p>
@@ -10266,7 +10289,7 @@
                 </a:solidFill>
                 <a:latin typeface="Aptos"/>
               </a:rPr>
-              <a:t>Wide spread</a:t>
+              <a:t>Your family</a:t>
             </a:r>
             <a:r>
               <a:rPr sz="1400">
@@ -10275,41 +10298,7 @@
                 </a:solidFill>
                 <a:latin typeface="Aptos"/>
               </a:rPr>
-              <a:t> — that variable's Part-2 result is fragile.</a:t>
-            </a:r>
-          </a:p>
-          <a:p>
-            <a:pPr algn="l">
-              <a:spcAft>
-                <a:spcPts val="1000"/>
-              </a:spcAft>
-            </a:pPr>
-            <a:r>
-              <a:rPr sz="1400">
-                <a:solidFill>
-                  <a:srgbClr val="D4A853"/>
-                </a:solidFill>
-                <a:latin typeface="Aptos"/>
-              </a:rPr>
-              <a:t>•  </a:t>
-            </a:r>
-            <a:r>
-              <a:rPr sz="1400" b="1">
-                <a:solidFill>
-                  <a:srgbClr val="D4A853"/>
-                </a:solidFill>
-                <a:latin typeface="Aptos"/>
-              </a:rPr>
-              <a:t>Simplifying assumption</a:t>
-            </a:r>
-            <a:r>
-              <a:rPr sz="1400">
-                <a:solidFill>
-                  <a:srgbClr val="F6F6F8"/>
-                </a:solidFill>
-                <a:latin typeface="Aptos"/>
-              </a:rPr>
-              <a:t> — treat the SD from this one species as the SD for every species.</a:t>
+              <a:t> — may show the pattern more sharply if it has deeper splits.</a:t>
             </a:r>
           </a:p>
         </p:txBody>
@@ -10440,7 +10429,7 @@
                 </a:solidFill>
                 <a:latin typeface="Georgia"/>
               </a:rPr>
-              <a:t>Monte Carlo — re-run everything under noise</a:t>
+              <a:t>Part 2 take-home for Chaetodontidae</a:t>
             </a:r>
           </a:p>
         </p:txBody>
@@ -10475,36 +10464,46 @@
                 </a:solidFill>
                 <a:latin typeface="Aptos"/>
               </a:rPr>
-              <a:t>100 iterations, each adding fresh Gaussian noise</a:t>
-            </a:r>
-          </a:p>
-        </p:txBody>
-      </p:sp>
-      <p:pic>
-        <p:nvPicPr>
-          <p:cNvPr id="5" name="Picture 4" descr="mc-loop-diagram.png"/>
-          <p:cNvPicPr>
-            <a:picLocks noChangeAspect="1"/>
-          </p:cNvPicPr>
-          <p:nvPr/>
-        </p:nvPicPr>
-        <p:blipFill>
-          <a:blip r:embed="rId2"/>
-          <a:stretch>
-            <a:fillRect/>
-          </a:stretch>
-        </p:blipFill>
-        <p:spPr>
-          <a:xfrm>
-            <a:off x="2913396" y="1737360"/>
-            <a:ext cx="6426166" cy="3200400"/>
-          </a:xfrm>
-          <a:prstGeom prst="rect">
-            <a:avLst/>
-          </a:prstGeom>
-          <a:effectLst/>
-        </p:spPr>
-      </p:pic>
+              <a:t>the result we'll stress-test in Part 3</a:t>
+            </a:r>
+          </a:p>
+        </p:txBody>
+      </p:sp>
+      <p:sp>
+        <p:nvSpPr>
+          <p:cNvPr id="5" name="TextBox 4"/>
+          <p:cNvSpPr txBox="1"/>
+          <p:nvPr/>
+        </p:nvSpPr>
+        <p:spPr>
+          <a:xfrm>
+            <a:off x="502920" y="1508760"/>
+            <a:ext cx="11155680" cy="777240"/>
+          </a:xfrm>
+          <a:prstGeom prst="rect">
+            <a:avLst/>
+          </a:prstGeom>
+          <a:noFill/>
+        </p:spPr>
+        <p:txBody>
+          <a:bodyPr wrap="square" anchor="t">
+            <a:spAutoFit/>
+          </a:bodyPr>
+          <a:lstStyle/>
+          <a:p>
+            <a:pPr algn="l"/>
+            <a:r>
+              <a:rPr sz="2400" b="0" i="0">
+                <a:solidFill>
+                  <a:srgbClr val="F6F6F8"/>
+                </a:solidFill>
+                <a:latin typeface="Aptos"/>
+              </a:rPr>
+              <a:t>Pattern orientation is conserved within butterflyfishes; everything else is evolutionarily labile.</a:t>
+            </a:r>
+          </a:p>
+        </p:txBody>
+      </p:sp>
       <p:sp>
         <p:nvSpPr>
           <p:cNvPr id="6" name="TextBox 5"/>
@@ -10513,8 +10512,8 @@
         </p:nvSpPr>
         <p:spPr>
           <a:xfrm>
-            <a:off x="822960" y="5074920"/>
-            <a:ext cx="10972800" cy="1554480"/>
+            <a:off x="822960" y="2468880"/>
+            <a:ext cx="10972800" cy="3566160"/>
           </a:xfrm>
           <a:prstGeom prst="rect">
             <a:avLst/>
@@ -10529,11 +10528,11 @@
           <a:p>
             <a:pPr algn="l">
               <a:spcAft>
-                <a:spcPts val="960"/>
+                <a:spcPts val="1120"/>
               </a:spcAft>
             </a:pPr>
             <a:r>
-              <a:rPr sz="1600">
+              <a:rPr sz="1900">
                 <a:solidFill>
                   <a:srgbClr val="D4A853"/>
                 </a:solidFill>
@@ -10542,32 +10541,32 @@
               <a:t>•  </a:t>
             </a:r>
             <a:r>
-              <a:rPr sz="1600" b="1">
-                <a:solidFill>
-                  <a:srgbClr val="D4A853"/>
-                </a:solidFill>
-                <a:latin typeface="Aptos"/>
-              </a:rPr>
-              <a:t>Each iteration</a:t>
-            </a:r>
-            <a:r>
-              <a:rPr sz="1600">
-                <a:solidFill>
-                  <a:srgbClr val="F6F6F8"/>
-                </a:solidFill>
-                <a:latin typeface="Aptos"/>
-              </a:rPr>
-              <a:t> — add Gaussian noise with the observed SDs to every tip; refit everything.</a:t>
+              <a:rPr sz="1900" b="1">
+                <a:solidFill>
+                  <a:srgbClr val="D4A853"/>
+                </a:solidFill>
+                <a:latin typeface="Aptos"/>
+              </a:rPr>
+              <a:t>Conserved</a:t>
+            </a:r>
+            <a:r>
+              <a:rPr sz="1900">
+                <a:solidFill>
+                  <a:srgbClr val="F6F6F8"/>
+                </a:solidFill>
+                <a:latin typeface="Aptos"/>
+              </a:rPr>
+              <a:t> — A (pattern aspect ratio) — bar-y stays bar-y, stripe-y stays stripe-y.</a:t>
             </a:r>
           </a:p>
           <a:p>
             <a:pPr algn="l">
               <a:spcAft>
-                <a:spcPts val="960"/>
+                <a:spcPts val="1120"/>
               </a:spcAft>
             </a:pPr>
             <a:r>
-              <a:rPr sz="1600">
+              <a:rPr sz="1900">
                 <a:solidFill>
                   <a:srgbClr val="D4A853"/>
                 </a:solidFill>
@@ -10576,32 +10575,32 @@
               <a:t>•  </a:t>
             </a:r>
             <a:r>
-              <a:rPr sz="1600" b="1">
-                <a:solidFill>
-                  <a:srgbClr val="D4A853"/>
-                </a:solidFill>
-                <a:latin typeface="Aptos"/>
-              </a:rPr>
-              <a:t>Store</a:t>
-            </a:r>
-            <a:r>
-              <a:rPr sz="1600">
-                <a:solidFill>
-                  <a:srgbClr val="F6F6F8"/>
-                </a:solidFill>
-                <a:latin typeface="Aptos"/>
-              </a:rPr>
-              <a:t> — K, λ, PGLS slopes.</a:t>
+              <a:rPr sz="1900" b="1">
+                <a:solidFill>
+                  <a:srgbClr val="D4A853"/>
+                </a:solidFill>
+                <a:latin typeface="Aptos"/>
+              </a:rPr>
+              <a:t>Labile</a:t>
+            </a:r>
+            <a:r>
+              <a:rPr sz="1900">
+                <a:solidFill>
+                  <a:srgbClr val="F6F6F8"/>
+                </a:solidFill>
+                <a:latin typeface="Aptos"/>
+              </a:rPr>
+              <a:t> — m, Jc, Jt, m_dS, m_dL — complexity, palette use, transition variety, and both boundary strengths.</a:t>
             </a:r>
           </a:p>
           <a:p>
             <a:pPr algn="l">
               <a:spcAft>
-                <a:spcPts val="960"/>
+                <a:spcPts val="1120"/>
               </a:spcAft>
             </a:pPr>
             <a:r>
-              <a:rPr sz="1600">
+              <a:rPr sz="1900">
                 <a:solidFill>
                   <a:srgbClr val="D4A853"/>
                 </a:solidFill>
@@ -10610,32 +10609,32 @@
               <a:t>•  </a:t>
             </a:r>
             <a:r>
-              <a:rPr sz="1600" b="1">
-                <a:solidFill>
-                  <a:srgbClr val="D4A853"/>
-                </a:solidFill>
-                <a:latin typeface="Aptos"/>
-              </a:rPr>
-              <a:t>After 100 iterations</a:t>
-            </a:r>
-            <a:r>
-              <a:rPr sz="1600">
-                <a:solidFill>
-                  <a:srgbClr val="F6F6F8"/>
-                </a:solidFill>
-                <a:latin typeface="Aptos"/>
-              </a:rPr>
-              <a:t> — you have 100 K values per pavo variable — a distribution, not a point.</a:t>
+              <a:rPr sz="1900" b="1">
+                <a:solidFill>
+                  <a:srgbClr val="D4A853"/>
+                </a:solidFill>
+                <a:latin typeface="Aptos"/>
+              </a:rPr>
+              <a:t>Bivariate story</a:t>
+            </a:r>
+            <a:r>
+              <a:rPr sz="1900">
+                <a:solidFill>
+                  <a:srgbClr val="F6F6F8"/>
+                </a:solidFill>
+                <a:latin typeface="Aptos"/>
+              </a:rPr>
+              <a:t> — after PGLS, m_dL ~ m_dS gains a significant positive slope; A ~ m stays flat.</a:t>
             </a:r>
           </a:p>
           <a:p>
             <a:pPr algn="l">
               <a:spcAft>
-                <a:spcPts val="960"/>
+                <a:spcPts val="1120"/>
               </a:spcAft>
             </a:pPr>
             <a:r>
-              <a:rPr sz="1600">
+              <a:rPr sz="1900">
                 <a:solidFill>
                   <a:srgbClr val="D4A853"/>
                 </a:solidFill>
@@ -10644,22 +10643,22 @@
               <a:t>•  </a:t>
             </a:r>
             <a:r>
-              <a:rPr sz="1600" b="1">
-                <a:solidFill>
-                  <a:srgbClr val="D4A853"/>
-                </a:solidFill>
-                <a:latin typeface="Aptos"/>
-              </a:rPr>
-              <a:t>Time cost</a:t>
-            </a:r>
-            <a:r>
-              <a:rPr sz="1600">
-                <a:solidFill>
-                  <a:srgbClr val="F6F6F8"/>
-                </a:solidFill>
-                <a:latin typeface="Aptos"/>
-              </a:rPr>
-              <a:t> — ~1.5–2 min for n_iter = 100, ~3–5 min for n_iter = 200.</a:t>
+              <a:rPr sz="1900" b="1">
+                <a:solidFill>
+                  <a:srgbClr val="D4A853"/>
+                </a:solidFill>
+                <a:latin typeface="Aptos"/>
+              </a:rPr>
+              <a:t>Matches Frédérich</a:t>
+            </a:r>
+            <a:r>
+              <a:rPr sz="1900">
+                <a:solidFill>
+                  <a:srgbClr val="F6F6F8"/>
+                </a:solidFill>
+                <a:latin typeface="Aptos"/>
+              </a:rPr>
+              <a:t> — qualitatively — color patterns largely evolve fast. The exception is A.</a:t>
             </a:r>
           </a:p>
         </p:txBody>
@@ -10667,6 +10666,41 @@
       <p:sp>
         <p:nvSpPr>
           <p:cNvPr id="7" name="TextBox 6"/>
+          <p:cNvSpPr txBox="1"/>
+          <p:nvPr/>
+        </p:nvSpPr>
+        <p:spPr>
+          <a:xfrm>
+            <a:off x="822960" y="6126480"/>
+            <a:ext cx="10972800" cy="365760"/>
+          </a:xfrm>
+          <a:prstGeom prst="rect">
+            <a:avLst/>
+          </a:prstGeom>
+          <a:noFill/>
+        </p:spPr>
+        <p:txBody>
+          <a:bodyPr wrap="square" anchor="t">
+            <a:spAutoFit/>
+          </a:bodyPr>
+          <a:lstStyle/>
+          <a:p>
+            <a:pPr algn="l"/>
+            <a:r>
+              <a:rPr sz="2000" b="0" i="1">
+                <a:solidFill>
+                  <a:srgbClr val="E07A5F"/>
+                </a:solidFill>
+                <a:latin typeface="Aptos"/>
+              </a:rPr>
+              <a:t>Part 3 asks: how much of that survives noisy measurements?</a:t>
+            </a:r>
+          </a:p>
+        </p:txBody>
+      </p:sp>
+      <p:sp>
+        <p:nvSpPr>
+          <p:cNvPr id="8" name="TextBox 7"/>
           <p:cNvSpPr txBox="1"/>
           <p:nvPr/>
         </p:nvSpPr>
@@ -11185,7 +11219,7 @@
                 </a:solidFill>
                 <a:latin typeface="Georgia"/>
               </a:rPr>
-              <a:t>Reading the Monte Carlo boxplot</a:t>
+              <a:t>Why a single number is a lie</a:t>
             </a:r>
           </a:p>
         </p:txBody>
@@ -11220,14 +11254,14 @@
                 </a:solidFill>
                 <a:latin typeface="Aptos"/>
               </a:rPr>
-              <a:t>the gold dot is the observed value from Part 2</a:t>
+              <a:t>every pavo statistic came from one photograph</a:t>
             </a:r>
           </a:p>
         </p:txBody>
       </p:sp>
       <p:pic>
         <p:nvPicPr>
-          <p:cNvPr id="5" name="Picture 4" descr="mc-box-reading.png"/>
+          <p:cNvPr id="5" name="Picture 4" descr="one-photo-lie.png"/>
           <p:cNvPicPr>
             <a:picLocks noChangeAspect="1"/>
           </p:cNvPicPr>
@@ -11241,8 +11275,8 @@
         </p:blipFill>
         <p:spPr>
           <a:xfrm>
-            <a:off x="411480" y="1858350"/>
-            <a:ext cx="7772400" cy="4421458"/>
+            <a:off x="687747" y="1691640"/>
+            <a:ext cx="7585624" cy="4572000"/>
           </a:xfrm>
           <a:prstGeom prst="rect">
             <a:avLst/>
@@ -11258,8 +11292,8 @@
         </p:nvSpPr>
         <p:spPr>
           <a:xfrm>
-            <a:off x="8321040" y="1783080"/>
-            <a:ext cx="3566160" cy="4663440"/>
+            <a:off x="8595360" y="1920240"/>
+            <a:ext cx="3383280" cy="4206240"/>
           </a:xfrm>
           <a:prstGeom prst="rect">
             <a:avLst/>
@@ -11274,11 +11308,11 @@
           <a:p>
             <a:pPr algn="l">
               <a:spcAft>
-                <a:spcPts val="960"/>
+                <a:spcPts val="1040"/>
               </a:spcAft>
             </a:pPr>
             <a:r>
-              <a:rPr sz="1300">
+              <a:rPr sz="1500">
                 <a:solidFill>
                   <a:srgbClr val="D4A853"/>
                 </a:solidFill>
@@ -11287,32 +11321,32 @@
               <a:t>•  </a:t>
             </a:r>
             <a:r>
-              <a:rPr sz="1300" b="1">
-                <a:solidFill>
-                  <a:srgbClr val="D4A853"/>
-                </a:solidFill>
-                <a:latin typeface="Aptos"/>
-              </a:rPr>
-              <a:t>Gold inside the box</a:t>
-            </a:r>
-            <a:r>
-              <a:rPr sz="1300">
-                <a:solidFill>
-                  <a:srgbClr val="F6F6F8"/>
-                </a:solidFill>
-                <a:latin typeface="Aptos"/>
-              </a:rPr>
-              <a:t> — robust — your Part 2 conclusion holds.</a:t>
+              <a:rPr sz="1500" b="1">
+                <a:solidFill>
+                  <a:srgbClr val="D4A853"/>
+                </a:solidFill>
+                <a:latin typeface="Aptos"/>
+              </a:rPr>
+              <a:t>Same fish</a:t>
+            </a:r>
+            <a:r>
+              <a:rPr sz="1500">
+                <a:solidFill>
+                  <a:srgbClr val="F6F6F8"/>
+                </a:solidFill>
+                <a:latin typeface="Aptos"/>
+              </a:rPr>
+              <a:t> — Same species, same individual.</a:t>
             </a:r>
           </a:p>
           <a:p>
             <a:pPr algn="l">
               <a:spcAft>
-                <a:spcPts val="960"/>
+                <a:spcPts val="1040"/>
               </a:spcAft>
             </a:pPr>
             <a:r>
-              <a:rPr sz="1300">
+              <a:rPr sz="1500">
                 <a:solidFill>
                   <a:srgbClr val="D4A853"/>
                 </a:solidFill>
@@ -11321,32 +11355,32 @@
               <a:t>•  </a:t>
             </a:r>
             <a:r>
-              <a:rPr sz="1300" b="1">
-                <a:solidFill>
-                  <a:srgbClr val="D4A853"/>
-                </a:solidFill>
-                <a:latin typeface="Aptos"/>
-              </a:rPr>
-              <a:t>Box centered at zero</a:t>
-            </a:r>
-            <a:r>
-              <a:rPr sz="1300">
-                <a:solidFill>
-                  <a:srgbClr val="F6F6F8"/>
-                </a:solidFill>
-                <a:latin typeface="Aptos"/>
-              </a:rPr>
-              <a:t> — no signal — fine if that was the claim.</a:t>
+              <a:rPr sz="1500" b="1">
+                <a:solidFill>
+                  <a:srgbClr val="D4A853"/>
+                </a:solidFill>
+                <a:latin typeface="Aptos"/>
+              </a:rPr>
+              <a:t>Different photos</a:t>
+            </a:r>
+            <a:r>
+              <a:rPr sz="1500">
+                <a:solidFill>
+                  <a:srgbClr val="F6F6F8"/>
+                </a:solidFill>
+                <a:latin typeface="Aptos"/>
+              </a:rPr>
+              <a:t> — Different angle, light, framing.</a:t>
             </a:r>
           </a:p>
           <a:p>
             <a:pPr algn="l">
               <a:spcAft>
-                <a:spcPts val="960"/>
+                <a:spcPts val="1040"/>
               </a:spcAft>
             </a:pPr>
             <a:r>
-              <a:rPr sz="1300">
+              <a:rPr sz="1500">
                 <a:solidFill>
                   <a:srgbClr val="D4A853"/>
                 </a:solidFill>
@@ -11355,32 +11389,32 @@
               <a:t>•  </a:t>
             </a:r>
             <a:r>
-              <a:rPr sz="1300" b="1">
-                <a:solidFill>
-                  <a:srgbClr val="D4A853"/>
-                </a:solidFill>
-                <a:latin typeface="Aptos"/>
-              </a:rPr>
-              <a:t>Box straddles zero</a:t>
-            </a:r>
-            <a:r>
-              <a:rPr sz="1300">
-                <a:solidFill>
-                  <a:srgbClr val="F6F6F8"/>
-                </a:solidFill>
-                <a:latin typeface="Aptos"/>
-              </a:rPr>
-              <a:t> — fragile — can't distinguish from no signal.</a:t>
+              <a:rPr sz="1500" b="1">
+                <a:solidFill>
+                  <a:srgbClr val="D4A853"/>
+                </a:solidFill>
+                <a:latin typeface="Aptos"/>
+              </a:rPr>
+              <a:t>Different pavo values</a:t>
+            </a:r>
+            <a:r>
+              <a:rPr sz="1500">
+                <a:solidFill>
+                  <a:srgbClr val="F6F6F8"/>
+                </a:solidFill>
+                <a:latin typeface="Aptos"/>
+              </a:rPr>
+              <a:t> — the 'truth' is a distribution.</a:t>
             </a:r>
           </a:p>
           <a:p>
             <a:pPr algn="l">
               <a:spcAft>
-                <a:spcPts val="960"/>
+                <a:spcPts val="1040"/>
               </a:spcAft>
             </a:pPr>
             <a:r>
-              <a:rPr sz="1300">
+              <a:rPr sz="1500">
                 <a:solidFill>
                   <a:srgbClr val="D4A853"/>
                 </a:solidFill>
@@ -11389,56 +11423,22 @@
               <a:t>•  </a:t>
             </a:r>
             <a:r>
-              <a:rPr sz="1300" b="1">
-                <a:solidFill>
-                  <a:srgbClr val="D4A853"/>
-                </a:solidFill>
-                <a:latin typeface="Aptos"/>
-              </a:rPr>
-              <a:t>Gold outside the box</a:t>
-            </a:r>
-            <a:r>
-              <a:rPr sz="1300">
-                <a:solidFill>
-                  <a:srgbClr val="F6F6F8"/>
-                </a:solidFill>
-                <a:latin typeface="Aptos"/>
-              </a:rPr>
-              <a:t> — you got lucky — a different photo would have given a different K.</a:t>
-            </a:r>
-          </a:p>
-          <a:p>
-            <a:pPr algn="l">
-              <a:spcAft>
-                <a:spcPts val="960"/>
-              </a:spcAft>
-            </a:pPr>
-            <a:r>
-              <a:rPr sz="1300">
-                <a:solidFill>
-                  <a:srgbClr val="D4A853"/>
-                </a:solidFill>
-                <a:latin typeface="Aptos"/>
-              </a:rPr>
-              <a:t>•  </a:t>
-            </a:r>
-            <a:r>
-              <a:rPr sz="1300" b="1">
-                <a:solidFill>
-                  <a:srgbClr val="D4A853"/>
-                </a:solidFill>
-                <a:latin typeface="Aptos"/>
-              </a:rPr>
-              <a:t>For PGLS slopes</a:t>
-            </a:r>
-            <a:r>
-              <a:rPr sz="1300">
-                <a:solidFill>
-                  <a:srgbClr val="F6F6F8"/>
-                </a:solidFill>
-                <a:latin typeface="Aptos"/>
-              </a:rPr>
-              <a:t> — the test is whether zero lies inside the 95 % CI.</a:t>
+              <a:rPr sz="1500" b="1">
+                <a:solidFill>
+                  <a:srgbClr val="D4A853"/>
+                </a:solidFill>
+                <a:latin typeface="Aptos"/>
+              </a:rPr>
+              <a:t>Part 3</a:t>
+            </a:r>
+            <a:r>
+              <a:rPr sz="1500">
+                <a:solidFill>
+                  <a:srgbClr val="F6F6F8"/>
+                </a:solidFill>
+                <a:latin typeface="Aptos"/>
+              </a:rPr>
+              <a:t> — asks how much that distribution matters.</a:t>
             </a:r>
           </a:p>
         </p:txBody>
@@ -11569,7 +11569,7 @@
                 </a:solidFill>
                 <a:latin typeface="Georgia"/>
               </a:rPr>
-              <a:t>Chaetodontidae K under noise</a:t>
+              <a:t>The 5-image error stack</a:t>
             </a:r>
           </a:p>
         </p:txBody>
@@ -11604,14 +11604,14 @@
                 </a:solidFill>
                 <a:latin typeface="Aptos"/>
               </a:rPr>
-              <a:t>100 Monte Carlo re-fits  ·  gold dot = observed (Part 2)</a:t>
+              <a:t>one species photographed 5 times → 5 pavo values per variable</a:t>
             </a:r>
           </a:p>
         </p:txBody>
       </p:sp>
       <p:pic>
         <p:nvPicPr>
-          <p:cNvPr id="5" name="Picture 4" descr="mc-K-plot-1.png"/>
+          <p:cNvPr id="5" name="Picture 4" descr="error-strip-1.png"/>
           <p:cNvPicPr>
             <a:picLocks noChangeAspect="1"/>
           </p:cNvPicPr>
@@ -11625,8 +11625,8 @@
         </p:blipFill>
         <p:spPr>
           <a:xfrm>
-            <a:off x="758951" y="1463040"/>
-            <a:ext cx="7900416" cy="4937760"/>
+            <a:off x="502920" y="1617345"/>
+            <a:ext cx="8229600" cy="4629150"/>
           </a:xfrm>
           <a:prstGeom prst="rect">
             <a:avLst/>
@@ -11642,8 +11642,8 @@
         </p:nvSpPr>
         <p:spPr>
           <a:xfrm>
-            <a:off x="9006840" y="1828800"/>
-            <a:ext cx="2926080" cy="4480560"/>
+            <a:off x="8823960" y="1783080"/>
+            <a:ext cx="3154680" cy="4572000"/>
           </a:xfrm>
           <a:prstGeom prst="rect">
             <a:avLst/>
@@ -11677,7 +11677,7 @@
                 </a:solidFill>
                 <a:latin typeface="Aptos"/>
               </a:rPr>
-              <a:t>A's K stays high</a:t>
+              <a:t>Dots</a:t>
             </a:r>
             <a:r>
               <a:rPr sz="1400">
@@ -11686,7 +11686,7 @@
                 </a:solidFill>
                 <a:latin typeface="Aptos"/>
               </a:rPr>
-              <a:t> — robust under noise — pattern orientation really is conserved.</a:t>
+              <a:t> — one pavo value per photograph.</a:t>
             </a:r>
           </a:p>
           <a:p>
@@ -11711,7 +11711,7 @@
                 </a:solidFill>
                 <a:latin typeface="Aptos"/>
               </a:rPr>
-              <a:t>Other 5</a:t>
+              <a:t>Bar</a:t>
             </a:r>
             <a:r>
               <a:rPr sz="1400">
@@ -11720,7 +11720,7 @@
                 </a:solidFill>
                 <a:latin typeface="Aptos"/>
               </a:rPr>
-              <a:t> — boxes hover near zero — consistent with the non-significant point estimates.</a:t>
+              <a:t> — the 5-photo mean.</a:t>
             </a:r>
           </a:p>
           <a:p>
@@ -11745,7 +11745,7 @@
                 </a:solidFill>
                 <a:latin typeface="Aptos"/>
               </a:rPr>
-              <a:t>Verdict</a:t>
+              <a:t>Tight clusters</a:t>
             </a:r>
             <a:r>
               <a:rPr sz="1400">
@@ -11754,7 +11754,75 @@
                 </a:solidFill>
                 <a:latin typeface="Aptos"/>
               </a:rPr>
-              <a:t> — the headline result from Part 2 survives realistic measurement error.</a:t>
+              <a:t> — pavo is reliable for that variable.</a:t>
+            </a:r>
+          </a:p>
+          <a:p>
+            <a:pPr algn="l">
+              <a:spcAft>
+                <a:spcPts val="1000"/>
+              </a:spcAft>
+            </a:pPr>
+            <a:r>
+              <a:rPr sz="1400">
+                <a:solidFill>
+                  <a:srgbClr val="D4A853"/>
+                </a:solidFill>
+                <a:latin typeface="Aptos"/>
+              </a:rPr>
+              <a:t>•  </a:t>
+            </a:r>
+            <a:r>
+              <a:rPr sz="1400" b="1">
+                <a:solidFill>
+                  <a:srgbClr val="D4A853"/>
+                </a:solidFill>
+                <a:latin typeface="Aptos"/>
+              </a:rPr>
+              <a:t>Wide spread</a:t>
+            </a:r>
+            <a:r>
+              <a:rPr sz="1400">
+                <a:solidFill>
+                  <a:srgbClr val="F6F6F8"/>
+                </a:solidFill>
+                <a:latin typeface="Aptos"/>
+              </a:rPr>
+              <a:t> — that variable's Part-2 result is fragile.</a:t>
+            </a:r>
+          </a:p>
+          <a:p>
+            <a:pPr algn="l">
+              <a:spcAft>
+                <a:spcPts val="1000"/>
+              </a:spcAft>
+            </a:pPr>
+            <a:r>
+              <a:rPr sz="1400">
+                <a:solidFill>
+                  <a:srgbClr val="D4A853"/>
+                </a:solidFill>
+                <a:latin typeface="Aptos"/>
+              </a:rPr>
+              <a:t>•  </a:t>
+            </a:r>
+            <a:r>
+              <a:rPr sz="1400" b="1">
+                <a:solidFill>
+                  <a:srgbClr val="D4A853"/>
+                </a:solidFill>
+                <a:latin typeface="Aptos"/>
+              </a:rPr>
+              <a:t>Simplifying assumption</a:t>
+            </a:r>
+            <a:r>
+              <a:rPr sz="1400">
+                <a:solidFill>
+                  <a:srgbClr val="F6F6F8"/>
+                </a:solidFill>
+                <a:latin typeface="Aptos"/>
+              </a:rPr>
+              <a:t> — treat the SD from this one species as the SD for every species.</a:t>
             </a:r>
           </a:p>
         </p:txBody>
@@ -11885,7 +11953,7 @@
                 </a:solidFill>
                 <a:latin typeface="Georgia"/>
               </a:rPr>
-              <a:t>Part 3 take-home</a:t>
+              <a:t>Monte Carlo — re-run everything under noise</a:t>
             </a:r>
           </a:p>
         </p:txBody>
@@ -11920,46 +11988,36 @@
                 </a:solidFill>
                 <a:latin typeface="Aptos"/>
               </a:rPr>
-              <a:t>what survives in Chaetodontidae</a:t>
-            </a:r>
-          </a:p>
-        </p:txBody>
-      </p:sp>
-      <p:sp>
-        <p:nvSpPr>
-          <p:cNvPr id="5" name="TextBox 4"/>
-          <p:cNvSpPr txBox="1"/>
-          <p:nvPr/>
-        </p:nvSpPr>
-        <p:spPr>
-          <a:xfrm>
-            <a:off x="502920" y="1508760"/>
-            <a:ext cx="11155680" cy="777240"/>
-          </a:xfrm>
-          <a:prstGeom prst="rect">
-            <a:avLst/>
-          </a:prstGeom>
-          <a:noFill/>
-        </p:spPr>
-        <p:txBody>
-          <a:bodyPr wrap="square" anchor="t">
-            <a:spAutoFit/>
-          </a:bodyPr>
-          <a:lstStyle/>
-          <a:p>
-            <a:pPr algn="l"/>
-            <a:r>
-              <a:rPr sz="2400" b="0" i="0">
-                <a:solidFill>
-                  <a:srgbClr val="F6F6F8"/>
-                </a:solidFill>
-                <a:latin typeface="Aptos"/>
-              </a:rPr>
-              <a:t>Once we admit one photograph isn't the truth, only A's signal still holds. Everything else stays labile.</a:t>
-            </a:r>
-          </a:p>
-        </p:txBody>
-      </p:sp>
+              <a:t>100 iterations, each adding fresh Gaussian noise</a:t>
+            </a:r>
+          </a:p>
+        </p:txBody>
+      </p:sp>
+      <p:pic>
+        <p:nvPicPr>
+          <p:cNvPr id="5" name="Picture 4" descr="mc-loop-diagram.png"/>
+          <p:cNvPicPr>
+            <a:picLocks noChangeAspect="1"/>
+          </p:cNvPicPr>
+          <p:nvPr/>
+        </p:nvPicPr>
+        <p:blipFill>
+          <a:blip r:embed="rId2"/>
+          <a:stretch>
+            <a:fillRect/>
+          </a:stretch>
+        </p:blipFill>
+        <p:spPr>
+          <a:xfrm>
+            <a:off x="2913396" y="1737360"/>
+            <a:ext cx="6426166" cy="3200400"/>
+          </a:xfrm>
+          <a:prstGeom prst="rect">
+            <a:avLst/>
+          </a:prstGeom>
+          <a:effectLst/>
+        </p:spPr>
+      </p:pic>
       <p:sp>
         <p:nvSpPr>
           <p:cNvPr id="6" name="TextBox 5"/>
@@ -11968,8 +12026,8 @@
         </p:nvSpPr>
         <p:spPr>
           <a:xfrm>
-            <a:off x="822960" y="2423160"/>
-            <a:ext cx="10972800" cy="3840480"/>
+            <a:off x="822960" y="5074920"/>
+            <a:ext cx="10972800" cy="1554480"/>
           </a:xfrm>
           <a:prstGeom prst="rect">
             <a:avLst/>
@@ -11984,11 +12042,11 @@
           <a:p>
             <a:pPr algn="l">
               <a:spcAft>
-                <a:spcPts val="1120"/>
+                <a:spcPts val="960"/>
               </a:spcAft>
             </a:pPr>
             <a:r>
-              <a:rPr sz="1900">
+              <a:rPr sz="1600">
                 <a:solidFill>
                   <a:srgbClr val="D4A853"/>
                 </a:solidFill>
@@ -11997,32 +12055,32 @@
               <a:t>•  </a:t>
             </a:r>
             <a:r>
-              <a:rPr sz="1900" b="1">
-                <a:solidFill>
-                  <a:srgbClr val="D4A853"/>
-                </a:solidFill>
-                <a:latin typeface="Aptos"/>
-              </a:rPr>
-              <a:t>Robust under noise</a:t>
-            </a:r>
-            <a:r>
-              <a:rPr sz="1900">
-                <a:solidFill>
-                  <a:srgbClr val="F6F6F8"/>
-                </a:solidFill>
-                <a:latin typeface="Aptos"/>
-              </a:rPr>
-              <a:t> — A — high K, tight MC distribution, gold dot inside the box.</a:t>
+              <a:rPr sz="1600" b="1">
+                <a:solidFill>
+                  <a:srgbClr val="D4A853"/>
+                </a:solidFill>
+                <a:latin typeface="Aptos"/>
+              </a:rPr>
+              <a:t>Each iteration</a:t>
+            </a:r>
+            <a:r>
+              <a:rPr sz="1600">
+                <a:solidFill>
+                  <a:srgbClr val="F6F6F8"/>
+                </a:solidFill>
+                <a:latin typeface="Aptos"/>
+              </a:rPr>
+              <a:t> — add Gaussian noise with the observed SDs to every tip; refit everything.</a:t>
             </a:r>
           </a:p>
           <a:p>
             <a:pPr algn="l">
               <a:spcAft>
-                <a:spcPts val="1120"/>
+                <a:spcPts val="960"/>
               </a:spcAft>
             </a:pPr>
             <a:r>
-              <a:rPr sz="1900">
+              <a:rPr sz="1600">
                 <a:solidFill>
                   <a:srgbClr val="D4A853"/>
                 </a:solidFill>
@@ -12031,32 +12089,32 @@
               <a:t>•  </a:t>
             </a:r>
             <a:r>
-              <a:rPr sz="1900" b="1">
-                <a:solidFill>
-                  <a:srgbClr val="D4A853"/>
-                </a:solidFill>
-                <a:latin typeface="Aptos"/>
-              </a:rPr>
-              <a:t>Robust at no-signal</a:t>
-            </a:r>
-            <a:r>
-              <a:rPr sz="1900">
-                <a:solidFill>
-                  <a:srgbClr val="F6F6F8"/>
-                </a:solidFill>
-                <a:latin typeface="Aptos"/>
-              </a:rPr>
-              <a:t> — m, Jc, Jt, m_dS, m_dL — boxes near zero, gold dot inside.</a:t>
+              <a:rPr sz="1600" b="1">
+                <a:solidFill>
+                  <a:srgbClr val="D4A853"/>
+                </a:solidFill>
+                <a:latin typeface="Aptos"/>
+              </a:rPr>
+              <a:t>Store</a:t>
+            </a:r>
+            <a:r>
+              <a:rPr sz="1600">
+                <a:solidFill>
+                  <a:srgbClr val="F6F6F8"/>
+                </a:solidFill>
+                <a:latin typeface="Aptos"/>
+              </a:rPr>
+              <a:t> — K, λ, PGLS slopes.</a:t>
             </a:r>
           </a:p>
           <a:p>
             <a:pPr algn="l">
               <a:spcAft>
-                <a:spcPts val="1120"/>
+                <a:spcPts val="960"/>
               </a:spcAft>
             </a:pPr>
             <a:r>
-              <a:rPr sz="1900">
+              <a:rPr sz="1600">
                 <a:solidFill>
                   <a:srgbClr val="D4A853"/>
                 </a:solidFill>
@@ -12065,32 +12123,32 @@
               <a:t>•  </a:t>
             </a:r>
             <a:r>
-              <a:rPr sz="1900" b="1">
-                <a:solidFill>
-                  <a:srgbClr val="D4A853"/>
-                </a:solidFill>
-                <a:latin typeface="Aptos"/>
-              </a:rPr>
-              <a:t>No PGLS slope flips</a:t>
-            </a:r>
-            <a:r>
-              <a:rPr sz="1900">
-                <a:solidFill>
-                  <a:srgbClr val="F6F6F8"/>
-                </a:solidFill>
-                <a:latin typeface="Aptos"/>
-              </a:rPr>
-              <a:t> — A ~ m stays flat under noise; m_dL ~ m_dS stays positive.</a:t>
+              <a:rPr sz="1600" b="1">
+                <a:solidFill>
+                  <a:srgbClr val="D4A853"/>
+                </a:solidFill>
+                <a:latin typeface="Aptos"/>
+              </a:rPr>
+              <a:t>After 100 iterations</a:t>
+            </a:r>
+            <a:r>
+              <a:rPr sz="1600">
+                <a:solidFill>
+                  <a:srgbClr val="F6F6F8"/>
+                </a:solidFill>
+                <a:latin typeface="Aptos"/>
+              </a:rPr>
+              <a:t> — you have 100 K values per pavo variable — a distribution, not a point.</a:t>
             </a:r>
           </a:p>
           <a:p>
             <a:pPr algn="l">
               <a:spcAft>
-                <a:spcPts val="1120"/>
+                <a:spcPts val="960"/>
               </a:spcAft>
             </a:pPr>
             <a:r>
-              <a:rPr sz="1900">
+              <a:rPr sz="1600">
                 <a:solidFill>
                   <a:srgbClr val="D4A853"/>
                 </a:solidFill>
@@ -12099,22 +12157,22 @@
               <a:t>•  </a:t>
             </a:r>
             <a:r>
-              <a:rPr sz="1900" b="1">
-                <a:solidFill>
-                  <a:srgbClr val="D4A853"/>
-                </a:solidFill>
-                <a:latin typeface="Aptos"/>
-              </a:rPr>
-              <a:t>Lesson for your family</a:t>
-            </a:r>
-            <a:r>
-              <a:rPr sz="1900">
-                <a:solidFill>
-                  <a:srgbClr val="F6F6F8"/>
-                </a:solidFill>
-                <a:latin typeface="Aptos"/>
-              </a:rPr>
-              <a:t> — if your headline relies on a variable with wide MC spread, soften the claim.</a:t>
+              <a:rPr sz="1600" b="1">
+                <a:solidFill>
+                  <a:srgbClr val="D4A853"/>
+                </a:solidFill>
+                <a:latin typeface="Aptos"/>
+              </a:rPr>
+              <a:t>Time cost</a:t>
+            </a:r>
+            <a:r>
+              <a:rPr sz="1600">
+                <a:solidFill>
+                  <a:srgbClr val="F6F6F8"/>
+                </a:solidFill>
+                <a:latin typeface="Aptos"/>
+              </a:rPr>
+              <a:t> — ~1.5–2 min for n_iter = 100, ~3–5 min for n_iter = 200.</a:t>
             </a:r>
           </a:p>
         </p:txBody>
@@ -12245,7 +12303,7 @@
                 </a:solidFill>
                 <a:latin typeface="Georgia"/>
               </a:rPr>
-              <a:t>Now you build your own bundle</a:t>
+              <a:t>Reading the Monte Carlo boxplot</a:t>
             </a:r>
           </a:p>
         </p:txBody>
@@ -12280,21 +12338,46 @@
                 </a:solidFill>
                 <a:latin typeface="Aptos"/>
               </a:rPr>
-              <a:t>15 min on FishView · same login as Demo 7</a:t>
-            </a:r>
-          </a:p>
-        </p:txBody>
-      </p:sp>
-      <p:sp>
-        <p:nvSpPr>
-          <p:cNvPr id="5" name="TextBox 4"/>
-          <p:cNvSpPr txBox="1"/>
-          <p:nvPr/>
-        </p:nvSpPr>
-        <p:spPr>
-          <a:xfrm>
-            <a:off x="822960" y="1783080"/>
-            <a:ext cx="10515600" cy="3200400"/>
+              <a:t>the gold dot is the observed value from Part 2</a:t>
+            </a:r>
+          </a:p>
+        </p:txBody>
+      </p:sp>
+      <p:pic>
+        <p:nvPicPr>
+          <p:cNvPr id="5" name="Picture 4" descr="mc-box-reading.png"/>
+          <p:cNvPicPr>
+            <a:picLocks noChangeAspect="1"/>
+          </p:cNvPicPr>
+          <p:nvPr/>
+        </p:nvPicPr>
+        <p:blipFill>
+          <a:blip r:embed="rId2"/>
+          <a:stretch>
+            <a:fillRect/>
+          </a:stretch>
+        </p:blipFill>
+        <p:spPr>
+          <a:xfrm>
+            <a:off x="411480" y="1858350"/>
+            <a:ext cx="7772400" cy="4421458"/>
+          </a:xfrm>
+          <a:prstGeom prst="rect">
+            <a:avLst/>
+          </a:prstGeom>
+          <a:effectLst/>
+        </p:spPr>
+      </p:pic>
+      <p:sp>
+        <p:nvSpPr>
+          <p:cNvPr id="6" name="TextBox 5"/>
+          <p:cNvSpPr txBox="1"/>
+          <p:nvPr/>
+        </p:nvSpPr>
+        <p:spPr>
+          <a:xfrm>
+            <a:off x="8321040" y="1783080"/>
+            <a:ext cx="3566160" cy="4663440"/>
           </a:xfrm>
           <a:prstGeom prst="rect">
             <a:avLst/>
@@ -12309,188 +12392,178 @@
           <a:p>
             <a:pPr algn="l">
               <a:spcAft>
-                <a:spcPts val="1200"/>
+                <a:spcPts val="960"/>
               </a:spcAft>
-              <a:defRPr sz="2200">
-                <a:solidFill>
-                  <a:srgbClr val="F6F6F8"/>
-                </a:solidFill>
-                <a:latin typeface="Aptos"/>
-              </a:defRPr>
             </a:pPr>
             <a:r>
-              <a:t>Pick ≥ 15 species across ≥ 5 genera from your family</a:t>
+              <a:rPr sz="1300">
+                <a:solidFill>
+                  <a:srgbClr val="D4A853"/>
+                </a:solidFill>
+                <a:latin typeface="Aptos"/>
+              </a:rPr>
+              <a:t>•  </a:t>
+            </a:r>
+            <a:r>
+              <a:rPr sz="1300" b="1">
+                <a:solidFill>
+                  <a:srgbClr val="D4A853"/>
+                </a:solidFill>
+                <a:latin typeface="Aptos"/>
+              </a:rPr>
+              <a:t>Gold inside the box</a:t>
+            </a:r>
+            <a:r>
+              <a:rPr sz="1300">
+                <a:solidFill>
+                  <a:srgbClr val="F6F6F8"/>
+                </a:solidFill>
+                <a:latin typeface="Aptos"/>
+              </a:rPr>
+              <a:t> — robust — your Part 2 conclusion holds.</a:t>
             </a:r>
           </a:p>
           <a:p>
             <a:pPr algn="l">
               <a:spcAft>
-                <a:spcPts val="1200"/>
+                <a:spcPts val="960"/>
               </a:spcAft>
-              <a:defRPr sz="2200">
-                <a:solidFill>
-                  <a:srgbClr val="F6F6F8"/>
-                </a:solidFill>
-                <a:latin typeface="Aptos"/>
-              </a:defRPr>
             </a:pPr>
             <a:r>
-              <a:t>Star one exemplar image per species</a:t>
+              <a:rPr sz="1300">
+                <a:solidFill>
+                  <a:srgbClr val="D4A853"/>
+                </a:solidFill>
+                <a:latin typeface="Aptos"/>
+              </a:rPr>
+              <a:t>•  </a:t>
+            </a:r>
+            <a:r>
+              <a:rPr sz="1300" b="1">
+                <a:solidFill>
+                  <a:srgbClr val="D4A853"/>
+                </a:solidFill>
+                <a:latin typeface="Aptos"/>
+              </a:rPr>
+              <a:t>Box centered at zero</a:t>
+            </a:r>
+            <a:r>
+              <a:rPr sz="1300">
+                <a:solidFill>
+                  <a:srgbClr val="F6F6F8"/>
+                </a:solidFill>
+                <a:latin typeface="Aptos"/>
+              </a:rPr>
+              <a:t> — no signal — fine if that was the claim.</a:t>
             </a:r>
           </a:p>
           <a:p>
             <a:pPr algn="l">
               <a:spcAft>
-                <a:spcPts val="1200"/>
+                <a:spcPts val="960"/>
               </a:spcAft>
-              <a:defRPr sz="2200">
-                <a:solidFill>
-                  <a:srgbClr val="F6F6F8"/>
-                </a:solidFill>
-                <a:latin typeface="Aptos"/>
-              </a:defRPr>
             </a:pPr>
             <a:r>
-              <a:t>Mark ONE species as the error-species → tick 5 images for it</a:t>
+              <a:rPr sz="1300">
+                <a:solidFill>
+                  <a:srgbClr val="D4A853"/>
+                </a:solidFill>
+                <a:latin typeface="Aptos"/>
+              </a:rPr>
+              <a:t>•  </a:t>
+            </a:r>
+            <a:r>
+              <a:rPr sz="1300" b="1">
+                <a:solidFill>
+                  <a:srgbClr val="D4A853"/>
+                </a:solidFill>
+                <a:latin typeface="Aptos"/>
+              </a:rPr>
+              <a:t>Box straddles zero</a:t>
+            </a:r>
+            <a:r>
+              <a:rPr sz="1300">
+                <a:solidFill>
+                  <a:srgbClr val="F6F6F8"/>
+                </a:solidFill>
+                <a:latin typeface="Aptos"/>
+              </a:rPr>
+              <a:t> — fragile — can't distinguish from no signal.</a:t>
             </a:r>
           </a:p>
           <a:p>
             <a:pPr algn="l">
               <a:spcAft>
-                <a:spcPts val="1200"/>
+                <a:spcPts val="960"/>
               </a:spcAft>
-              <a:defRPr sz="2200">
-                <a:solidFill>
-                  <a:srgbClr val="F6F6F8"/>
-                </a:solidFill>
-                <a:latin typeface="Aptos"/>
-              </a:defRPr>
             </a:pPr>
             <a:r>
-              <a:t>Hit Export. Drop the ZIP next to your Chaetodontidae bundle.</a:t>
-            </a:r>
-          </a:p>
-        </p:txBody>
-      </p:sp>
-      <p:sp>
-        <p:nvSpPr>
-          <p:cNvPr id="6" name="TextBox 5"/>
-          <p:cNvSpPr txBox="1"/>
-          <p:nvPr/>
-        </p:nvSpPr>
-        <p:spPr>
-          <a:xfrm>
-            <a:off x="640080" y="5120640"/>
-            <a:ext cx="10972800" cy="502920"/>
-          </a:xfrm>
-          <a:prstGeom prst="rect">
-            <a:avLst/>
-          </a:prstGeom>
-          <a:noFill/>
-        </p:spPr>
-        <p:txBody>
-          <a:bodyPr wrap="square" anchor="t">
-            <a:spAutoFit/>
-          </a:bodyPr>
-          <a:lstStyle/>
-          <a:p>
-            <a:pPr algn="ctr"/>
-            <a:r>
-              <a:rPr sz="2200" b="0" i="1">
-                <a:solidFill>
-                  <a:srgbClr val="E07A5F"/>
-                </a:solidFill>
-                <a:latin typeface="Aptos"/>
-              </a:rPr>
-              <a:t>The choices you make here ARE the analysis.</a:t>
-            </a:r>
-          </a:p>
-        </p:txBody>
-      </p:sp>
-      <p:sp>
-        <p:nvSpPr>
-          <p:cNvPr id="7" name="Rounded Rectangle 6"/>
-          <p:cNvSpPr/>
-          <p:nvPr/>
-        </p:nvSpPr>
-        <p:spPr>
-          <a:xfrm>
-            <a:off x="822960" y="5715000"/>
-            <a:ext cx="10515600" cy="822960"/>
-          </a:xfrm>
-          <a:prstGeom prst="roundRect">
-            <a:avLst/>
-          </a:prstGeom>
-          <a:solidFill>
-            <a:srgbClr val="1C2032"/>
-          </a:solidFill>
-          <a:ln w="9525">
-            <a:solidFill>
-              <a:srgbClr val="9196A8"/>
-            </a:solidFill>
-          </a:ln>
-          <a:effectLst/>
-        </p:spPr>
-        <p:style>
-          <a:lnRef idx="1">
-            <a:schemeClr val="accent1"/>
-          </a:lnRef>
-          <a:fillRef idx="3">
-            <a:schemeClr val="accent1"/>
-          </a:fillRef>
-          <a:effectRef idx="2">
-            <a:schemeClr val="accent1"/>
-          </a:effectRef>
-          <a:fontRef idx="minor">
-            <a:schemeClr val="lt1"/>
-          </a:fontRef>
-        </p:style>
-        <p:txBody>
-          <a:bodyPr rtlCol="0" anchor="ctr"/>
-          <a:lstStyle/>
-          <a:p>
-            <a:pPr algn="ctr"/>
-          </a:p>
-        </p:txBody>
-      </p:sp>
-      <p:sp>
-        <p:nvSpPr>
-          <p:cNvPr id="8" name="TextBox 7"/>
-          <p:cNvSpPr txBox="1"/>
-          <p:nvPr/>
-        </p:nvSpPr>
-        <p:spPr>
-          <a:xfrm>
-            <a:off x="1005840" y="5806440"/>
-            <a:ext cx="10241280" cy="731520"/>
-          </a:xfrm>
-          <a:prstGeom prst="rect">
-            <a:avLst/>
-          </a:prstGeom>
-          <a:noFill/>
-        </p:spPr>
-        <p:txBody>
-          <a:bodyPr wrap="square" anchor="t">
-            <a:spAutoFit/>
-          </a:bodyPr>
-          <a:lstStyle/>
-          <a:p>
-            <a:pPr algn="l"/>
-            <a:r>
-              <a:rPr sz="1400" b="0" i="1">
-                <a:solidFill>
-                  <a:srgbClr val="C4C6D0"/>
-                </a:solidFill>
-                <a:latin typeface="Aptos"/>
-              </a:rPr>
-              <a:t>Frédérich-paper species are starred for Acanthuridae, Chaetodontidae, Pomacanthidae. The 4 Labrid groups + Balistoidea pick cold — your K estimates are the first for your clade.</a:t>
-            </a:r>
-          </a:p>
-        </p:txBody>
-      </p:sp>
-      <p:sp>
-        <p:nvSpPr>
-          <p:cNvPr id="9" name="TextBox 8"/>
+              <a:rPr sz="1300">
+                <a:solidFill>
+                  <a:srgbClr val="D4A853"/>
+                </a:solidFill>
+                <a:latin typeface="Aptos"/>
+              </a:rPr>
+              <a:t>•  </a:t>
+            </a:r>
+            <a:r>
+              <a:rPr sz="1300" b="1">
+                <a:solidFill>
+                  <a:srgbClr val="D4A853"/>
+                </a:solidFill>
+                <a:latin typeface="Aptos"/>
+              </a:rPr>
+              <a:t>Gold outside the box</a:t>
+            </a:r>
+            <a:r>
+              <a:rPr sz="1300">
+                <a:solidFill>
+                  <a:srgbClr val="F6F6F8"/>
+                </a:solidFill>
+                <a:latin typeface="Aptos"/>
+              </a:rPr>
+              <a:t> — you got lucky — a different photo would have given a different K.</a:t>
+            </a:r>
+          </a:p>
+          <a:p>
+            <a:pPr algn="l">
+              <a:spcAft>
+                <a:spcPts val="960"/>
+              </a:spcAft>
+            </a:pPr>
+            <a:r>
+              <a:rPr sz="1300">
+                <a:solidFill>
+                  <a:srgbClr val="D4A853"/>
+                </a:solidFill>
+                <a:latin typeface="Aptos"/>
+              </a:rPr>
+              <a:t>•  </a:t>
+            </a:r>
+            <a:r>
+              <a:rPr sz="1300" b="1">
+                <a:solidFill>
+                  <a:srgbClr val="D4A853"/>
+                </a:solidFill>
+                <a:latin typeface="Aptos"/>
+              </a:rPr>
+              <a:t>For PGLS slopes</a:t>
+            </a:r>
+            <a:r>
+              <a:rPr sz="1300">
+                <a:solidFill>
+                  <a:srgbClr val="F6F6F8"/>
+                </a:solidFill>
+                <a:latin typeface="Aptos"/>
+              </a:rPr>
+              <a:t> — the test is whether zero lies inside the 95 % CI.</a:t>
+            </a:r>
+          </a:p>
+        </p:txBody>
+      </p:sp>
+      <p:sp>
+        <p:nvSpPr>
+          <p:cNvPr id="7" name="TextBox 6"/>
           <p:cNvSpPr txBox="1"/>
           <p:nvPr/>
         </p:nvSpPr>
@@ -12614,7 +12687,7 @@
                 </a:solidFill>
                 <a:latin typeface="Georgia"/>
               </a:rPr>
-              <a:t>What you turn in</a:t>
+              <a:t>Chaetodontidae K under noise</a:t>
             </a:r>
           </a:p>
         </p:txBody>
@@ -12649,154 +12722,46 @@
                 </a:solidFill>
                 <a:latin typeface="Aptos"/>
               </a:rPr>
-              <a:t>BruinLearn · end of day Wednesday</a:t>
-            </a:r>
-          </a:p>
-        </p:txBody>
-      </p:sp>
-      <p:sp>
-        <p:nvSpPr>
-          <p:cNvPr id="5" name="TextBox 4"/>
-          <p:cNvSpPr txBox="1"/>
-          <p:nvPr/>
-        </p:nvSpPr>
-        <p:spPr>
-          <a:xfrm>
-            <a:off x="822960" y="1691640"/>
-            <a:ext cx="10515600" cy="3200400"/>
-          </a:xfrm>
-          <a:prstGeom prst="rect">
-            <a:avLst/>
-          </a:prstGeom>
-          <a:noFill/>
-        </p:spPr>
-        <p:txBody>
-          <a:bodyPr wrap="square">
-            <a:spAutoFit/>
-          </a:bodyPr>
-          <a:lstStyle/>
-          <a:p>
-            <a:pPr algn="l">
-              <a:spcAft>
-                <a:spcPts val="1200"/>
-              </a:spcAft>
-              <a:defRPr sz="2200">
-                <a:solidFill>
-                  <a:srgbClr val="F6F6F8"/>
-                </a:solidFill>
-                <a:latin typeface="Aptos"/>
-              </a:defRPr>
-            </a:pPr>
-            <a:r>
-              <a:t>1.  Part 1 PCA scatter — your family</a:t>
-            </a:r>
-          </a:p>
-          <a:p>
-            <a:pPr algn="l">
-              <a:spcAft>
-                <a:spcPts val="1200"/>
-              </a:spcAft>
-              <a:defRPr sz="2200">
-                <a:solidFill>
-                  <a:srgbClr val="F6F6F8"/>
-                </a:solidFill>
-                <a:latin typeface="Aptos"/>
-              </a:defRPr>
-            </a:pPr>
-            <a:r>
-              <a:t>2.  Part 2 K plot + one-line interpretation per pavo variable</a:t>
-            </a:r>
-          </a:p>
-          <a:p>
-            <a:pPr algn="l">
-              <a:spcAft>
-                <a:spcPts val="1200"/>
-              </a:spcAft>
-              <a:defRPr sz="2200">
-                <a:solidFill>
-                  <a:srgbClr val="F6F6F8"/>
-                </a:solidFill>
-                <a:latin typeface="Aptos"/>
-              </a:defRPr>
-            </a:pPr>
-            <a:r>
-              <a:t>3.  Part 3 Monte-Carlo boxplot on K (or one PGLS slope)</a:t>
-            </a:r>
-          </a:p>
-          <a:p>
-            <a:pPr algn="l">
-              <a:spcAft>
-                <a:spcPts val="1200"/>
-              </a:spcAft>
-              <a:defRPr sz="2200">
-                <a:solidFill>
-                  <a:srgbClr val="F6F6F8"/>
-                </a:solidFill>
-                <a:latin typeface="Aptos"/>
-              </a:defRPr>
-            </a:pPr>
-            <a:r>
-              <a:t>4.  One paragraph (≤ 250 words) — branch by family:</a:t>
-            </a:r>
-          </a:p>
-        </p:txBody>
-      </p:sp>
-      <p:sp>
-        <p:nvSpPr>
-          <p:cNvPr id="6" name="Rounded Rectangle 5"/>
-          <p:cNvSpPr/>
-          <p:nvPr/>
-        </p:nvSpPr>
-        <p:spPr>
-          <a:xfrm>
-            <a:off x="822960" y="4846320"/>
-            <a:ext cx="10607040" cy="1645920"/>
-          </a:xfrm>
-          <a:prstGeom prst="roundRect">
-            <a:avLst/>
-          </a:prstGeom>
-          <a:solidFill>
-            <a:srgbClr val="1C2032"/>
-          </a:solidFill>
-          <a:ln w="9525">
-            <a:solidFill>
-              <a:srgbClr val="9196A8"/>
-            </a:solidFill>
-          </a:ln>
+              <a:t>100 Monte Carlo re-fits  ·  gold dot = observed (Part 2)</a:t>
+            </a:r>
+          </a:p>
+        </p:txBody>
+      </p:sp>
+      <p:pic>
+        <p:nvPicPr>
+          <p:cNvPr id="5" name="Picture 4" descr="mc-K-plot-1.png"/>
+          <p:cNvPicPr>
+            <a:picLocks noChangeAspect="1"/>
+          </p:cNvPicPr>
+          <p:nvPr/>
+        </p:nvPicPr>
+        <p:blipFill>
+          <a:blip r:embed="rId2"/>
+          <a:stretch>
+            <a:fillRect/>
+          </a:stretch>
+        </p:blipFill>
+        <p:spPr>
+          <a:xfrm>
+            <a:off x="758951" y="1463040"/>
+            <a:ext cx="7900416" cy="4937760"/>
+          </a:xfrm>
+          <a:prstGeom prst="rect">
+            <a:avLst/>
+          </a:prstGeom>
           <a:effectLst/>
         </p:spPr>
-        <p:style>
-          <a:lnRef idx="1">
-            <a:schemeClr val="accent1"/>
-          </a:lnRef>
-          <a:fillRef idx="3">
-            <a:schemeClr val="accent1"/>
-          </a:fillRef>
-          <a:effectRef idx="2">
-            <a:schemeClr val="accent1"/>
-          </a:effectRef>
-          <a:fontRef idx="minor">
-            <a:schemeClr val="lt1"/>
-          </a:fontRef>
-        </p:style>
-        <p:txBody>
-          <a:bodyPr rtlCol="0" anchor="ctr"/>
-          <a:lstStyle/>
-          <a:p>
-            <a:pPr algn="ctr"/>
-          </a:p>
-        </p:txBody>
-      </p:sp>
-      <p:sp>
-        <p:nvSpPr>
-          <p:cNvPr id="7" name="TextBox 6"/>
-          <p:cNvSpPr txBox="1"/>
-          <p:nvPr/>
-        </p:nvSpPr>
-        <p:spPr>
-          <a:xfrm>
-            <a:off x="1005840" y="4983480"/>
-            <a:ext cx="10332720" cy="1554480"/>
+      </p:pic>
+      <p:sp>
+        <p:nvSpPr>
+          <p:cNvPr id="6" name="TextBox 5"/>
+          <p:cNvSpPr txBox="1"/>
+          <p:nvPr/>
+        </p:nvSpPr>
+        <p:spPr>
+          <a:xfrm>
+            <a:off x="9006840" y="1828800"/>
+            <a:ext cx="2926080" cy="4480560"/>
           </a:xfrm>
           <a:prstGeom prst="rect">
             <a:avLst/>
@@ -12813,15 +12778,33 @@
               <a:spcAft>
                 <a:spcPts val="1000"/>
               </a:spcAft>
-              <a:defRPr sz="1400">
-                <a:solidFill>
-                  <a:srgbClr val="C4C6D0"/>
-                </a:solidFill>
-                <a:latin typeface="Aptos"/>
-              </a:defRPr>
             </a:pPr>
             <a:r>
-              <a:t>If your family is in Frédérich (Acanthuridae, Pomacanthidae):</a:t>
+              <a:rPr sz="1400">
+                <a:solidFill>
+                  <a:srgbClr val="D4A853"/>
+                </a:solidFill>
+                <a:latin typeface="Aptos"/>
+              </a:rPr>
+              <a:t>•  </a:t>
+            </a:r>
+            <a:r>
+              <a:rPr sz="1400" b="1">
+                <a:solidFill>
+                  <a:srgbClr val="D4A853"/>
+                </a:solidFill>
+                <a:latin typeface="Aptos"/>
+              </a:rPr>
+              <a:t>A's K stays high</a:t>
+            </a:r>
+            <a:r>
+              <a:rPr sz="1400">
+                <a:solidFill>
+                  <a:srgbClr val="F6F6F8"/>
+                </a:solidFill>
+                <a:latin typeface="Aptos"/>
+              </a:rPr>
+              <a:t> — robust under noise — pattern orientation really is conserved.</a:t>
             </a:r>
           </a:p>
           <a:p>
@@ -12829,15 +12812,33 @@
               <a:spcAft>
                 <a:spcPts val="1000"/>
               </a:spcAft>
-              <a:defRPr sz="1400">
-                <a:solidFill>
-                  <a:srgbClr val="C4C6D0"/>
-                </a:solidFill>
-                <a:latin typeface="Aptos"/>
-              </a:defRPr>
             </a:pPr>
             <a:r>
-              <a:t>    compare your per-variable Ks to their published multivariate K.</a:t>
+              <a:rPr sz="1400">
+                <a:solidFill>
+                  <a:srgbClr val="D4A853"/>
+                </a:solidFill>
+                <a:latin typeface="Aptos"/>
+              </a:rPr>
+              <a:t>•  </a:t>
+            </a:r>
+            <a:r>
+              <a:rPr sz="1400" b="1">
+                <a:solidFill>
+                  <a:srgbClr val="D4A853"/>
+                </a:solidFill>
+                <a:latin typeface="Aptos"/>
+              </a:rPr>
+              <a:t>Other 5</a:t>
+            </a:r>
+            <a:r>
+              <a:rPr sz="1400">
+                <a:solidFill>
+                  <a:srgbClr val="F6F6F8"/>
+                </a:solidFill>
+                <a:latin typeface="Aptos"/>
+              </a:rPr>
+              <a:t> — boxes hover near zero — consistent with the non-significant point estimates.</a:t>
             </a:r>
           </a:p>
           <a:p>
@@ -12845,38 +12846,40 @@
               <a:spcAft>
                 <a:spcPts val="1000"/>
               </a:spcAft>
-              <a:defRPr sz="1400">
-                <a:solidFill>
-                  <a:srgbClr val="C4C6D0"/>
-                </a:solidFill>
-                <a:latin typeface="Aptos"/>
-              </a:defRPr>
             </a:pPr>
             <a:r>
-              <a:t>If your family is NOT in Frédérich (4 Labrid groups, Balistoidea):</a:t>
-            </a:r>
-          </a:p>
-          <a:p>
-            <a:pPr algn="l">
-              <a:spcAft>
-                <a:spcPts val="1000"/>
-              </a:spcAft>
-              <a:defRPr sz="1400">
-                <a:solidFill>
-                  <a:srgbClr val="C4C6D0"/>
-                </a:solidFill>
-                <a:latin typeface="Aptos"/>
-              </a:defRPr>
-            </a:pPr>
-            <a:r>
-              <a:t>    these are the first reported Ks for your clade — describe the pattern.</a:t>
-            </a:r>
-          </a:p>
-        </p:txBody>
-      </p:sp>
-      <p:sp>
-        <p:nvSpPr>
-          <p:cNvPr id="8" name="TextBox 7"/>
+              <a:rPr sz="1400">
+                <a:solidFill>
+                  <a:srgbClr val="D4A853"/>
+                </a:solidFill>
+                <a:latin typeface="Aptos"/>
+              </a:rPr>
+              <a:t>•  </a:t>
+            </a:r>
+            <a:r>
+              <a:rPr sz="1400" b="1">
+                <a:solidFill>
+                  <a:srgbClr val="D4A853"/>
+                </a:solidFill>
+                <a:latin typeface="Aptos"/>
+              </a:rPr>
+              <a:t>Verdict</a:t>
+            </a:r>
+            <a:r>
+              <a:rPr sz="1400">
+                <a:solidFill>
+                  <a:srgbClr val="F6F6F8"/>
+                </a:solidFill>
+                <a:latin typeface="Aptos"/>
+              </a:rPr>
+              <a:t> — the headline result from Part 2 survives realistic measurement error.</a:t>
+            </a:r>
+          </a:p>
+        </p:txBody>
+      </p:sp>
+      <p:sp>
+        <p:nvSpPr>
+          <p:cNvPr id="7" name="TextBox 6"/>
           <p:cNvSpPr txBox="1"/>
           <p:nvPr/>
         </p:nvSpPr>
@@ -13000,7 +13003,7 @@
                 </a:solidFill>
                 <a:latin typeface="Georgia"/>
               </a:rPr>
-              <a:t>Tonight</a:t>
+              <a:t>Part 3 take-home</a:t>
             </a:r>
           </a:p>
         </p:txBody>
@@ -13035,7 +13038,7 @@
                 </a:solidFill>
                 <a:latin typeface="Aptos"/>
               </a:rPr>
-              <a:t>prep page  ·  ~20 minutes</a:t>
+              <a:t>what survives in Chaetodontidae</a:t>
             </a:r>
           </a:p>
         </p:txBody>
@@ -13048,8 +13051,43 @@
         </p:nvSpPr>
         <p:spPr>
           <a:xfrm>
-            <a:off x="822960" y="1828800"/>
-            <a:ext cx="10515600" cy="3657600"/>
+            <a:off x="502920" y="1508760"/>
+            <a:ext cx="11155680" cy="777240"/>
+          </a:xfrm>
+          <a:prstGeom prst="rect">
+            <a:avLst/>
+          </a:prstGeom>
+          <a:noFill/>
+        </p:spPr>
+        <p:txBody>
+          <a:bodyPr wrap="square" anchor="t">
+            <a:spAutoFit/>
+          </a:bodyPr>
+          <a:lstStyle/>
+          <a:p>
+            <a:pPr algn="l"/>
+            <a:r>
+              <a:rPr sz="2400" b="0" i="0">
+                <a:solidFill>
+                  <a:srgbClr val="F6F6F8"/>
+                </a:solidFill>
+                <a:latin typeface="Aptos"/>
+              </a:rPr>
+              <a:t>Once we admit one photograph isn't the truth, only A's signal still holds. Everything else stays labile.</a:t>
+            </a:r>
+          </a:p>
+        </p:txBody>
+      </p:sp>
+      <p:sp>
+        <p:nvSpPr>
+          <p:cNvPr id="6" name="TextBox 5"/>
+          <p:cNvSpPr txBox="1"/>
+          <p:nvPr/>
+        </p:nvSpPr>
+        <p:spPr>
+          <a:xfrm>
+            <a:off x="822960" y="2423160"/>
+            <a:ext cx="10972800" cy="3840480"/>
           </a:xfrm>
           <a:prstGeom prst="rect">
             <a:avLst/>
@@ -13064,100 +13102,137 @@
           <a:p>
             <a:pPr algn="l">
               <a:spcAft>
-                <a:spcPts val="1200"/>
+                <a:spcPts val="1120"/>
               </a:spcAft>
-              <a:defRPr sz="2400">
-                <a:solidFill>
-                  <a:srgbClr val="F6F6F8"/>
-                </a:solidFill>
-                <a:latin typeface="Aptos"/>
-              </a:defRPr>
             </a:pPr>
             <a:r>
-              <a:t>1.  Install R packages (one chunk on the prep page)</a:t>
+              <a:rPr sz="1900">
+                <a:solidFill>
+                  <a:srgbClr val="D4A853"/>
+                </a:solidFill>
+                <a:latin typeface="Aptos"/>
+              </a:rPr>
+              <a:t>•  </a:t>
+            </a:r>
+            <a:r>
+              <a:rPr sz="1900" b="1">
+                <a:solidFill>
+                  <a:srgbClr val="D4A853"/>
+                </a:solidFill>
+                <a:latin typeface="Aptos"/>
+              </a:rPr>
+              <a:t>Robust under noise</a:t>
+            </a:r>
+            <a:r>
+              <a:rPr sz="1900">
+                <a:solidFill>
+                  <a:srgbClr val="F6F6F8"/>
+                </a:solidFill>
+                <a:latin typeface="Aptos"/>
+              </a:rPr>
+              <a:t> — A — high K, tight MC distribution, gold dot inside the box.</a:t>
             </a:r>
           </a:p>
           <a:p>
             <a:pPr algn="l">
               <a:spcAft>
-                <a:spcPts val="1200"/>
+                <a:spcPts val="1120"/>
               </a:spcAft>
-              <a:defRPr sz="2400">
-                <a:solidFill>
-                  <a:srgbClr val="F6F6F8"/>
-                </a:solidFill>
-                <a:latin typeface="Aptos"/>
-              </a:defRPr>
             </a:pPr>
             <a:r>
-              <a:t>2.  Download the Chaetodontidae walkthrough bundle</a:t>
+              <a:rPr sz="1900">
+                <a:solidFill>
+                  <a:srgbClr val="D4A853"/>
+                </a:solidFill>
+                <a:latin typeface="Aptos"/>
+              </a:rPr>
+              <a:t>•  </a:t>
+            </a:r>
+            <a:r>
+              <a:rPr sz="1900" b="1">
+                <a:solidFill>
+                  <a:srgbClr val="D4A853"/>
+                </a:solidFill>
+                <a:latin typeface="Aptos"/>
+              </a:rPr>
+              <a:t>Robust at no-signal</a:t>
+            </a:r>
+            <a:r>
+              <a:rPr sz="1900">
+                <a:solidFill>
+                  <a:srgbClr val="F6F6F8"/>
+                </a:solidFill>
+                <a:latin typeface="Aptos"/>
+              </a:rPr>
+              <a:t> — m, Jc, Jt, m_dS, m_dL — boxes near zero, gold dot inside.</a:t>
             </a:r>
           </a:p>
           <a:p>
             <a:pPr algn="l">
               <a:spcAft>
-                <a:spcPts val="1200"/>
+                <a:spcPts val="1120"/>
               </a:spcAft>
-              <a:defRPr sz="2400">
-                <a:solidFill>
-                  <a:srgbClr val="F6F6F8"/>
-                </a:solidFill>
-                <a:latin typeface="Aptos"/>
-              </a:defRPr>
             </a:pPr>
             <a:r>
-              <a:t>3.  Run the readiness check until it prints PASS</a:t>
+              <a:rPr sz="1900">
+                <a:solidFill>
+                  <a:srgbClr val="D4A853"/>
+                </a:solidFill>
+                <a:latin typeface="Aptos"/>
+              </a:rPr>
+              <a:t>•  </a:t>
+            </a:r>
+            <a:r>
+              <a:rPr sz="1900" b="1">
+                <a:solidFill>
+                  <a:srgbClr val="D4A853"/>
+                </a:solidFill>
+                <a:latin typeface="Aptos"/>
+              </a:rPr>
+              <a:t>No PGLS slope flips</a:t>
+            </a:r>
+            <a:r>
+              <a:rPr sz="1900">
+                <a:solidFill>
+                  <a:srgbClr val="F6F6F8"/>
+                </a:solidFill>
+                <a:latin typeface="Aptos"/>
+              </a:rPr>
+              <a:t> — A ~ m stays flat under noise; m_dL ~ m_dS stays positive.</a:t>
             </a:r>
           </a:p>
           <a:p>
             <a:pPr algn="l">
               <a:spcAft>
-                <a:spcPts val="1200"/>
+                <a:spcPts val="1120"/>
               </a:spcAft>
-              <a:defRPr sz="2400">
-                <a:solidFill>
-                  <a:srgbClr val="F6F6F8"/>
-                </a:solidFill>
-                <a:latin typeface="Aptos"/>
-              </a:defRPr>
             </a:pPr>
             <a:r>
-              <a:t>4.  Confirm your Demo 7 FishView login still works</a:t>
-            </a:r>
-          </a:p>
-        </p:txBody>
-      </p:sp>
-      <p:sp>
-        <p:nvSpPr>
-          <p:cNvPr id="6" name="TextBox 5"/>
-          <p:cNvSpPr txBox="1"/>
-          <p:nvPr/>
-        </p:nvSpPr>
-        <p:spPr>
-          <a:xfrm>
-            <a:off x="822960" y="5760720"/>
-            <a:ext cx="10972800" cy="457200"/>
-          </a:xfrm>
-          <a:prstGeom prst="rect">
-            <a:avLst/>
-          </a:prstGeom>
-          <a:noFill/>
-        </p:spPr>
-        <p:txBody>
-          <a:bodyPr wrap="square" anchor="t">
-            <a:spAutoFit/>
-          </a:bodyPr>
-          <a:lstStyle/>
-          <a:p>
-            <a:pPr algn="l"/>
-            <a:r>
-              <a:rPr sz="2200" b="0" i="0">
-                <a:solidFill>
-                  <a:srgbClr val="D4A853"/>
-                </a:solidFill>
-                <a:latin typeface="Aptos"/>
-              </a:rPr>
-              <a:t>michaelalfaro.github.io/eeb187-demos/demo8/demo8-prep.html</a:t>
+              <a:rPr sz="1900">
+                <a:solidFill>
+                  <a:srgbClr val="D4A853"/>
+                </a:solidFill>
+                <a:latin typeface="Aptos"/>
+              </a:rPr>
+              <a:t>•  </a:t>
+            </a:r>
+            <a:r>
+              <a:rPr sz="1900" b="1">
+                <a:solidFill>
+                  <a:srgbClr val="D4A853"/>
+                </a:solidFill>
+                <a:latin typeface="Aptos"/>
+              </a:rPr>
+              <a:t>Lesson for your family</a:t>
+            </a:r>
+            <a:r>
+              <a:rPr sz="1900">
+                <a:solidFill>
+                  <a:srgbClr val="F6F6F8"/>
+                </a:solidFill>
+                <a:latin typeface="Aptos"/>
+              </a:rPr>
+              <a:t> — if your headline relies on a variable with wide MC spread, soften the claim.</a:t>
             </a:r>
           </a:p>
         </p:txBody>
@@ -13206,6 +13281,1049 @@
 </file>
 
 <file path=ppt/slides/slide36.xml><?xml version="1.0" encoding="utf-8"?>
+<p:sld xmlns:a="http://schemas.openxmlformats.org/drawingml/2006/main" xmlns:p="http://schemas.openxmlformats.org/presentationml/2006/main" xmlns:r="http://schemas.openxmlformats.org/officeDocument/2006/relationships">
+  <p:cSld>
+    <p:spTree>
+      <p:nvGrpSpPr>
+        <p:cNvPr id="1" name=""/>
+        <p:cNvGrpSpPr/>
+        <p:nvPr/>
+      </p:nvGrpSpPr>
+      <p:grpSpPr/>
+      <p:sp>
+        <p:nvSpPr>
+          <p:cNvPr id="2" name="Rectangle 1"/>
+          <p:cNvSpPr/>
+          <p:nvPr/>
+        </p:nvSpPr>
+        <p:spPr>
+          <a:xfrm>
+            <a:off x="0" y="0"/>
+            <a:ext cx="12191695" cy="6858000"/>
+          </a:xfrm>
+          <a:prstGeom prst="rect">
+            <a:avLst/>
+          </a:prstGeom>
+          <a:solidFill>
+            <a:srgbClr val="181B2B"/>
+          </a:solidFill>
+          <a:ln>
+            <a:noFill/>
+          </a:ln>
+        </p:spPr>
+        <p:style>
+          <a:lnRef idx="1">
+            <a:schemeClr val="accent1"/>
+          </a:lnRef>
+          <a:fillRef idx="3">
+            <a:schemeClr val="accent1"/>
+          </a:fillRef>
+          <a:effectRef idx="2">
+            <a:schemeClr val="accent1"/>
+          </a:effectRef>
+          <a:fontRef idx="minor">
+            <a:schemeClr val="lt1"/>
+          </a:fontRef>
+        </p:style>
+        <p:txBody>
+          <a:bodyPr rtlCol="0" anchor="ctr"/>
+          <a:lstStyle/>
+          <a:p>
+            <a:pPr algn="ctr"/>
+          </a:p>
+        </p:txBody>
+      </p:sp>
+      <p:sp>
+        <p:nvSpPr>
+          <p:cNvPr id="3" name="TextBox 2"/>
+          <p:cNvSpPr txBox="1"/>
+          <p:nvPr/>
+        </p:nvSpPr>
+        <p:spPr>
+          <a:xfrm>
+            <a:off x="502920" y="201168"/>
+            <a:ext cx="11338560" cy="868680"/>
+          </a:xfrm>
+          <a:prstGeom prst="rect">
+            <a:avLst/>
+          </a:prstGeom>
+          <a:noFill/>
+        </p:spPr>
+        <p:txBody>
+          <a:bodyPr wrap="square" anchor="t">
+            <a:spAutoFit/>
+          </a:bodyPr>
+          <a:lstStyle/>
+          <a:p>
+            <a:pPr algn="l"/>
+            <a:r>
+              <a:rPr sz="3200" b="1" i="0">
+                <a:solidFill>
+                  <a:srgbClr val="F6F6F8"/>
+                </a:solidFill>
+                <a:latin typeface="Georgia"/>
+              </a:rPr>
+              <a:t>Now you build your own bundle</a:t>
+            </a:r>
+          </a:p>
+        </p:txBody>
+      </p:sp>
+      <p:sp>
+        <p:nvSpPr>
+          <p:cNvPr id="4" name="TextBox 3"/>
+          <p:cNvSpPr txBox="1"/>
+          <p:nvPr/>
+        </p:nvSpPr>
+        <p:spPr>
+          <a:xfrm>
+            <a:off x="530352" y="1005840"/>
+            <a:ext cx="10972800" cy="365760"/>
+          </a:xfrm>
+          <a:prstGeom prst="rect">
+            <a:avLst/>
+          </a:prstGeom>
+          <a:noFill/>
+        </p:spPr>
+        <p:txBody>
+          <a:bodyPr wrap="square" anchor="t">
+            <a:spAutoFit/>
+          </a:bodyPr>
+          <a:lstStyle/>
+          <a:p>
+            <a:pPr algn="l"/>
+            <a:r>
+              <a:rPr sz="1600" b="0" i="0">
+                <a:solidFill>
+                  <a:srgbClr val="D4A853"/>
+                </a:solidFill>
+                <a:latin typeface="Aptos"/>
+              </a:rPr>
+              <a:t>15 min on FishView · same login as Demo 7</a:t>
+            </a:r>
+          </a:p>
+        </p:txBody>
+      </p:sp>
+      <p:sp>
+        <p:nvSpPr>
+          <p:cNvPr id="5" name="TextBox 4"/>
+          <p:cNvSpPr txBox="1"/>
+          <p:nvPr/>
+        </p:nvSpPr>
+        <p:spPr>
+          <a:xfrm>
+            <a:off x="822960" y="1783080"/>
+            <a:ext cx="10515600" cy="3200400"/>
+          </a:xfrm>
+          <a:prstGeom prst="rect">
+            <a:avLst/>
+          </a:prstGeom>
+          <a:noFill/>
+        </p:spPr>
+        <p:txBody>
+          <a:bodyPr wrap="square">
+            <a:spAutoFit/>
+          </a:bodyPr>
+          <a:lstStyle/>
+          <a:p>
+            <a:pPr algn="l">
+              <a:spcAft>
+                <a:spcPts val="1200"/>
+              </a:spcAft>
+              <a:defRPr sz="2200">
+                <a:solidFill>
+                  <a:srgbClr val="F6F6F8"/>
+                </a:solidFill>
+                <a:latin typeface="Aptos"/>
+              </a:defRPr>
+            </a:pPr>
+            <a:r>
+              <a:t>Pick ≥ 15 species across ≥ 5 genera from your family</a:t>
+            </a:r>
+          </a:p>
+          <a:p>
+            <a:pPr algn="l">
+              <a:spcAft>
+                <a:spcPts val="1200"/>
+              </a:spcAft>
+              <a:defRPr sz="2200">
+                <a:solidFill>
+                  <a:srgbClr val="F6F6F8"/>
+                </a:solidFill>
+                <a:latin typeface="Aptos"/>
+              </a:defRPr>
+            </a:pPr>
+            <a:r>
+              <a:t>Star one exemplar image per species</a:t>
+            </a:r>
+          </a:p>
+          <a:p>
+            <a:pPr algn="l">
+              <a:spcAft>
+                <a:spcPts val="1200"/>
+              </a:spcAft>
+              <a:defRPr sz="2200">
+                <a:solidFill>
+                  <a:srgbClr val="F6F6F8"/>
+                </a:solidFill>
+                <a:latin typeface="Aptos"/>
+              </a:defRPr>
+            </a:pPr>
+            <a:r>
+              <a:t>Mark ONE species as the error-species → tick 5 images for it</a:t>
+            </a:r>
+          </a:p>
+          <a:p>
+            <a:pPr algn="l">
+              <a:spcAft>
+                <a:spcPts val="1200"/>
+              </a:spcAft>
+              <a:defRPr sz="2200">
+                <a:solidFill>
+                  <a:srgbClr val="F6F6F8"/>
+                </a:solidFill>
+                <a:latin typeface="Aptos"/>
+              </a:defRPr>
+            </a:pPr>
+            <a:r>
+              <a:t>Hit Export. Drop the ZIP next to your Chaetodontidae bundle.</a:t>
+            </a:r>
+          </a:p>
+        </p:txBody>
+      </p:sp>
+      <p:sp>
+        <p:nvSpPr>
+          <p:cNvPr id="6" name="TextBox 5"/>
+          <p:cNvSpPr txBox="1"/>
+          <p:nvPr/>
+        </p:nvSpPr>
+        <p:spPr>
+          <a:xfrm>
+            <a:off x="640080" y="5120640"/>
+            <a:ext cx="10972800" cy="502920"/>
+          </a:xfrm>
+          <a:prstGeom prst="rect">
+            <a:avLst/>
+          </a:prstGeom>
+          <a:noFill/>
+        </p:spPr>
+        <p:txBody>
+          <a:bodyPr wrap="square" anchor="t">
+            <a:spAutoFit/>
+          </a:bodyPr>
+          <a:lstStyle/>
+          <a:p>
+            <a:pPr algn="ctr"/>
+            <a:r>
+              <a:rPr sz="2200" b="0" i="1">
+                <a:solidFill>
+                  <a:srgbClr val="E07A5F"/>
+                </a:solidFill>
+                <a:latin typeface="Aptos"/>
+              </a:rPr>
+              <a:t>The choices you make here ARE the analysis.</a:t>
+            </a:r>
+          </a:p>
+        </p:txBody>
+      </p:sp>
+      <p:sp>
+        <p:nvSpPr>
+          <p:cNvPr id="7" name="Rounded Rectangle 6"/>
+          <p:cNvSpPr/>
+          <p:nvPr/>
+        </p:nvSpPr>
+        <p:spPr>
+          <a:xfrm>
+            <a:off x="822960" y="5715000"/>
+            <a:ext cx="10515600" cy="822960"/>
+          </a:xfrm>
+          <a:prstGeom prst="roundRect">
+            <a:avLst/>
+          </a:prstGeom>
+          <a:solidFill>
+            <a:srgbClr val="1C2032"/>
+          </a:solidFill>
+          <a:ln w="9525">
+            <a:solidFill>
+              <a:srgbClr val="9196A8"/>
+            </a:solidFill>
+          </a:ln>
+          <a:effectLst/>
+        </p:spPr>
+        <p:style>
+          <a:lnRef idx="1">
+            <a:schemeClr val="accent1"/>
+          </a:lnRef>
+          <a:fillRef idx="3">
+            <a:schemeClr val="accent1"/>
+          </a:fillRef>
+          <a:effectRef idx="2">
+            <a:schemeClr val="accent1"/>
+          </a:effectRef>
+          <a:fontRef idx="minor">
+            <a:schemeClr val="lt1"/>
+          </a:fontRef>
+        </p:style>
+        <p:txBody>
+          <a:bodyPr rtlCol="0" anchor="ctr"/>
+          <a:lstStyle/>
+          <a:p>
+            <a:pPr algn="ctr"/>
+          </a:p>
+        </p:txBody>
+      </p:sp>
+      <p:sp>
+        <p:nvSpPr>
+          <p:cNvPr id="8" name="TextBox 7"/>
+          <p:cNvSpPr txBox="1"/>
+          <p:nvPr/>
+        </p:nvSpPr>
+        <p:spPr>
+          <a:xfrm>
+            <a:off x="1005840" y="5806440"/>
+            <a:ext cx="10241280" cy="731520"/>
+          </a:xfrm>
+          <a:prstGeom prst="rect">
+            <a:avLst/>
+          </a:prstGeom>
+          <a:noFill/>
+        </p:spPr>
+        <p:txBody>
+          <a:bodyPr wrap="square" anchor="t">
+            <a:spAutoFit/>
+          </a:bodyPr>
+          <a:lstStyle/>
+          <a:p>
+            <a:pPr algn="l"/>
+            <a:r>
+              <a:rPr sz="1400" b="0" i="1">
+                <a:solidFill>
+                  <a:srgbClr val="C4C6D0"/>
+                </a:solidFill>
+                <a:latin typeface="Aptos"/>
+              </a:rPr>
+              <a:t>Frédérich-paper species are starred for Acanthuridae, Chaetodontidae, Pomacanthidae. The 4 Labrid groups + Balistoidea pick cold — your K estimates are the first for your clade.</a:t>
+            </a:r>
+          </a:p>
+        </p:txBody>
+      </p:sp>
+      <p:sp>
+        <p:nvSpPr>
+          <p:cNvPr id="9" name="TextBox 8"/>
+          <p:cNvSpPr txBox="1"/>
+          <p:nvPr/>
+        </p:nvSpPr>
+        <p:spPr>
+          <a:xfrm>
+            <a:off x="502920" y="6510528"/>
+            <a:ext cx="6400800" cy="201168"/>
+          </a:xfrm>
+          <a:prstGeom prst="rect">
+            <a:avLst/>
+          </a:prstGeom>
+          <a:noFill/>
+        </p:spPr>
+        <p:txBody>
+          <a:bodyPr wrap="square" anchor="t">
+            <a:spAutoFit/>
+          </a:bodyPr>
+          <a:lstStyle/>
+          <a:p>
+            <a:pPr algn="l"/>
+            <a:r>
+              <a:rPr sz="1000" b="0" i="0">
+                <a:solidFill>
+                  <a:srgbClr val="9196A8"/>
+                </a:solidFill>
+                <a:latin typeface="Aptos"/>
+              </a:rPr>
+              <a:t>EEB 187 · Demo 8 walkthrough · May 20 2026</a:t>
+            </a:r>
+          </a:p>
+        </p:txBody>
+      </p:sp>
+    </p:spTree>
+  </p:cSld>
+  <p:clrMapOvr>
+    <a:masterClrMapping/>
+  </p:clrMapOvr>
+</p:sld>
+</file>
+
+<file path=ppt/slides/slide37.xml><?xml version="1.0" encoding="utf-8"?>
+<p:sld xmlns:a="http://schemas.openxmlformats.org/drawingml/2006/main" xmlns:p="http://schemas.openxmlformats.org/presentationml/2006/main" xmlns:r="http://schemas.openxmlformats.org/officeDocument/2006/relationships">
+  <p:cSld>
+    <p:spTree>
+      <p:nvGrpSpPr>
+        <p:cNvPr id="1" name=""/>
+        <p:cNvGrpSpPr/>
+        <p:nvPr/>
+      </p:nvGrpSpPr>
+      <p:grpSpPr/>
+      <p:sp>
+        <p:nvSpPr>
+          <p:cNvPr id="2" name="Rectangle 1"/>
+          <p:cNvSpPr/>
+          <p:nvPr/>
+        </p:nvSpPr>
+        <p:spPr>
+          <a:xfrm>
+            <a:off x="0" y="0"/>
+            <a:ext cx="12191695" cy="6858000"/>
+          </a:xfrm>
+          <a:prstGeom prst="rect">
+            <a:avLst/>
+          </a:prstGeom>
+          <a:solidFill>
+            <a:srgbClr val="181B2B"/>
+          </a:solidFill>
+          <a:ln>
+            <a:noFill/>
+          </a:ln>
+        </p:spPr>
+        <p:style>
+          <a:lnRef idx="1">
+            <a:schemeClr val="accent1"/>
+          </a:lnRef>
+          <a:fillRef idx="3">
+            <a:schemeClr val="accent1"/>
+          </a:fillRef>
+          <a:effectRef idx="2">
+            <a:schemeClr val="accent1"/>
+          </a:effectRef>
+          <a:fontRef idx="minor">
+            <a:schemeClr val="lt1"/>
+          </a:fontRef>
+        </p:style>
+        <p:txBody>
+          <a:bodyPr rtlCol="0" anchor="ctr"/>
+          <a:lstStyle/>
+          <a:p>
+            <a:pPr algn="ctr"/>
+          </a:p>
+        </p:txBody>
+      </p:sp>
+      <p:sp>
+        <p:nvSpPr>
+          <p:cNvPr id="3" name="TextBox 2"/>
+          <p:cNvSpPr txBox="1"/>
+          <p:nvPr/>
+        </p:nvSpPr>
+        <p:spPr>
+          <a:xfrm>
+            <a:off x="502920" y="201168"/>
+            <a:ext cx="11338560" cy="868680"/>
+          </a:xfrm>
+          <a:prstGeom prst="rect">
+            <a:avLst/>
+          </a:prstGeom>
+          <a:noFill/>
+        </p:spPr>
+        <p:txBody>
+          <a:bodyPr wrap="square" anchor="t">
+            <a:spAutoFit/>
+          </a:bodyPr>
+          <a:lstStyle/>
+          <a:p>
+            <a:pPr algn="l"/>
+            <a:r>
+              <a:rPr sz="3200" b="1" i="0">
+                <a:solidFill>
+                  <a:srgbClr val="F6F6F8"/>
+                </a:solidFill>
+                <a:latin typeface="Georgia"/>
+              </a:rPr>
+              <a:t>What you turn in</a:t>
+            </a:r>
+          </a:p>
+        </p:txBody>
+      </p:sp>
+      <p:sp>
+        <p:nvSpPr>
+          <p:cNvPr id="4" name="TextBox 3"/>
+          <p:cNvSpPr txBox="1"/>
+          <p:nvPr/>
+        </p:nvSpPr>
+        <p:spPr>
+          <a:xfrm>
+            <a:off x="530352" y="1005840"/>
+            <a:ext cx="10972800" cy="365760"/>
+          </a:xfrm>
+          <a:prstGeom prst="rect">
+            <a:avLst/>
+          </a:prstGeom>
+          <a:noFill/>
+        </p:spPr>
+        <p:txBody>
+          <a:bodyPr wrap="square" anchor="t">
+            <a:spAutoFit/>
+          </a:bodyPr>
+          <a:lstStyle/>
+          <a:p>
+            <a:pPr algn="l"/>
+            <a:r>
+              <a:rPr sz="1600" b="0" i="0">
+                <a:solidFill>
+                  <a:srgbClr val="D4A853"/>
+                </a:solidFill>
+                <a:latin typeface="Aptos"/>
+              </a:rPr>
+              <a:t>BruinLearn · end of day Wednesday</a:t>
+            </a:r>
+          </a:p>
+        </p:txBody>
+      </p:sp>
+      <p:sp>
+        <p:nvSpPr>
+          <p:cNvPr id="5" name="TextBox 4"/>
+          <p:cNvSpPr txBox="1"/>
+          <p:nvPr/>
+        </p:nvSpPr>
+        <p:spPr>
+          <a:xfrm>
+            <a:off x="822960" y="1691640"/>
+            <a:ext cx="10515600" cy="3200400"/>
+          </a:xfrm>
+          <a:prstGeom prst="rect">
+            <a:avLst/>
+          </a:prstGeom>
+          <a:noFill/>
+        </p:spPr>
+        <p:txBody>
+          <a:bodyPr wrap="square">
+            <a:spAutoFit/>
+          </a:bodyPr>
+          <a:lstStyle/>
+          <a:p>
+            <a:pPr algn="l">
+              <a:spcAft>
+                <a:spcPts val="1200"/>
+              </a:spcAft>
+              <a:defRPr sz="2200">
+                <a:solidFill>
+                  <a:srgbClr val="F6F6F8"/>
+                </a:solidFill>
+                <a:latin typeface="Aptos"/>
+              </a:defRPr>
+            </a:pPr>
+            <a:r>
+              <a:t>1.  Part 1 PCA scatter — your family</a:t>
+            </a:r>
+          </a:p>
+          <a:p>
+            <a:pPr algn="l">
+              <a:spcAft>
+                <a:spcPts val="1200"/>
+              </a:spcAft>
+              <a:defRPr sz="2200">
+                <a:solidFill>
+                  <a:srgbClr val="F6F6F8"/>
+                </a:solidFill>
+                <a:latin typeface="Aptos"/>
+              </a:defRPr>
+            </a:pPr>
+            <a:r>
+              <a:t>2.  Part 2 K plot + one-line interpretation per pavo variable</a:t>
+            </a:r>
+          </a:p>
+          <a:p>
+            <a:pPr algn="l">
+              <a:spcAft>
+                <a:spcPts val="1200"/>
+              </a:spcAft>
+              <a:defRPr sz="2200">
+                <a:solidFill>
+                  <a:srgbClr val="F6F6F8"/>
+                </a:solidFill>
+                <a:latin typeface="Aptos"/>
+              </a:defRPr>
+            </a:pPr>
+            <a:r>
+              <a:t>3.  Part 3 Monte-Carlo boxplot on K (or one PGLS slope)</a:t>
+            </a:r>
+          </a:p>
+          <a:p>
+            <a:pPr algn="l">
+              <a:spcAft>
+                <a:spcPts val="1200"/>
+              </a:spcAft>
+              <a:defRPr sz="2200">
+                <a:solidFill>
+                  <a:srgbClr val="F6F6F8"/>
+                </a:solidFill>
+                <a:latin typeface="Aptos"/>
+              </a:defRPr>
+            </a:pPr>
+            <a:r>
+              <a:t>4.  One paragraph (≤ 250 words) — branch by family:</a:t>
+            </a:r>
+          </a:p>
+        </p:txBody>
+      </p:sp>
+      <p:sp>
+        <p:nvSpPr>
+          <p:cNvPr id="6" name="Rounded Rectangle 5"/>
+          <p:cNvSpPr/>
+          <p:nvPr/>
+        </p:nvSpPr>
+        <p:spPr>
+          <a:xfrm>
+            <a:off x="822960" y="4846320"/>
+            <a:ext cx="10607040" cy="1645920"/>
+          </a:xfrm>
+          <a:prstGeom prst="roundRect">
+            <a:avLst/>
+          </a:prstGeom>
+          <a:solidFill>
+            <a:srgbClr val="1C2032"/>
+          </a:solidFill>
+          <a:ln w="9525">
+            <a:solidFill>
+              <a:srgbClr val="9196A8"/>
+            </a:solidFill>
+          </a:ln>
+          <a:effectLst/>
+        </p:spPr>
+        <p:style>
+          <a:lnRef idx="1">
+            <a:schemeClr val="accent1"/>
+          </a:lnRef>
+          <a:fillRef idx="3">
+            <a:schemeClr val="accent1"/>
+          </a:fillRef>
+          <a:effectRef idx="2">
+            <a:schemeClr val="accent1"/>
+          </a:effectRef>
+          <a:fontRef idx="minor">
+            <a:schemeClr val="lt1"/>
+          </a:fontRef>
+        </p:style>
+        <p:txBody>
+          <a:bodyPr rtlCol="0" anchor="ctr"/>
+          <a:lstStyle/>
+          <a:p>
+            <a:pPr algn="ctr"/>
+          </a:p>
+        </p:txBody>
+      </p:sp>
+      <p:sp>
+        <p:nvSpPr>
+          <p:cNvPr id="7" name="TextBox 6"/>
+          <p:cNvSpPr txBox="1"/>
+          <p:nvPr/>
+        </p:nvSpPr>
+        <p:spPr>
+          <a:xfrm>
+            <a:off x="1005840" y="4983480"/>
+            <a:ext cx="10332720" cy="1554480"/>
+          </a:xfrm>
+          <a:prstGeom prst="rect">
+            <a:avLst/>
+          </a:prstGeom>
+          <a:noFill/>
+        </p:spPr>
+        <p:txBody>
+          <a:bodyPr wrap="square">
+            <a:spAutoFit/>
+          </a:bodyPr>
+          <a:lstStyle/>
+          <a:p>
+            <a:pPr algn="l">
+              <a:spcAft>
+                <a:spcPts val="1000"/>
+              </a:spcAft>
+              <a:defRPr sz="1400">
+                <a:solidFill>
+                  <a:srgbClr val="C4C6D0"/>
+                </a:solidFill>
+                <a:latin typeface="Aptos"/>
+              </a:defRPr>
+            </a:pPr>
+            <a:r>
+              <a:t>If your family is in Frédérich (Acanthuridae, Pomacanthidae):</a:t>
+            </a:r>
+          </a:p>
+          <a:p>
+            <a:pPr algn="l">
+              <a:spcAft>
+                <a:spcPts val="1000"/>
+              </a:spcAft>
+              <a:defRPr sz="1400">
+                <a:solidFill>
+                  <a:srgbClr val="C4C6D0"/>
+                </a:solidFill>
+                <a:latin typeface="Aptos"/>
+              </a:defRPr>
+            </a:pPr>
+            <a:r>
+              <a:t>    compare your per-variable Ks to their published multivariate K.</a:t>
+            </a:r>
+          </a:p>
+          <a:p>
+            <a:pPr algn="l">
+              <a:spcAft>
+                <a:spcPts val="1000"/>
+              </a:spcAft>
+              <a:defRPr sz="1400">
+                <a:solidFill>
+                  <a:srgbClr val="C4C6D0"/>
+                </a:solidFill>
+                <a:latin typeface="Aptos"/>
+              </a:defRPr>
+            </a:pPr>
+            <a:r>
+              <a:t>If your family is NOT in Frédérich (4 Labrid groups, Balistoidea):</a:t>
+            </a:r>
+          </a:p>
+          <a:p>
+            <a:pPr algn="l">
+              <a:spcAft>
+                <a:spcPts val="1000"/>
+              </a:spcAft>
+              <a:defRPr sz="1400">
+                <a:solidFill>
+                  <a:srgbClr val="C4C6D0"/>
+                </a:solidFill>
+                <a:latin typeface="Aptos"/>
+              </a:defRPr>
+            </a:pPr>
+            <a:r>
+              <a:t>    these are the first reported Ks for your clade — describe the pattern.</a:t>
+            </a:r>
+          </a:p>
+        </p:txBody>
+      </p:sp>
+      <p:sp>
+        <p:nvSpPr>
+          <p:cNvPr id="8" name="TextBox 7"/>
+          <p:cNvSpPr txBox="1"/>
+          <p:nvPr/>
+        </p:nvSpPr>
+        <p:spPr>
+          <a:xfrm>
+            <a:off x="502920" y="6510528"/>
+            <a:ext cx="6400800" cy="201168"/>
+          </a:xfrm>
+          <a:prstGeom prst="rect">
+            <a:avLst/>
+          </a:prstGeom>
+          <a:noFill/>
+        </p:spPr>
+        <p:txBody>
+          <a:bodyPr wrap="square" anchor="t">
+            <a:spAutoFit/>
+          </a:bodyPr>
+          <a:lstStyle/>
+          <a:p>
+            <a:pPr algn="l"/>
+            <a:r>
+              <a:rPr sz="1000" b="0" i="0">
+                <a:solidFill>
+                  <a:srgbClr val="9196A8"/>
+                </a:solidFill>
+                <a:latin typeface="Aptos"/>
+              </a:rPr>
+              <a:t>EEB 187 · Demo 8 walkthrough · May 20 2026</a:t>
+            </a:r>
+          </a:p>
+        </p:txBody>
+      </p:sp>
+    </p:spTree>
+  </p:cSld>
+  <p:clrMapOvr>
+    <a:masterClrMapping/>
+  </p:clrMapOvr>
+</p:sld>
+</file>
+
+<file path=ppt/slides/slide38.xml><?xml version="1.0" encoding="utf-8"?>
+<p:sld xmlns:a="http://schemas.openxmlformats.org/drawingml/2006/main" xmlns:p="http://schemas.openxmlformats.org/presentationml/2006/main" xmlns:r="http://schemas.openxmlformats.org/officeDocument/2006/relationships">
+  <p:cSld>
+    <p:spTree>
+      <p:nvGrpSpPr>
+        <p:cNvPr id="1" name=""/>
+        <p:cNvGrpSpPr/>
+        <p:nvPr/>
+      </p:nvGrpSpPr>
+      <p:grpSpPr/>
+      <p:sp>
+        <p:nvSpPr>
+          <p:cNvPr id="2" name="Rectangle 1"/>
+          <p:cNvSpPr/>
+          <p:nvPr/>
+        </p:nvSpPr>
+        <p:spPr>
+          <a:xfrm>
+            <a:off x="0" y="0"/>
+            <a:ext cx="12191695" cy="6858000"/>
+          </a:xfrm>
+          <a:prstGeom prst="rect">
+            <a:avLst/>
+          </a:prstGeom>
+          <a:solidFill>
+            <a:srgbClr val="181B2B"/>
+          </a:solidFill>
+          <a:ln>
+            <a:noFill/>
+          </a:ln>
+        </p:spPr>
+        <p:style>
+          <a:lnRef idx="1">
+            <a:schemeClr val="accent1"/>
+          </a:lnRef>
+          <a:fillRef idx="3">
+            <a:schemeClr val="accent1"/>
+          </a:fillRef>
+          <a:effectRef idx="2">
+            <a:schemeClr val="accent1"/>
+          </a:effectRef>
+          <a:fontRef idx="minor">
+            <a:schemeClr val="lt1"/>
+          </a:fontRef>
+        </p:style>
+        <p:txBody>
+          <a:bodyPr rtlCol="0" anchor="ctr"/>
+          <a:lstStyle/>
+          <a:p>
+            <a:pPr algn="ctr"/>
+          </a:p>
+        </p:txBody>
+      </p:sp>
+      <p:sp>
+        <p:nvSpPr>
+          <p:cNvPr id="3" name="TextBox 2"/>
+          <p:cNvSpPr txBox="1"/>
+          <p:nvPr/>
+        </p:nvSpPr>
+        <p:spPr>
+          <a:xfrm>
+            <a:off x="502920" y="201168"/>
+            <a:ext cx="11338560" cy="868680"/>
+          </a:xfrm>
+          <a:prstGeom prst="rect">
+            <a:avLst/>
+          </a:prstGeom>
+          <a:noFill/>
+        </p:spPr>
+        <p:txBody>
+          <a:bodyPr wrap="square" anchor="t">
+            <a:spAutoFit/>
+          </a:bodyPr>
+          <a:lstStyle/>
+          <a:p>
+            <a:pPr algn="l"/>
+            <a:r>
+              <a:rPr sz="3200" b="1" i="0">
+                <a:solidFill>
+                  <a:srgbClr val="F6F6F8"/>
+                </a:solidFill>
+                <a:latin typeface="Georgia"/>
+              </a:rPr>
+              <a:t>Tonight</a:t>
+            </a:r>
+          </a:p>
+        </p:txBody>
+      </p:sp>
+      <p:sp>
+        <p:nvSpPr>
+          <p:cNvPr id="4" name="TextBox 3"/>
+          <p:cNvSpPr txBox="1"/>
+          <p:nvPr/>
+        </p:nvSpPr>
+        <p:spPr>
+          <a:xfrm>
+            <a:off x="530352" y="1005840"/>
+            <a:ext cx="10972800" cy="365760"/>
+          </a:xfrm>
+          <a:prstGeom prst="rect">
+            <a:avLst/>
+          </a:prstGeom>
+          <a:noFill/>
+        </p:spPr>
+        <p:txBody>
+          <a:bodyPr wrap="square" anchor="t">
+            <a:spAutoFit/>
+          </a:bodyPr>
+          <a:lstStyle/>
+          <a:p>
+            <a:pPr algn="l"/>
+            <a:r>
+              <a:rPr sz="1600" b="0" i="0">
+                <a:solidFill>
+                  <a:srgbClr val="D4A853"/>
+                </a:solidFill>
+                <a:latin typeface="Aptos"/>
+              </a:rPr>
+              <a:t>prep page  ·  ~20 minutes</a:t>
+            </a:r>
+          </a:p>
+        </p:txBody>
+      </p:sp>
+      <p:sp>
+        <p:nvSpPr>
+          <p:cNvPr id="5" name="TextBox 4"/>
+          <p:cNvSpPr txBox="1"/>
+          <p:nvPr/>
+        </p:nvSpPr>
+        <p:spPr>
+          <a:xfrm>
+            <a:off x="822960" y="1828800"/>
+            <a:ext cx="10515600" cy="3657600"/>
+          </a:xfrm>
+          <a:prstGeom prst="rect">
+            <a:avLst/>
+          </a:prstGeom>
+          <a:noFill/>
+        </p:spPr>
+        <p:txBody>
+          <a:bodyPr wrap="square">
+            <a:spAutoFit/>
+          </a:bodyPr>
+          <a:lstStyle/>
+          <a:p>
+            <a:pPr algn="l">
+              <a:spcAft>
+                <a:spcPts val="1200"/>
+              </a:spcAft>
+              <a:defRPr sz="2400">
+                <a:solidFill>
+                  <a:srgbClr val="F6F6F8"/>
+                </a:solidFill>
+                <a:latin typeface="Aptos"/>
+              </a:defRPr>
+            </a:pPr>
+            <a:r>
+              <a:t>1.  Install R packages (one chunk on the prep page)</a:t>
+            </a:r>
+          </a:p>
+          <a:p>
+            <a:pPr algn="l">
+              <a:spcAft>
+                <a:spcPts val="1200"/>
+              </a:spcAft>
+              <a:defRPr sz="2400">
+                <a:solidFill>
+                  <a:srgbClr val="F6F6F8"/>
+                </a:solidFill>
+                <a:latin typeface="Aptos"/>
+              </a:defRPr>
+            </a:pPr>
+            <a:r>
+              <a:t>2.  Download the Chaetodontidae walkthrough bundle</a:t>
+            </a:r>
+          </a:p>
+          <a:p>
+            <a:pPr algn="l">
+              <a:spcAft>
+                <a:spcPts val="1200"/>
+              </a:spcAft>
+              <a:defRPr sz="2400">
+                <a:solidFill>
+                  <a:srgbClr val="F6F6F8"/>
+                </a:solidFill>
+                <a:latin typeface="Aptos"/>
+              </a:defRPr>
+            </a:pPr>
+            <a:r>
+              <a:t>3.  Run the readiness check until it prints PASS</a:t>
+            </a:r>
+          </a:p>
+          <a:p>
+            <a:pPr algn="l">
+              <a:spcAft>
+                <a:spcPts val="1200"/>
+              </a:spcAft>
+              <a:defRPr sz="2400">
+                <a:solidFill>
+                  <a:srgbClr val="F6F6F8"/>
+                </a:solidFill>
+                <a:latin typeface="Aptos"/>
+              </a:defRPr>
+            </a:pPr>
+            <a:r>
+              <a:t>4.  Confirm your Demo 7 FishView login still works</a:t>
+            </a:r>
+          </a:p>
+        </p:txBody>
+      </p:sp>
+      <p:sp>
+        <p:nvSpPr>
+          <p:cNvPr id="6" name="TextBox 5"/>
+          <p:cNvSpPr txBox="1"/>
+          <p:nvPr/>
+        </p:nvSpPr>
+        <p:spPr>
+          <a:xfrm>
+            <a:off x="822960" y="5760720"/>
+            <a:ext cx="10972800" cy="457200"/>
+          </a:xfrm>
+          <a:prstGeom prst="rect">
+            <a:avLst/>
+          </a:prstGeom>
+          <a:noFill/>
+        </p:spPr>
+        <p:txBody>
+          <a:bodyPr wrap="square" anchor="t">
+            <a:spAutoFit/>
+          </a:bodyPr>
+          <a:lstStyle/>
+          <a:p>
+            <a:pPr algn="l"/>
+            <a:r>
+              <a:rPr sz="2200" b="0" i="0">
+                <a:solidFill>
+                  <a:srgbClr val="D4A853"/>
+                </a:solidFill>
+                <a:latin typeface="Aptos"/>
+              </a:rPr>
+              <a:t>michaelalfaro.github.io/eeb187-demos/demo8/demo8-prep.html</a:t>
+            </a:r>
+          </a:p>
+        </p:txBody>
+      </p:sp>
+      <p:sp>
+        <p:nvSpPr>
+          <p:cNvPr id="7" name="TextBox 6"/>
+          <p:cNvSpPr txBox="1"/>
+          <p:nvPr/>
+        </p:nvSpPr>
+        <p:spPr>
+          <a:xfrm>
+            <a:off x="502920" y="6510528"/>
+            <a:ext cx="6400800" cy="201168"/>
+          </a:xfrm>
+          <a:prstGeom prst="rect">
+            <a:avLst/>
+          </a:prstGeom>
+          <a:noFill/>
+        </p:spPr>
+        <p:txBody>
+          <a:bodyPr wrap="square" anchor="t">
+            <a:spAutoFit/>
+          </a:bodyPr>
+          <a:lstStyle/>
+          <a:p>
+            <a:pPr algn="l"/>
+            <a:r>
+              <a:rPr sz="1000" b="0" i="0">
+                <a:solidFill>
+                  <a:srgbClr val="9196A8"/>
+                </a:solidFill>
+                <a:latin typeface="Aptos"/>
+              </a:rPr>
+              <a:t>EEB 187 · Demo 8 walkthrough · May 20 2026</a:t>
+            </a:r>
+          </a:p>
+        </p:txBody>
+      </p:sp>
+    </p:spTree>
+  </p:cSld>
+  <p:clrMapOvr>
+    <a:masterClrMapping/>
+  </p:clrMapOvr>
+</p:sld>
+</file>
+
+<file path=ppt/slides/slide39.xml><?xml version="1.0" encoding="utf-8"?>
 <p:sld xmlns:a="http://schemas.openxmlformats.org/drawingml/2006/main" xmlns:p="http://schemas.openxmlformats.org/presentationml/2006/main" xmlns:r="http://schemas.openxmlformats.org/officeDocument/2006/relationships">
   <p:cSld>
     <p:spTree>

--- a/ta/demo8/slides/demo8-walkthrough-slides.pptx
+++ b/ta/demo8/slides/demo8-walkthrough-slides.pptx
@@ -44,6 +44,7 @@
     <p:sldId id="292" r:id="rId43"/>
     <p:sldId id="293" r:id="rId44"/>
     <p:sldId id="294" r:id="rId45"/>
+    <p:sldId id="295" r:id="rId46"/>
   </p:sldIdLst>
   <p:sldSz cx="12191695" cy="6858000" type="screen4x3"/>
   <p:notesSz cx="6858000" cy="9144000"/>
@@ -8354,8 +8355,8 @@
         </p:blipFill>
         <p:spPr>
           <a:xfrm>
-            <a:off x="1818615" y="2240280"/>
-            <a:ext cx="8615728" cy="3291840"/>
+            <a:off x="2073149" y="2240280"/>
+            <a:ext cx="8106660" cy="3291840"/>
           </a:xfrm>
           <a:prstGeom prst="rect">
             <a:avLst/>
@@ -9802,8 +9803,8 @@
         </p:nvSpPr>
         <p:spPr>
           <a:xfrm>
-            <a:off x="640080" y="2468880"/>
-            <a:ext cx="10972800" cy="3657600"/>
+            <a:off x="640080" y="2377440"/>
+            <a:ext cx="10972800" cy="3840480"/>
           </a:xfrm>
           <a:prstGeom prst="rect">
             <a:avLst/>
@@ -9818,11 +9819,11 @@
           <a:p>
             <a:pPr algn="l">
               <a:spcAft>
-                <a:spcPts val="1120"/>
+                <a:spcPts val="1040"/>
               </a:spcAft>
             </a:pPr>
             <a:r>
-              <a:rPr sz="1800">
+              <a:rPr sz="1600">
                 <a:solidFill>
                   <a:srgbClr val="D4A853"/>
                 </a:solidFill>
@@ -9831,7 +9832,7 @@
               <a:t>•  </a:t>
             </a:r>
             <a:r>
-              <a:rPr sz="1800" b="1">
+              <a:rPr sz="1600" b="1">
                 <a:solidFill>
                   <a:srgbClr val="D4A853"/>
                 </a:solidFill>
@@ -9840,23 +9841,23 @@
               <a:t>Same chunks, your data</a:t>
             </a:r>
             <a:r>
-              <a:rPr sz="1800">
-                <a:solidFill>
-                  <a:srgbClr val="F6F6F8"/>
-                </a:solidFill>
-                <a:latin typeface="Aptos"/>
-              </a:rPr>
-              <a:t> — after the in-class picker step, your species vector is your family's species — re-run §2.8 and rfishbase fetches FishBase data for them.</a:t>
+              <a:rPr sz="1600">
+                <a:solidFill>
+                  <a:srgbClr val="F6F6F8"/>
+                </a:solidFill>
+                <a:latin typeface="Aptos"/>
+              </a:rPr>
+              <a:t> — re-run §2.8 with your family's species vector — rfishbase fetches data unchanged.</a:t>
             </a:r>
           </a:p>
           <a:p>
             <a:pPr algn="l">
               <a:spcAft>
-                <a:spcPts val="1120"/>
+                <a:spcPts val="1040"/>
               </a:spcAft>
             </a:pPr>
             <a:r>
-              <a:rPr sz="1800">
+              <a:rPr sz="1600">
                 <a:solidFill>
                   <a:srgbClr val="D4A853"/>
                 </a:solidFill>
@@ -9865,32 +9866,32 @@
               <a:t>•  </a:t>
             </a:r>
             <a:r>
-              <a:rPr sz="1800" b="1">
-                <a:solidFill>
-                  <a:srgbClr val="D4A853"/>
-                </a:solidFill>
-                <a:latin typeface="Aptos"/>
-              </a:rPr>
-              <a:t>Sanity-check vs CSV</a:t>
-            </a:r>
-            <a:r>
-              <a:rPr sz="1800">
-                <a:solidFill>
-                  <a:srgbClr val="F6F6F8"/>
-                </a:solidFill>
-                <a:latin typeface="Aptos"/>
-              </a:rPr>
-              <a:t> — the worksheet prints max |Δ| per trait. Near zero = your live pull reproduces the CSV. Differences usually mean FishBase has updated values.</a:t>
+              <a:rPr sz="1600" b="1">
+                <a:solidFill>
+                  <a:srgbClr val="D4A853"/>
+                </a:solidFill>
+                <a:latin typeface="Aptos"/>
+              </a:rPr>
+              <a:t>Watch missing values</a:t>
+            </a:r>
+            <a:r>
+              <a:rPr sz="1600">
+                <a:solidFill>
+                  <a:srgbClr val="F6F6F8"/>
+                </a:solidFill>
+                <a:latin typeface="Aptos"/>
+              </a:rPr>
+              <a:t> — the missing-count line tells you which traits to drop from your PGLS / K calls.</a:t>
             </a:r>
           </a:p>
           <a:p>
             <a:pPr algn="l">
               <a:spcAft>
-                <a:spcPts val="1120"/>
+                <a:spcPts val="1040"/>
               </a:spcAft>
             </a:pPr>
             <a:r>
-              <a:rPr sz="1800">
+              <a:rPr sz="1600">
                 <a:solidFill>
                   <a:srgbClr val="D4A853"/>
                 </a:solidFill>
@@ -9899,32 +9900,32 @@
               <a:t>•  </a:t>
             </a:r>
             <a:r>
-              <a:rPr sz="1800" b="1">
-                <a:solidFill>
-                  <a:srgbClr val="D4A853"/>
-                </a:solidFill>
-                <a:latin typeface="Aptos"/>
-              </a:rPr>
-              <a:t>Watch missing values</a:t>
-            </a:r>
-            <a:r>
-              <a:rPr sz="1800">
-                <a:solidFill>
-                  <a:srgbClr val="F6F6F8"/>
-                </a:solidFill>
-                <a:latin typeface="Aptos"/>
-              </a:rPr>
-              <a:t> — not every species has all four traits. The missing-count line tells you which traits to drop from your PGLS / K calls.</a:t>
+              <a:rPr sz="1600" b="1">
+                <a:solidFill>
+                  <a:srgbClr val="D4A853"/>
+                </a:solidFill>
+                <a:latin typeface="Aptos"/>
+              </a:rPr>
+              <a:t>Inspect failed lookups</a:t>
+            </a:r>
+            <a:r>
+              <a:rPr sz="1600">
+                <a:solidFill>
+                  <a:srgbClr val="F6F6F8"/>
+                </a:solidFill>
+                <a:latin typeface="Aptos"/>
+              </a:rPr>
+              <a:t> — any species with NA on ALL four traits = FishBase didn't recognize the name.</a:t>
             </a:r>
           </a:p>
           <a:p>
             <a:pPr algn="l">
               <a:spcAft>
-                <a:spcPts val="1120"/>
+                <a:spcPts val="1040"/>
               </a:spcAft>
             </a:pPr>
             <a:r>
-              <a:rPr sz="1800">
+              <a:rPr sz="1600">
                 <a:solidFill>
                   <a:srgbClr val="D4A853"/>
                 </a:solidFill>
@@ -9933,7 +9934,75 @@
               <a:t>•  </a:t>
             </a:r>
             <a:r>
-              <a:rPr sz="1800" b="1">
+              <a:rPr sz="1600" b="1">
+                <a:solidFill>
+                  <a:srgbClr val="D4A853"/>
+                </a:solidFill>
+                <a:latin typeface="Aptos"/>
+              </a:rPr>
+              <a:t>Validate or look up synonyms</a:t>
+            </a:r>
+            <a:r>
+              <a:rPr sz="1600">
+                <a:solidFill>
+                  <a:srgbClr val="F6F6F8"/>
+                </a:solidFill>
+                <a:latin typeface="Aptos"/>
+              </a:rPr>
+              <a:t> — validate_names() returns the current FishBase name. synonyms() shows whether your tip is a junior synonym of an accepted species.</a:t>
+            </a:r>
+          </a:p>
+          <a:p>
+            <a:pPr algn="l">
+              <a:spcAft>
+                <a:spcPts val="1040"/>
+              </a:spcAft>
+            </a:pPr>
+            <a:r>
+              <a:rPr sz="1600">
+                <a:solidFill>
+                  <a:srgbClr val="D4A853"/>
+                </a:solidFill>
+                <a:latin typeface="Aptos"/>
+              </a:rPr>
+              <a:t>•  </a:t>
+            </a:r>
+            <a:r>
+              <a:rPr sz="1600" b="1">
+                <a:solidFill>
+                  <a:srgbClr val="D4A853"/>
+                </a:solidFill>
+                <a:latin typeface="Aptos"/>
+              </a:rPr>
+              <a:t>Override, don't rename</a:t>
+            </a:r>
+            <a:r>
+              <a:rPr sz="1600">
+                <a:solidFill>
+                  <a:srgbClr val="F6F6F8"/>
+                </a:solidFill>
+                <a:latin typeface="Aptos"/>
+              </a:rPr>
+              <a:t> — don't rename the tree tip — override fb_traits so the FishBase row attaches under your tree's name.</a:t>
+            </a:r>
+          </a:p>
+          <a:p>
+            <a:pPr algn="l">
+              <a:spcAft>
+                <a:spcPts val="1040"/>
+              </a:spcAft>
+            </a:pPr>
+            <a:r>
+              <a:rPr sz="1600">
+                <a:solidFill>
+                  <a:srgbClr val="D4A853"/>
+                </a:solidFill>
+                <a:latin typeface="Aptos"/>
+              </a:rPr>
+              <a:t>•  </a:t>
+            </a:r>
+            <a:r>
+              <a:rPr sz="1600" b="1">
                 <a:solidFill>
                   <a:srgbClr val="D4A853"/>
                 </a:solidFill>
@@ -9942,7 +10011,7 @@
               <a:t>Network out?</a:t>
             </a:r>
             <a:r>
-              <a:rPr sz="1800">
+              <a:rPr sz="1600">
                 <a:solidFill>
                   <a:srgbClr val="F6F6F8"/>
                 </a:solidFill>
@@ -10079,7 +10148,7 @@
                 </a:solidFill>
                 <a:latin typeface="Georgia"/>
               </a:rPr>
-              <a:t>Color signal vs ecology signal</a:t>
+              <a:t>Taxonomic reconciliation — when rfishbase doesn't recognize your tip</a:t>
             </a:r>
           </a:p>
         </p:txBody>
@@ -10114,36 +10183,46 @@
                 </a:solidFill>
                 <a:latin typeface="Aptos"/>
               </a:rPr>
-              <a:t>do close relatives share how they live more than how they look?</a:t>
-            </a:r>
-          </a:p>
-        </p:txBody>
-      </p:sp>
-      <p:pic>
-        <p:nvPicPr>
-          <p:cNvPr id="5" name="Picture 4" descr="signal-color-vs-ecology-1.png"/>
-          <p:cNvPicPr>
-            <a:picLocks noChangeAspect="1"/>
-          </p:cNvPicPr>
-          <p:nvPr/>
-        </p:nvPicPr>
-        <p:blipFill>
-          <a:blip r:embed="rId2"/>
-          <a:stretch>
-            <a:fillRect/>
-          </a:stretch>
-        </p:blipFill>
-        <p:spPr>
-          <a:xfrm>
-            <a:off x="502920" y="1617345"/>
-            <a:ext cx="8229600" cy="4629150"/>
-          </a:xfrm>
-          <a:prstGeom prst="rect">
-            <a:avLst/>
-          </a:prstGeom>
-          <a:effectLst/>
-        </p:spPr>
-      </p:pic>
+              <a:t>three causes, three fixes, in order of preference</a:t>
+            </a:r>
+          </a:p>
+        </p:txBody>
+      </p:sp>
+      <p:sp>
+        <p:nvSpPr>
+          <p:cNvPr id="5" name="TextBox 4"/>
+          <p:cNvSpPr txBox="1"/>
+          <p:nvPr/>
+        </p:nvSpPr>
+        <p:spPr>
+          <a:xfrm>
+            <a:off x="502920" y="1508760"/>
+            <a:ext cx="11155680" cy="777240"/>
+          </a:xfrm>
+          <a:prstGeom prst="rect">
+            <a:avLst/>
+          </a:prstGeom>
+          <a:noFill/>
+        </p:spPr>
+        <p:txBody>
+          <a:bodyPr wrap="square" anchor="t">
+            <a:spAutoFit/>
+          </a:bodyPr>
+          <a:lstStyle/>
+          <a:p>
+            <a:pPr algn="l"/>
+            <a:r>
+              <a:rPr sz="2400" b="0" i="0">
+                <a:solidFill>
+                  <a:srgbClr val="F6F6F8"/>
+                </a:solidFill>
+                <a:latin typeface="Aptos"/>
+              </a:rPr>
+              <a:t>validate_names() and synonyms() are your two diagnostic tools. Run them on whatever rfishbase returned NA for.</a:t>
+            </a:r>
+          </a:p>
+        </p:txBody>
+      </p:sp>
       <p:sp>
         <p:nvSpPr>
           <p:cNvPr id="6" name="TextBox 5"/>
@@ -10152,8 +10231,8 @@
         </p:nvSpPr>
         <p:spPr>
           <a:xfrm>
-            <a:off x="8823960" y="1783080"/>
-            <a:ext cx="3154680" cy="4572000"/>
+            <a:off x="640080" y="2377440"/>
+            <a:ext cx="10972800" cy="3840480"/>
           </a:xfrm>
           <a:prstGeom prst="rect">
             <a:avLst/>
@@ -10168,11 +10247,11 @@
           <a:p>
             <a:pPr algn="l">
               <a:spcAft>
-                <a:spcPts val="1000"/>
+                <a:spcPts val="1040"/>
               </a:spcAft>
             </a:pPr>
             <a:r>
-              <a:rPr sz="1400">
+              <a:rPr sz="1700">
                 <a:solidFill>
                   <a:srgbClr val="D4A853"/>
                 </a:solidFill>
@@ -10181,32 +10260,32 @@
               <a:t>•  </a:t>
             </a:r>
             <a:r>
-              <a:rPr sz="1400" b="1">
-                <a:solidFill>
-                  <a:srgbClr val="D4A853"/>
-                </a:solidFill>
-                <a:latin typeface="Aptos"/>
-              </a:rPr>
-              <a:t>Ecology bars above color bars</a:t>
-            </a:r>
-            <a:r>
-              <a:rPr sz="1400">
-                <a:solidFill>
-                  <a:srgbClr val="F6F6F8"/>
-                </a:solidFill>
-                <a:latin typeface="Aptos"/>
-              </a:rPr>
-              <a:t> — ecology is more phylogenetically conserved than pattern.</a:t>
+              <a:rPr sz="1700" b="1">
+                <a:solidFill>
+                  <a:srgbClr val="D4A853"/>
+                </a:solidFill>
+                <a:latin typeface="Aptos"/>
+              </a:rPr>
+              <a:t>Cause 1 — junior synonym (most common)</a:t>
+            </a:r>
+            <a:r>
+              <a:rPr sz="1700">
+                <a:solidFill>
+                  <a:srgbClr val="F6F6F8"/>
+                </a:solidFill>
+                <a:latin typeface="Aptos"/>
+              </a:rPr>
+              <a:t> — your tip uses an older name FishBase has reclassified. Fix: override fb_traits with the data from the valid name, keep the tree label.</a:t>
             </a:r>
           </a:p>
           <a:p>
             <a:pPr algn="l">
               <a:spcAft>
-                <a:spcPts val="1000"/>
+                <a:spcPts val="1040"/>
               </a:spcAft>
             </a:pPr>
             <a:r>
-              <a:rPr sz="1400">
+              <a:rPr sz="1700">
                 <a:solidFill>
                   <a:srgbClr val="D4A853"/>
                 </a:solidFill>
@@ -10215,32 +10294,32 @@
               <a:t>•  </a:t>
             </a:r>
             <a:r>
-              <a:rPr sz="1400" b="1">
-                <a:solidFill>
-                  <a:srgbClr val="D4A853"/>
-                </a:solidFill>
-                <a:latin typeface="Aptos"/>
-              </a:rPr>
-              <a:t>Interpretation</a:t>
-            </a:r>
-            <a:r>
-              <a:rPr sz="1400">
-                <a:solidFill>
-                  <a:srgbClr val="F6F6F8"/>
-                </a:solidFill>
-                <a:latin typeface="Aptos"/>
-              </a:rPr>
-              <a:t> — close relatives are tied by how they live more than how they look.</a:t>
+              <a:rPr sz="1700" b="1">
+                <a:solidFill>
+                  <a:srgbClr val="D4A853"/>
+                </a:solidFill>
+                <a:latin typeface="Aptos"/>
+              </a:rPr>
+              <a:t>Cause 2 — spelling typo</a:t>
+            </a:r>
+            <a:r>
+              <a:rPr sz="1700">
+                <a:solidFill>
+                  <a:srgbClr val="F6F6F8"/>
+                </a:solidFill>
+                <a:latin typeface="Aptos"/>
+              </a:rPr>
+              <a:t> — rare but happens. Fix: validate_names() will tell you the closest match. Re-export the bundle or hand-fix the species line.</a:t>
             </a:r>
           </a:p>
           <a:p>
             <a:pPr algn="l">
               <a:spcAft>
-                <a:spcPts val="1000"/>
+                <a:spcPts val="1040"/>
               </a:spcAft>
             </a:pPr>
             <a:r>
-              <a:rPr sz="1400">
+              <a:rPr sz="1700">
                 <a:solidFill>
                   <a:srgbClr val="D4A853"/>
                 </a:solidFill>
@@ -10249,32 +10328,32 @@
               <a:t>•  </a:t>
             </a:r>
             <a:r>
-              <a:rPr sz="1400" b="1">
-                <a:solidFill>
-                  <a:srgbClr val="D4A853"/>
-                </a:solidFill>
-                <a:latin typeface="Aptos"/>
-              </a:rPr>
-              <a:t>In our 19-tip sample</a:t>
-            </a:r>
-            <a:r>
-              <a:rPr sz="1400">
-                <a:solidFill>
-                  <a:srgbClr val="F6F6F8"/>
-                </a:solidFill>
-                <a:latin typeface="Aptos"/>
-              </a:rPr>
-              <a:t> — the bars overlap — sample size is the limiting factor.</a:t>
+              <a:rPr sz="1700" b="1">
+                <a:solidFill>
+                  <a:srgbClr val="D4A853"/>
+                </a:solidFill>
+                <a:latin typeface="Aptos"/>
+              </a:rPr>
+              <a:t>Cause 3 — not in FishBase</a:t>
+            </a:r>
+            <a:r>
+              <a:rPr sz="1700">
+                <a:solidFill>
+                  <a:srgbClr val="F6F6F8"/>
+                </a:solidFill>
+                <a:latin typeface="Aptos"/>
+              </a:rPr>
+              <a:t> — newly described, deep-water, or aquarium hybrid. Drop the species from the ecology subset (use comparative.data(..., na.omit=TRUE)).</a:t>
             </a:r>
           </a:p>
           <a:p>
             <a:pPr algn="l">
               <a:spcAft>
-                <a:spcPts val="1000"/>
+                <a:spcPts val="1040"/>
               </a:spcAft>
             </a:pPr>
             <a:r>
-              <a:rPr sz="1400">
+              <a:rPr sz="1700">
                 <a:solidFill>
                   <a:srgbClr val="D4A853"/>
                 </a:solidFill>
@@ -10283,22 +10362,22 @@
               <a:t>•  </a:t>
             </a:r>
             <a:r>
-              <a:rPr sz="1400" b="1">
-                <a:solidFill>
-                  <a:srgbClr val="D4A853"/>
-                </a:solidFill>
-                <a:latin typeface="Aptos"/>
-              </a:rPr>
-              <a:t>Your family</a:t>
-            </a:r>
-            <a:r>
-              <a:rPr sz="1400">
-                <a:solidFill>
-                  <a:srgbClr val="F6F6F8"/>
-                </a:solidFill>
-                <a:latin typeface="Aptos"/>
-              </a:rPr>
-              <a:t> — may show the pattern more sharply if it has deeper splits.</a:t>
+              <a:rPr sz="1700" b="1">
+                <a:solidFill>
+                  <a:srgbClr val="D4A853"/>
+                </a:solidFill>
+                <a:latin typeface="Aptos"/>
+              </a:rPr>
+              <a:t>Heads-up by family</a:t>
+            </a:r>
+            <a:r>
+              <a:rPr sz="1700">
+                <a:solidFill>
+                  <a:srgbClr val="F6F6F8"/>
+                </a:solidFill>
+                <a:latin typeface="Aptos"/>
+              </a:rPr>
+              <a:t> — fairy wrasses + parrotfishes + Coris-allies have the most active taxonomy; expect 1-4 mismatches. Acanthuridae + Pomacanthidae are usually clean.</a:t>
             </a:r>
           </a:p>
         </p:txBody>
@@ -10429,7 +10508,7 @@
                 </a:solidFill>
                 <a:latin typeface="Georgia"/>
               </a:rPr>
-              <a:t>Part 2 take-home for Chaetodontidae</a:t>
+              <a:t>Color signal vs ecology signal</a:t>
             </a:r>
           </a:p>
         </p:txBody>
@@ -10464,46 +10543,36 @@
                 </a:solidFill>
                 <a:latin typeface="Aptos"/>
               </a:rPr>
-              <a:t>the result we'll stress-test in Part 3</a:t>
-            </a:r>
-          </a:p>
-        </p:txBody>
-      </p:sp>
-      <p:sp>
-        <p:nvSpPr>
-          <p:cNvPr id="5" name="TextBox 4"/>
-          <p:cNvSpPr txBox="1"/>
-          <p:nvPr/>
-        </p:nvSpPr>
-        <p:spPr>
-          <a:xfrm>
-            <a:off x="502920" y="1508760"/>
-            <a:ext cx="11155680" cy="777240"/>
-          </a:xfrm>
-          <a:prstGeom prst="rect">
-            <a:avLst/>
-          </a:prstGeom>
-          <a:noFill/>
-        </p:spPr>
-        <p:txBody>
-          <a:bodyPr wrap="square" anchor="t">
-            <a:spAutoFit/>
-          </a:bodyPr>
-          <a:lstStyle/>
-          <a:p>
-            <a:pPr algn="l"/>
-            <a:r>
-              <a:rPr sz="2400" b="0" i="0">
-                <a:solidFill>
-                  <a:srgbClr val="F6F6F8"/>
-                </a:solidFill>
-                <a:latin typeface="Aptos"/>
-              </a:rPr>
-              <a:t>Pattern orientation is conserved within butterflyfishes; everything else is evolutionarily labile.</a:t>
-            </a:r>
-          </a:p>
-        </p:txBody>
-      </p:sp>
+              <a:t>do close relatives share how they live more than how they look?</a:t>
+            </a:r>
+          </a:p>
+        </p:txBody>
+      </p:sp>
+      <p:pic>
+        <p:nvPicPr>
+          <p:cNvPr id="5" name="Picture 4" descr="signal-color-vs-ecology-1.png"/>
+          <p:cNvPicPr>
+            <a:picLocks noChangeAspect="1"/>
+          </p:cNvPicPr>
+          <p:nvPr/>
+        </p:nvPicPr>
+        <p:blipFill>
+          <a:blip r:embed="rId2"/>
+          <a:stretch>
+            <a:fillRect/>
+          </a:stretch>
+        </p:blipFill>
+        <p:spPr>
+          <a:xfrm>
+            <a:off x="502920" y="1617345"/>
+            <a:ext cx="8229600" cy="4629150"/>
+          </a:xfrm>
+          <a:prstGeom prst="rect">
+            <a:avLst/>
+          </a:prstGeom>
+          <a:effectLst/>
+        </p:spPr>
+      </p:pic>
       <p:sp>
         <p:nvSpPr>
           <p:cNvPr id="6" name="TextBox 5"/>
@@ -10512,8 +10581,8 @@
         </p:nvSpPr>
         <p:spPr>
           <a:xfrm>
-            <a:off x="822960" y="2468880"/>
-            <a:ext cx="10972800" cy="3566160"/>
+            <a:off x="8823960" y="1783080"/>
+            <a:ext cx="3154680" cy="4572000"/>
           </a:xfrm>
           <a:prstGeom prst="rect">
             <a:avLst/>
@@ -10528,11 +10597,11 @@
           <a:p>
             <a:pPr algn="l">
               <a:spcAft>
-                <a:spcPts val="1120"/>
+                <a:spcPts val="1000"/>
               </a:spcAft>
             </a:pPr>
             <a:r>
-              <a:rPr sz="1900">
+              <a:rPr sz="1400">
                 <a:solidFill>
                   <a:srgbClr val="D4A853"/>
                 </a:solidFill>
@@ -10541,32 +10610,32 @@
               <a:t>•  </a:t>
             </a:r>
             <a:r>
-              <a:rPr sz="1900" b="1">
-                <a:solidFill>
-                  <a:srgbClr val="D4A853"/>
-                </a:solidFill>
-                <a:latin typeface="Aptos"/>
-              </a:rPr>
-              <a:t>Conserved</a:t>
-            </a:r>
-            <a:r>
-              <a:rPr sz="1900">
-                <a:solidFill>
-                  <a:srgbClr val="F6F6F8"/>
-                </a:solidFill>
-                <a:latin typeface="Aptos"/>
-              </a:rPr>
-              <a:t> — A (pattern aspect ratio) — bar-y stays bar-y, stripe-y stays stripe-y.</a:t>
+              <a:rPr sz="1400" b="1">
+                <a:solidFill>
+                  <a:srgbClr val="D4A853"/>
+                </a:solidFill>
+                <a:latin typeface="Aptos"/>
+              </a:rPr>
+              <a:t>Ecology bars above color bars</a:t>
+            </a:r>
+            <a:r>
+              <a:rPr sz="1400">
+                <a:solidFill>
+                  <a:srgbClr val="F6F6F8"/>
+                </a:solidFill>
+                <a:latin typeface="Aptos"/>
+              </a:rPr>
+              <a:t> — ecology is more phylogenetically conserved than pattern.</a:t>
             </a:r>
           </a:p>
           <a:p>
             <a:pPr algn="l">
               <a:spcAft>
-                <a:spcPts val="1120"/>
+                <a:spcPts val="1000"/>
               </a:spcAft>
             </a:pPr>
             <a:r>
-              <a:rPr sz="1900">
+              <a:rPr sz="1400">
                 <a:solidFill>
                   <a:srgbClr val="D4A853"/>
                 </a:solidFill>
@@ -10575,32 +10644,32 @@
               <a:t>•  </a:t>
             </a:r>
             <a:r>
-              <a:rPr sz="1900" b="1">
-                <a:solidFill>
-                  <a:srgbClr val="D4A853"/>
-                </a:solidFill>
-                <a:latin typeface="Aptos"/>
-              </a:rPr>
-              <a:t>Labile</a:t>
-            </a:r>
-            <a:r>
-              <a:rPr sz="1900">
-                <a:solidFill>
-                  <a:srgbClr val="F6F6F8"/>
-                </a:solidFill>
-                <a:latin typeface="Aptos"/>
-              </a:rPr>
-              <a:t> — m, Jc, Jt, m_dS, m_dL — complexity, palette use, transition variety, and both boundary strengths.</a:t>
+              <a:rPr sz="1400" b="1">
+                <a:solidFill>
+                  <a:srgbClr val="D4A853"/>
+                </a:solidFill>
+                <a:latin typeface="Aptos"/>
+              </a:rPr>
+              <a:t>Interpretation</a:t>
+            </a:r>
+            <a:r>
+              <a:rPr sz="1400">
+                <a:solidFill>
+                  <a:srgbClr val="F6F6F8"/>
+                </a:solidFill>
+                <a:latin typeface="Aptos"/>
+              </a:rPr>
+              <a:t> — close relatives are tied by how they live more than how they look.</a:t>
             </a:r>
           </a:p>
           <a:p>
             <a:pPr algn="l">
               <a:spcAft>
-                <a:spcPts val="1120"/>
+                <a:spcPts val="1000"/>
               </a:spcAft>
             </a:pPr>
             <a:r>
-              <a:rPr sz="1900">
+              <a:rPr sz="1400">
                 <a:solidFill>
                   <a:srgbClr val="D4A853"/>
                 </a:solidFill>
@@ -10609,32 +10678,32 @@
               <a:t>•  </a:t>
             </a:r>
             <a:r>
-              <a:rPr sz="1900" b="1">
-                <a:solidFill>
-                  <a:srgbClr val="D4A853"/>
-                </a:solidFill>
-                <a:latin typeface="Aptos"/>
-              </a:rPr>
-              <a:t>Bivariate story</a:t>
-            </a:r>
-            <a:r>
-              <a:rPr sz="1900">
-                <a:solidFill>
-                  <a:srgbClr val="F6F6F8"/>
-                </a:solidFill>
-                <a:latin typeface="Aptos"/>
-              </a:rPr>
-              <a:t> — after PGLS, m_dL ~ m_dS gains a significant positive slope; A ~ m stays flat.</a:t>
+              <a:rPr sz="1400" b="1">
+                <a:solidFill>
+                  <a:srgbClr val="D4A853"/>
+                </a:solidFill>
+                <a:latin typeface="Aptos"/>
+              </a:rPr>
+              <a:t>In our 19-tip sample</a:t>
+            </a:r>
+            <a:r>
+              <a:rPr sz="1400">
+                <a:solidFill>
+                  <a:srgbClr val="F6F6F8"/>
+                </a:solidFill>
+                <a:latin typeface="Aptos"/>
+              </a:rPr>
+              <a:t> — the bars overlap — sample size is the limiting factor.</a:t>
             </a:r>
           </a:p>
           <a:p>
             <a:pPr algn="l">
               <a:spcAft>
-                <a:spcPts val="1120"/>
+                <a:spcPts val="1000"/>
               </a:spcAft>
             </a:pPr>
             <a:r>
-              <a:rPr sz="1900">
+              <a:rPr sz="1400">
                 <a:solidFill>
                   <a:srgbClr val="D4A853"/>
                 </a:solidFill>
@@ -10643,22 +10712,22 @@
               <a:t>•  </a:t>
             </a:r>
             <a:r>
-              <a:rPr sz="1900" b="1">
-                <a:solidFill>
-                  <a:srgbClr val="D4A853"/>
-                </a:solidFill>
-                <a:latin typeface="Aptos"/>
-              </a:rPr>
-              <a:t>Matches Frédérich</a:t>
-            </a:r>
-            <a:r>
-              <a:rPr sz="1900">
-                <a:solidFill>
-                  <a:srgbClr val="F6F6F8"/>
-                </a:solidFill>
-                <a:latin typeface="Aptos"/>
-              </a:rPr>
-              <a:t> — qualitatively — color patterns largely evolve fast. The exception is A.</a:t>
+              <a:rPr sz="1400" b="1">
+                <a:solidFill>
+                  <a:srgbClr val="D4A853"/>
+                </a:solidFill>
+                <a:latin typeface="Aptos"/>
+              </a:rPr>
+              <a:t>Your family</a:t>
+            </a:r>
+            <a:r>
+              <a:rPr sz="1400">
+                <a:solidFill>
+                  <a:srgbClr val="F6F6F8"/>
+                </a:solidFill>
+                <a:latin typeface="Aptos"/>
+              </a:rPr>
+              <a:t> — may show the pattern more sharply if it has deeper splits.</a:t>
             </a:r>
           </a:p>
         </p:txBody>
@@ -10666,41 +10735,6 @@
       <p:sp>
         <p:nvSpPr>
           <p:cNvPr id="7" name="TextBox 6"/>
-          <p:cNvSpPr txBox="1"/>
-          <p:nvPr/>
-        </p:nvSpPr>
-        <p:spPr>
-          <a:xfrm>
-            <a:off x="822960" y="6126480"/>
-            <a:ext cx="10972800" cy="365760"/>
-          </a:xfrm>
-          <a:prstGeom prst="rect">
-            <a:avLst/>
-          </a:prstGeom>
-          <a:noFill/>
-        </p:spPr>
-        <p:txBody>
-          <a:bodyPr wrap="square" anchor="t">
-            <a:spAutoFit/>
-          </a:bodyPr>
-          <a:lstStyle/>
-          <a:p>
-            <a:pPr algn="l"/>
-            <a:r>
-              <a:rPr sz="2000" b="0" i="1">
-                <a:solidFill>
-                  <a:srgbClr val="E07A5F"/>
-                </a:solidFill>
-                <a:latin typeface="Aptos"/>
-              </a:rPr>
-              <a:t>Part 3 asks: how much of that survives noisy measurements?</a:t>
-            </a:r>
-          </a:p>
-        </p:txBody>
-      </p:sp>
-      <p:sp>
-        <p:nvSpPr>
-          <p:cNvPr id="8" name="TextBox 7"/>
           <p:cNvSpPr txBox="1"/>
           <p:nvPr/>
         </p:nvSpPr>
@@ -11219,7 +11253,7 @@
                 </a:solidFill>
                 <a:latin typeface="Georgia"/>
               </a:rPr>
-              <a:t>Why a single number is a lie</a:t>
+              <a:t>Part 2 take-home for Chaetodontidae</a:t>
             </a:r>
           </a:p>
         </p:txBody>
@@ -11254,36 +11288,46 @@
                 </a:solidFill>
                 <a:latin typeface="Aptos"/>
               </a:rPr>
-              <a:t>every pavo statistic came from one photograph</a:t>
-            </a:r>
-          </a:p>
-        </p:txBody>
-      </p:sp>
-      <p:pic>
-        <p:nvPicPr>
-          <p:cNvPr id="5" name="Picture 4" descr="one-photo-lie.png"/>
-          <p:cNvPicPr>
-            <a:picLocks noChangeAspect="1"/>
-          </p:cNvPicPr>
-          <p:nvPr/>
-        </p:nvPicPr>
-        <p:blipFill>
-          <a:blip r:embed="rId2"/>
-          <a:stretch>
-            <a:fillRect/>
-          </a:stretch>
-        </p:blipFill>
-        <p:spPr>
-          <a:xfrm>
-            <a:off x="687747" y="1691640"/>
-            <a:ext cx="7585624" cy="4572000"/>
-          </a:xfrm>
-          <a:prstGeom prst="rect">
-            <a:avLst/>
-          </a:prstGeom>
-          <a:effectLst/>
-        </p:spPr>
-      </p:pic>
+              <a:t>the result we'll stress-test in Part 3</a:t>
+            </a:r>
+          </a:p>
+        </p:txBody>
+      </p:sp>
+      <p:sp>
+        <p:nvSpPr>
+          <p:cNvPr id="5" name="TextBox 4"/>
+          <p:cNvSpPr txBox="1"/>
+          <p:nvPr/>
+        </p:nvSpPr>
+        <p:spPr>
+          <a:xfrm>
+            <a:off x="502920" y="1508760"/>
+            <a:ext cx="11155680" cy="777240"/>
+          </a:xfrm>
+          <a:prstGeom prst="rect">
+            <a:avLst/>
+          </a:prstGeom>
+          <a:noFill/>
+        </p:spPr>
+        <p:txBody>
+          <a:bodyPr wrap="square" anchor="t">
+            <a:spAutoFit/>
+          </a:bodyPr>
+          <a:lstStyle/>
+          <a:p>
+            <a:pPr algn="l"/>
+            <a:r>
+              <a:rPr sz="2400" b="0" i="0">
+                <a:solidFill>
+                  <a:srgbClr val="F6F6F8"/>
+                </a:solidFill>
+                <a:latin typeface="Aptos"/>
+              </a:rPr>
+              <a:t>Pattern orientation is conserved within butterflyfishes; everything else is evolutionarily labile.</a:t>
+            </a:r>
+          </a:p>
+        </p:txBody>
+      </p:sp>
       <p:sp>
         <p:nvSpPr>
           <p:cNvPr id="6" name="TextBox 5"/>
@@ -11292,8 +11336,8 @@
         </p:nvSpPr>
         <p:spPr>
           <a:xfrm>
-            <a:off x="8595360" y="1920240"/>
-            <a:ext cx="3383280" cy="4206240"/>
+            <a:off x="822960" y="2468880"/>
+            <a:ext cx="10972800" cy="3566160"/>
           </a:xfrm>
           <a:prstGeom prst="rect">
             <a:avLst/>
@@ -11308,11 +11352,11 @@
           <a:p>
             <a:pPr algn="l">
               <a:spcAft>
-                <a:spcPts val="1040"/>
+                <a:spcPts val="1120"/>
               </a:spcAft>
             </a:pPr>
             <a:r>
-              <a:rPr sz="1500">
+              <a:rPr sz="1900">
                 <a:solidFill>
                   <a:srgbClr val="D4A853"/>
                 </a:solidFill>
@@ -11321,32 +11365,32 @@
               <a:t>•  </a:t>
             </a:r>
             <a:r>
-              <a:rPr sz="1500" b="1">
-                <a:solidFill>
-                  <a:srgbClr val="D4A853"/>
-                </a:solidFill>
-                <a:latin typeface="Aptos"/>
-              </a:rPr>
-              <a:t>Same fish</a:t>
-            </a:r>
-            <a:r>
-              <a:rPr sz="1500">
-                <a:solidFill>
-                  <a:srgbClr val="F6F6F8"/>
-                </a:solidFill>
-                <a:latin typeface="Aptos"/>
-              </a:rPr>
-              <a:t> — Same species, same individual.</a:t>
+              <a:rPr sz="1900" b="1">
+                <a:solidFill>
+                  <a:srgbClr val="D4A853"/>
+                </a:solidFill>
+                <a:latin typeface="Aptos"/>
+              </a:rPr>
+              <a:t>Conserved</a:t>
+            </a:r>
+            <a:r>
+              <a:rPr sz="1900">
+                <a:solidFill>
+                  <a:srgbClr val="F6F6F8"/>
+                </a:solidFill>
+                <a:latin typeface="Aptos"/>
+              </a:rPr>
+              <a:t> — A (pattern aspect ratio) — bar-y stays bar-y, stripe-y stays stripe-y.</a:t>
             </a:r>
           </a:p>
           <a:p>
             <a:pPr algn="l">
               <a:spcAft>
-                <a:spcPts val="1040"/>
+                <a:spcPts val="1120"/>
               </a:spcAft>
             </a:pPr>
             <a:r>
-              <a:rPr sz="1500">
+              <a:rPr sz="1900">
                 <a:solidFill>
                   <a:srgbClr val="D4A853"/>
                 </a:solidFill>
@@ -11355,32 +11399,32 @@
               <a:t>•  </a:t>
             </a:r>
             <a:r>
-              <a:rPr sz="1500" b="1">
-                <a:solidFill>
-                  <a:srgbClr val="D4A853"/>
-                </a:solidFill>
-                <a:latin typeface="Aptos"/>
-              </a:rPr>
-              <a:t>Different photos</a:t>
-            </a:r>
-            <a:r>
-              <a:rPr sz="1500">
-                <a:solidFill>
-                  <a:srgbClr val="F6F6F8"/>
-                </a:solidFill>
-                <a:latin typeface="Aptos"/>
-              </a:rPr>
-              <a:t> — Different angle, light, framing.</a:t>
+              <a:rPr sz="1900" b="1">
+                <a:solidFill>
+                  <a:srgbClr val="D4A853"/>
+                </a:solidFill>
+                <a:latin typeface="Aptos"/>
+              </a:rPr>
+              <a:t>Labile</a:t>
+            </a:r>
+            <a:r>
+              <a:rPr sz="1900">
+                <a:solidFill>
+                  <a:srgbClr val="F6F6F8"/>
+                </a:solidFill>
+                <a:latin typeface="Aptos"/>
+              </a:rPr>
+              <a:t> — m, Jc, Jt, m_dS, m_dL — complexity, palette use, transition variety, and both boundary strengths.</a:t>
             </a:r>
           </a:p>
           <a:p>
             <a:pPr algn="l">
               <a:spcAft>
-                <a:spcPts val="1040"/>
+                <a:spcPts val="1120"/>
               </a:spcAft>
             </a:pPr>
             <a:r>
-              <a:rPr sz="1500">
+              <a:rPr sz="1900">
                 <a:solidFill>
                   <a:srgbClr val="D4A853"/>
                 </a:solidFill>
@@ -11389,32 +11433,32 @@
               <a:t>•  </a:t>
             </a:r>
             <a:r>
-              <a:rPr sz="1500" b="1">
-                <a:solidFill>
-                  <a:srgbClr val="D4A853"/>
-                </a:solidFill>
-                <a:latin typeface="Aptos"/>
-              </a:rPr>
-              <a:t>Different pavo values</a:t>
-            </a:r>
-            <a:r>
-              <a:rPr sz="1500">
-                <a:solidFill>
-                  <a:srgbClr val="F6F6F8"/>
-                </a:solidFill>
-                <a:latin typeface="Aptos"/>
-              </a:rPr>
-              <a:t> — the 'truth' is a distribution.</a:t>
+              <a:rPr sz="1900" b="1">
+                <a:solidFill>
+                  <a:srgbClr val="D4A853"/>
+                </a:solidFill>
+                <a:latin typeface="Aptos"/>
+              </a:rPr>
+              <a:t>Bivariate story</a:t>
+            </a:r>
+            <a:r>
+              <a:rPr sz="1900">
+                <a:solidFill>
+                  <a:srgbClr val="F6F6F8"/>
+                </a:solidFill>
+                <a:latin typeface="Aptos"/>
+              </a:rPr>
+              <a:t> — after PGLS, m_dL ~ m_dS gains a significant positive slope; A ~ m stays flat.</a:t>
             </a:r>
           </a:p>
           <a:p>
             <a:pPr algn="l">
               <a:spcAft>
-                <a:spcPts val="1040"/>
+                <a:spcPts val="1120"/>
               </a:spcAft>
             </a:pPr>
             <a:r>
-              <a:rPr sz="1500">
+              <a:rPr sz="1900">
                 <a:solidFill>
                   <a:srgbClr val="D4A853"/>
                 </a:solidFill>
@@ -11423,22 +11467,22 @@
               <a:t>•  </a:t>
             </a:r>
             <a:r>
-              <a:rPr sz="1500" b="1">
-                <a:solidFill>
-                  <a:srgbClr val="D4A853"/>
-                </a:solidFill>
-                <a:latin typeface="Aptos"/>
-              </a:rPr>
-              <a:t>Part 3</a:t>
-            </a:r>
-            <a:r>
-              <a:rPr sz="1500">
-                <a:solidFill>
-                  <a:srgbClr val="F6F6F8"/>
-                </a:solidFill>
-                <a:latin typeface="Aptos"/>
-              </a:rPr>
-              <a:t> — asks how much that distribution matters.</a:t>
+              <a:rPr sz="1900" b="1">
+                <a:solidFill>
+                  <a:srgbClr val="D4A853"/>
+                </a:solidFill>
+                <a:latin typeface="Aptos"/>
+              </a:rPr>
+              <a:t>Matches Frédérich</a:t>
+            </a:r>
+            <a:r>
+              <a:rPr sz="1900">
+                <a:solidFill>
+                  <a:srgbClr val="F6F6F8"/>
+                </a:solidFill>
+                <a:latin typeface="Aptos"/>
+              </a:rPr>
+              <a:t> — qualitatively — color patterns largely evolve fast. The exception is A.</a:t>
             </a:r>
           </a:p>
         </p:txBody>
@@ -11446,6 +11490,41 @@
       <p:sp>
         <p:nvSpPr>
           <p:cNvPr id="7" name="TextBox 6"/>
+          <p:cNvSpPr txBox="1"/>
+          <p:nvPr/>
+        </p:nvSpPr>
+        <p:spPr>
+          <a:xfrm>
+            <a:off x="822960" y="6126480"/>
+            <a:ext cx="10972800" cy="365760"/>
+          </a:xfrm>
+          <a:prstGeom prst="rect">
+            <a:avLst/>
+          </a:prstGeom>
+          <a:noFill/>
+        </p:spPr>
+        <p:txBody>
+          <a:bodyPr wrap="square" anchor="t">
+            <a:spAutoFit/>
+          </a:bodyPr>
+          <a:lstStyle/>
+          <a:p>
+            <a:pPr algn="l"/>
+            <a:r>
+              <a:rPr sz="2000" b="0" i="1">
+                <a:solidFill>
+                  <a:srgbClr val="E07A5F"/>
+                </a:solidFill>
+                <a:latin typeface="Aptos"/>
+              </a:rPr>
+              <a:t>Part 3 asks: how much of that survives noisy measurements?</a:t>
+            </a:r>
+          </a:p>
+        </p:txBody>
+      </p:sp>
+      <p:sp>
+        <p:nvSpPr>
+          <p:cNvPr id="8" name="TextBox 7"/>
           <p:cNvSpPr txBox="1"/>
           <p:nvPr/>
         </p:nvSpPr>
@@ -11569,7 +11648,7 @@
                 </a:solidFill>
                 <a:latin typeface="Georgia"/>
               </a:rPr>
-              <a:t>The 5-image error stack</a:t>
+              <a:t>Why a single number is a lie</a:t>
             </a:r>
           </a:p>
         </p:txBody>
@@ -11604,14 +11683,14 @@
                 </a:solidFill>
                 <a:latin typeface="Aptos"/>
               </a:rPr>
-              <a:t>one species photographed 5 times → 5 pavo values per variable</a:t>
+              <a:t>every pavo statistic came from one photograph</a:t>
             </a:r>
           </a:p>
         </p:txBody>
       </p:sp>
       <p:pic>
         <p:nvPicPr>
-          <p:cNvPr id="5" name="Picture 4" descr="error-strip-1.png"/>
+          <p:cNvPr id="5" name="Picture 4" descr="one-photo-lie.png"/>
           <p:cNvPicPr>
             <a:picLocks noChangeAspect="1"/>
           </p:cNvPicPr>
@@ -11625,8 +11704,8 @@
         </p:blipFill>
         <p:spPr>
           <a:xfrm>
-            <a:off x="502920" y="1617345"/>
-            <a:ext cx="8229600" cy="4629150"/>
+            <a:off x="687747" y="1691640"/>
+            <a:ext cx="7585624" cy="4572000"/>
           </a:xfrm>
           <a:prstGeom prst="rect">
             <a:avLst/>
@@ -11642,8 +11721,8 @@
         </p:nvSpPr>
         <p:spPr>
           <a:xfrm>
-            <a:off x="8823960" y="1783080"/>
-            <a:ext cx="3154680" cy="4572000"/>
+            <a:off x="8595360" y="1920240"/>
+            <a:ext cx="3383280" cy="4206240"/>
           </a:xfrm>
           <a:prstGeom prst="rect">
             <a:avLst/>
@@ -11658,11 +11737,11 @@
           <a:p>
             <a:pPr algn="l">
               <a:spcAft>
-                <a:spcPts val="1000"/>
+                <a:spcPts val="1040"/>
               </a:spcAft>
             </a:pPr>
             <a:r>
-              <a:rPr sz="1400">
+              <a:rPr sz="1500">
                 <a:solidFill>
                   <a:srgbClr val="D4A853"/>
                 </a:solidFill>
@@ -11671,32 +11750,32 @@
               <a:t>•  </a:t>
             </a:r>
             <a:r>
-              <a:rPr sz="1400" b="1">
-                <a:solidFill>
-                  <a:srgbClr val="D4A853"/>
-                </a:solidFill>
-                <a:latin typeface="Aptos"/>
-              </a:rPr>
-              <a:t>Dots</a:t>
-            </a:r>
-            <a:r>
-              <a:rPr sz="1400">
-                <a:solidFill>
-                  <a:srgbClr val="F6F6F8"/>
-                </a:solidFill>
-                <a:latin typeface="Aptos"/>
-              </a:rPr>
-              <a:t> — one pavo value per photograph.</a:t>
+              <a:rPr sz="1500" b="1">
+                <a:solidFill>
+                  <a:srgbClr val="D4A853"/>
+                </a:solidFill>
+                <a:latin typeface="Aptos"/>
+              </a:rPr>
+              <a:t>Same fish</a:t>
+            </a:r>
+            <a:r>
+              <a:rPr sz="1500">
+                <a:solidFill>
+                  <a:srgbClr val="F6F6F8"/>
+                </a:solidFill>
+                <a:latin typeface="Aptos"/>
+              </a:rPr>
+              <a:t> — Same species, same individual.</a:t>
             </a:r>
           </a:p>
           <a:p>
             <a:pPr algn="l">
               <a:spcAft>
-                <a:spcPts val="1000"/>
+                <a:spcPts val="1040"/>
               </a:spcAft>
             </a:pPr>
             <a:r>
-              <a:rPr sz="1400">
+              <a:rPr sz="1500">
                 <a:solidFill>
                   <a:srgbClr val="D4A853"/>
                 </a:solidFill>
@@ -11705,32 +11784,32 @@
               <a:t>•  </a:t>
             </a:r>
             <a:r>
-              <a:rPr sz="1400" b="1">
-                <a:solidFill>
-                  <a:srgbClr val="D4A853"/>
-                </a:solidFill>
-                <a:latin typeface="Aptos"/>
-              </a:rPr>
-              <a:t>Bar</a:t>
-            </a:r>
-            <a:r>
-              <a:rPr sz="1400">
-                <a:solidFill>
-                  <a:srgbClr val="F6F6F8"/>
-                </a:solidFill>
-                <a:latin typeface="Aptos"/>
-              </a:rPr>
-              <a:t> — the 5-photo mean.</a:t>
+              <a:rPr sz="1500" b="1">
+                <a:solidFill>
+                  <a:srgbClr val="D4A853"/>
+                </a:solidFill>
+                <a:latin typeface="Aptos"/>
+              </a:rPr>
+              <a:t>Different photos</a:t>
+            </a:r>
+            <a:r>
+              <a:rPr sz="1500">
+                <a:solidFill>
+                  <a:srgbClr val="F6F6F8"/>
+                </a:solidFill>
+                <a:latin typeface="Aptos"/>
+              </a:rPr>
+              <a:t> — Different angle, light, framing.</a:t>
             </a:r>
           </a:p>
           <a:p>
             <a:pPr algn="l">
               <a:spcAft>
-                <a:spcPts val="1000"/>
+                <a:spcPts val="1040"/>
               </a:spcAft>
             </a:pPr>
             <a:r>
-              <a:rPr sz="1400">
+              <a:rPr sz="1500">
                 <a:solidFill>
                   <a:srgbClr val="D4A853"/>
                 </a:solidFill>
@@ -11739,32 +11818,32 @@
               <a:t>•  </a:t>
             </a:r>
             <a:r>
-              <a:rPr sz="1400" b="1">
-                <a:solidFill>
-                  <a:srgbClr val="D4A853"/>
-                </a:solidFill>
-                <a:latin typeface="Aptos"/>
-              </a:rPr>
-              <a:t>Tight clusters</a:t>
-            </a:r>
-            <a:r>
-              <a:rPr sz="1400">
-                <a:solidFill>
-                  <a:srgbClr val="F6F6F8"/>
-                </a:solidFill>
-                <a:latin typeface="Aptos"/>
-              </a:rPr>
-              <a:t> — pavo is reliable for that variable.</a:t>
+              <a:rPr sz="1500" b="1">
+                <a:solidFill>
+                  <a:srgbClr val="D4A853"/>
+                </a:solidFill>
+                <a:latin typeface="Aptos"/>
+              </a:rPr>
+              <a:t>Different pavo values</a:t>
+            </a:r>
+            <a:r>
+              <a:rPr sz="1500">
+                <a:solidFill>
+                  <a:srgbClr val="F6F6F8"/>
+                </a:solidFill>
+                <a:latin typeface="Aptos"/>
+              </a:rPr>
+              <a:t> — the 'truth' is a distribution.</a:t>
             </a:r>
           </a:p>
           <a:p>
             <a:pPr algn="l">
               <a:spcAft>
-                <a:spcPts val="1000"/>
+                <a:spcPts val="1040"/>
               </a:spcAft>
             </a:pPr>
             <a:r>
-              <a:rPr sz="1400">
+              <a:rPr sz="1500">
                 <a:solidFill>
                   <a:srgbClr val="D4A853"/>
                 </a:solidFill>
@@ -11773,56 +11852,22 @@
               <a:t>•  </a:t>
             </a:r>
             <a:r>
-              <a:rPr sz="1400" b="1">
-                <a:solidFill>
-                  <a:srgbClr val="D4A853"/>
-                </a:solidFill>
-                <a:latin typeface="Aptos"/>
-              </a:rPr>
-              <a:t>Wide spread</a:t>
-            </a:r>
-            <a:r>
-              <a:rPr sz="1400">
-                <a:solidFill>
-                  <a:srgbClr val="F6F6F8"/>
-                </a:solidFill>
-                <a:latin typeface="Aptos"/>
-              </a:rPr>
-              <a:t> — that variable's Part-2 result is fragile.</a:t>
-            </a:r>
-          </a:p>
-          <a:p>
-            <a:pPr algn="l">
-              <a:spcAft>
-                <a:spcPts val="1000"/>
-              </a:spcAft>
-            </a:pPr>
-            <a:r>
-              <a:rPr sz="1400">
-                <a:solidFill>
-                  <a:srgbClr val="D4A853"/>
-                </a:solidFill>
-                <a:latin typeface="Aptos"/>
-              </a:rPr>
-              <a:t>•  </a:t>
-            </a:r>
-            <a:r>
-              <a:rPr sz="1400" b="1">
-                <a:solidFill>
-                  <a:srgbClr val="D4A853"/>
-                </a:solidFill>
-                <a:latin typeface="Aptos"/>
-              </a:rPr>
-              <a:t>Simplifying assumption</a:t>
-            </a:r>
-            <a:r>
-              <a:rPr sz="1400">
-                <a:solidFill>
-                  <a:srgbClr val="F6F6F8"/>
-                </a:solidFill>
-                <a:latin typeface="Aptos"/>
-              </a:rPr>
-              <a:t> — treat the SD from this one species as the SD for every species.</a:t>
+              <a:rPr sz="1500" b="1">
+                <a:solidFill>
+                  <a:srgbClr val="D4A853"/>
+                </a:solidFill>
+                <a:latin typeface="Aptos"/>
+              </a:rPr>
+              <a:t>Part 3</a:t>
+            </a:r>
+            <a:r>
+              <a:rPr sz="1500">
+                <a:solidFill>
+                  <a:srgbClr val="F6F6F8"/>
+                </a:solidFill>
+                <a:latin typeface="Aptos"/>
+              </a:rPr>
+              <a:t> — asks how much that distribution matters.</a:t>
             </a:r>
           </a:p>
         </p:txBody>
@@ -11953,7 +11998,7 @@
                 </a:solidFill>
                 <a:latin typeface="Georgia"/>
               </a:rPr>
-              <a:t>Monte Carlo — re-run everything under noise</a:t>
+              <a:t>The 5-image error stack</a:t>
             </a:r>
           </a:p>
         </p:txBody>
@@ -11988,14 +12033,14 @@
                 </a:solidFill>
                 <a:latin typeface="Aptos"/>
               </a:rPr>
-              <a:t>100 iterations, each adding fresh Gaussian noise</a:t>
+              <a:t>one species photographed 5 times → 5 pavo values per variable</a:t>
             </a:r>
           </a:p>
         </p:txBody>
       </p:sp>
       <p:pic>
         <p:nvPicPr>
-          <p:cNvPr id="5" name="Picture 4" descr="mc-loop-diagram.png"/>
+          <p:cNvPr id="5" name="Picture 4" descr="error-strip-1.png"/>
           <p:cNvPicPr>
             <a:picLocks noChangeAspect="1"/>
           </p:cNvPicPr>
@@ -12009,8 +12054,8 @@
         </p:blipFill>
         <p:spPr>
           <a:xfrm>
-            <a:off x="2913396" y="1737360"/>
-            <a:ext cx="6426166" cy="3200400"/>
+            <a:off x="502920" y="1617345"/>
+            <a:ext cx="8229600" cy="4629150"/>
           </a:xfrm>
           <a:prstGeom prst="rect">
             <a:avLst/>
@@ -12026,8 +12071,8 @@
         </p:nvSpPr>
         <p:spPr>
           <a:xfrm>
-            <a:off x="822960" y="5074920"/>
-            <a:ext cx="10972800" cy="1554480"/>
+            <a:off x="8823960" y="1783080"/>
+            <a:ext cx="3154680" cy="4572000"/>
           </a:xfrm>
           <a:prstGeom prst="rect">
             <a:avLst/>
@@ -12042,11 +12087,11 @@
           <a:p>
             <a:pPr algn="l">
               <a:spcAft>
-                <a:spcPts val="960"/>
+                <a:spcPts val="1000"/>
               </a:spcAft>
             </a:pPr>
             <a:r>
-              <a:rPr sz="1600">
+              <a:rPr sz="1400">
                 <a:solidFill>
                   <a:srgbClr val="D4A853"/>
                 </a:solidFill>
@@ -12055,32 +12100,32 @@
               <a:t>•  </a:t>
             </a:r>
             <a:r>
-              <a:rPr sz="1600" b="1">
-                <a:solidFill>
-                  <a:srgbClr val="D4A853"/>
-                </a:solidFill>
-                <a:latin typeface="Aptos"/>
-              </a:rPr>
-              <a:t>Each iteration</a:t>
-            </a:r>
-            <a:r>
-              <a:rPr sz="1600">
-                <a:solidFill>
-                  <a:srgbClr val="F6F6F8"/>
-                </a:solidFill>
-                <a:latin typeface="Aptos"/>
-              </a:rPr>
-              <a:t> — add Gaussian noise with the observed SDs to every tip; refit everything.</a:t>
+              <a:rPr sz="1400" b="1">
+                <a:solidFill>
+                  <a:srgbClr val="D4A853"/>
+                </a:solidFill>
+                <a:latin typeface="Aptos"/>
+              </a:rPr>
+              <a:t>Dots</a:t>
+            </a:r>
+            <a:r>
+              <a:rPr sz="1400">
+                <a:solidFill>
+                  <a:srgbClr val="F6F6F8"/>
+                </a:solidFill>
+                <a:latin typeface="Aptos"/>
+              </a:rPr>
+              <a:t> — one pavo value per photograph.</a:t>
             </a:r>
           </a:p>
           <a:p>
             <a:pPr algn="l">
               <a:spcAft>
-                <a:spcPts val="960"/>
+                <a:spcPts val="1000"/>
               </a:spcAft>
             </a:pPr>
             <a:r>
-              <a:rPr sz="1600">
+              <a:rPr sz="1400">
                 <a:solidFill>
                   <a:srgbClr val="D4A853"/>
                 </a:solidFill>
@@ -12089,32 +12134,32 @@
               <a:t>•  </a:t>
             </a:r>
             <a:r>
-              <a:rPr sz="1600" b="1">
-                <a:solidFill>
-                  <a:srgbClr val="D4A853"/>
-                </a:solidFill>
-                <a:latin typeface="Aptos"/>
-              </a:rPr>
-              <a:t>Store</a:t>
-            </a:r>
-            <a:r>
-              <a:rPr sz="1600">
-                <a:solidFill>
-                  <a:srgbClr val="F6F6F8"/>
-                </a:solidFill>
-                <a:latin typeface="Aptos"/>
-              </a:rPr>
-              <a:t> — K, λ, PGLS slopes.</a:t>
+              <a:rPr sz="1400" b="1">
+                <a:solidFill>
+                  <a:srgbClr val="D4A853"/>
+                </a:solidFill>
+                <a:latin typeface="Aptos"/>
+              </a:rPr>
+              <a:t>Bar</a:t>
+            </a:r>
+            <a:r>
+              <a:rPr sz="1400">
+                <a:solidFill>
+                  <a:srgbClr val="F6F6F8"/>
+                </a:solidFill>
+                <a:latin typeface="Aptos"/>
+              </a:rPr>
+              <a:t> — the 5-photo mean.</a:t>
             </a:r>
           </a:p>
           <a:p>
             <a:pPr algn="l">
               <a:spcAft>
-                <a:spcPts val="960"/>
+                <a:spcPts val="1000"/>
               </a:spcAft>
             </a:pPr>
             <a:r>
-              <a:rPr sz="1600">
+              <a:rPr sz="1400">
                 <a:solidFill>
                   <a:srgbClr val="D4A853"/>
                 </a:solidFill>
@@ -12123,32 +12168,32 @@
               <a:t>•  </a:t>
             </a:r>
             <a:r>
-              <a:rPr sz="1600" b="1">
-                <a:solidFill>
-                  <a:srgbClr val="D4A853"/>
-                </a:solidFill>
-                <a:latin typeface="Aptos"/>
-              </a:rPr>
-              <a:t>After 100 iterations</a:t>
-            </a:r>
-            <a:r>
-              <a:rPr sz="1600">
-                <a:solidFill>
-                  <a:srgbClr val="F6F6F8"/>
-                </a:solidFill>
-                <a:latin typeface="Aptos"/>
-              </a:rPr>
-              <a:t> — you have 100 K values per pavo variable — a distribution, not a point.</a:t>
+              <a:rPr sz="1400" b="1">
+                <a:solidFill>
+                  <a:srgbClr val="D4A853"/>
+                </a:solidFill>
+                <a:latin typeface="Aptos"/>
+              </a:rPr>
+              <a:t>Tight clusters</a:t>
+            </a:r>
+            <a:r>
+              <a:rPr sz="1400">
+                <a:solidFill>
+                  <a:srgbClr val="F6F6F8"/>
+                </a:solidFill>
+                <a:latin typeface="Aptos"/>
+              </a:rPr>
+              <a:t> — pavo is reliable for that variable.</a:t>
             </a:r>
           </a:p>
           <a:p>
             <a:pPr algn="l">
               <a:spcAft>
-                <a:spcPts val="960"/>
+                <a:spcPts val="1000"/>
               </a:spcAft>
             </a:pPr>
             <a:r>
-              <a:rPr sz="1600">
+              <a:rPr sz="1400">
                 <a:solidFill>
                   <a:srgbClr val="D4A853"/>
                 </a:solidFill>
@@ -12157,22 +12202,56 @@
               <a:t>•  </a:t>
             </a:r>
             <a:r>
-              <a:rPr sz="1600" b="1">
-                <a:solidFill>
-                  <a:srgbClr val="D4A853"/>
-                </a:solidFill>
-                <a:latin typeface="Aptos"/>
-              </a:rPr>
-              <a:t>Time cost</a:t>
-            </a:r>
-            <a:r>
-              <a:rPr sz="1600">
-                <a:solidFill>
-                  <a:srgbClr val="F6F6F8"/>
-                </a:solidFill>
-                <a:latin typeface="Aptos"/>
-              </a:rPr>
-              <a:t> — ~1.5–2 min for n_iter = 100, ~3–5 min for n_iter = 200.</a:t>
+              <a:rPr sz="1400" b="1">
+                <a:solidFill>
+                  <a:srgbClr val="D4A853"/>
+                </a:solidFill>
+                <a:latin typeface="Aptos"/>
+              </a:rPr>
+              <a:t>Wide spread</a:t>
+            </a:r>
+            <a:r>
+              <a:rPr sz="1400">
+                <a:solidFill>
+                  <a:srgbClr val="F6F6F8"/>
+                </a:solidFill>
+                <a:latin typeface="Aptos"/>
+              </a:rPr>
+              <a:t> — that variable's Part-2 result is fragile.</a:t>
+            </a:r>
+          </a:p>
+          <a:p>
+            <a:pPr algn="l">
+              <a:spcAft>
+                <a:spcPts val="1000"/>
+              </a:spcAft>
+            </a:pPr>
+            <a:r>
+              <a:rPr sz="1400">
+                <a:solidFill>
+                  <a:srgbClr val="D4A853"/>
+                </a:solidFill>
+                <a:latin typeface="Aptos"/>
+              </a:rPr>
+              <a:t>•  </a:t>
+            </a:r>
+            <a:r>
+              <a:rPr sz="1400" b="1">
+                <a:solidFill>
+                  <a:srgbClr val="D4A853"/>
+                </a:solidFill>
+                <a:latin typeface="Aptos"/>
+              </a:rPr>
+              <a:t>Simplifying assumption</a:t>
+            </a:r>
+            <a:r>
+              <a:rPr sz="1400">
+                <a:solidFill>
+                  <a:srgbClr val="F6F6F8"/>
+                </a:solidFill>
+                <a:latin typeface="Aptos"/>
+              </a:rPr>
+              <a:t> — treat the SD from this one species as the SD for every species.</a:t>
             </a:r>
           </a:p>
         </p:txBody>
@@ -12303,7 +12382,7 @@
                 </a:solidFill>
                 <a:latin typeface="Georgia"/>
               </a:rPr>
-              <a:t>Reading the Monte Carlo boxplot</a:t>
+              <a:t>Monte Carlo — re-run everything under noise</a:t>
             </a:r>
           </a:p>
         </p:txBody>
@@ -12338,14 +12417,14 @@
                 </a:solidFill>
                 <a:latin typeface="Aptos"/>
               </a:rPr>
-              <a:t>the gold dot is the observed value from Part 2</a:t>
+              <a:t>100 iterations, each adding fresh Gaussian noise</a:t>
             </a:r>
           </a:p>
         </p:txBody>
       </p:sp>
       <p:pic>
         <p:nvPicPr>
-          <p:cNvPr id="5" name="Picture 4" descr="mc-box-reading.png"/>
+          <p:cNvPr id="5" name="Picture 4" descr="mc-loop-diagram.png"/>
           <p:cNvPicPr>
             <a:picLocks noChangeAspect="1"/>
           </p:cNvPicPr>
@@ -12359,8 +12438,8 @@
         </p:blipFill>
         <p:spPr>
           <a:xfrm>
-            <a:off x="411480" y="1858350"/>
-            <a:ext cx="7772400" cy="4421458"/>
+            <a:off x="2913396" y="1737360"/>
+            <a:ext cx="6426166" cy="3200400"/>
           </a:xfrm>
           <a:prstGeom prst="rect">
             <a:avLst/>
@@ -12376,8 +12455,8 @@
         </p:nvSpPr>
         <p:spPr>
           <a:xfrm>
-            <a:off x="8321040" y="1783080"/>
-            <a:ext cx="3566160" cy="4663440"/>
+            <a:off x="822960" y="5074920"/>
+            <a:ext cx="10972800" cy="1554480"/>
           </a:xfrm>
           <a:prstGeom prst="rect">
             <a:avLst/>
@@ -12396,7 +12475,7 @@
               </a:spcAft>
             </a:pPr>
             <a:r>
-              <a:rPr sz="1300">
+              <a:rPr sz="1600">
                 <a:solidFill>
                   <a:srgbClr val="D4A853"/>
                 </a:solidFill>
@@ -12405,22 +12484,22 @@
               <a:t>•  </a:t>
             </a:r>
             <a:r>
-              <a:rPr sz="1300" b="1">
-                <a:solidFill>
-                  <a:srgbClr val="D4A853"/>
-                </a:solidFill>
-                <a:latin typeface="Aptos"/>
-              </a:rPr>
-              <a:t>Gold inside the box</a:t>
-            </a:r>
-            <a:r>
-              <a:rPr sz="1300">
-                <a:solidFill>
-                  <a:srgbClr val="F6F6F8"/>
-                </a:solidFill>
-                <a:latin typeface="Aptos"/>
-              </a:rPr>
-              <a:t> — robust — your Part 2 conclusion holds.</a:t>
+              <a:rPr sz="1600" b="1">
+                <a:solidFill>
+                  <a:srgbClr val="D4A853"/>
+                </a:solidFill>
+                <a:latin typeface="Aptos"/>
+              </a:rPr>
+              <a:t>Each iteration</a:t>
+            </a:r>
+            <a:r>
+              <a:rPr sz="1600">
+                <a:solidFill>
+                  <a:srgbClr val="F6F6F8"/>
+                </a:solidFill>
+                <a:latin typeface="Aptos"/>
+              </a:rPr>
+              <a:t> — add Gaussian noise with the observed SDs to every tip; refit everything.</a:t>
             </a:r>
           </a:p>
           <a:p>
@@ -12430,7 +12509,7 @@
               </a:spcAft>
             </a:pPr>
             <a:r>
-              <a:rPr sz="1300">
+              <a:rPr sz="1600">
                 <a:solidFill>
                   <a:srgbClr val="D4A853"/>
                 </a:solidFill>
@@ -12439,22 +12518,22 @@
               <a:t>•  </a:t>
             </a:r>
             <a:r>
-              <a:rPr sz="1300" b="1">
-                <a:solidFill>
-                  <a:srgbClr val="D4A853"/>
-                </a:solidFill>
-                <a:latin typeface="Aptos"/>
-              </a:rPr>
-              <a:t>Box centered at zero</a:t>
-            </a:r>
-            <a:r>
-              <a:rPr sz="1300">
-                <a:solidFill>
-                  <a:srgbClr val="F6F6F8"/>
-                </a:solidFill>
-                <a:latin typeface="Aptos"/>
-              </a:rPr>
-              <a:t> — no signal — fine if that was the claim.</a:t>
+              <a:rPr sz="1600" b="1">
+                <a:solidFill>
+                  <a:srgbClr val="D4A853"/>
+                </a:solidFill>
+                <a:latin typeface="Aptos"/>
+              </a:rPr>
+              <a:t>Store</a:t>
+            </a:r>
+            <a:r>
+              <a:rPr sz="1600">
+                <a:solidFill>
+                  <a:srgbClr val="F6F6F8"/>
+                </a:solidFill>
+                <a:latin typeface="Aptos"/>
+              </a:rPr>
+              <a:t> — K, λ, PGLS slopes.</a:t>
             </a:r>
           </a:p>
           <a:p>
@@ -12464,7 +12543,7 @@
               </a:spcAft>
             </a:pPr>
             <a:r>
-              <a:rPr sz="1300">
+              <a:rPr sz="1600">
                 <a:solidFill>
                   <a:srgbClr val="D4A853"/>
                 </a:solidFill>
@@ -12473,22 +12552,22 @@
               <a:t>•  </a:t>
             </a:r>
             <a:r>
-              <a:rPr sz="1300" b="1">
-                <a:solidFill>
-                  <a:srgbClr val="D4A853"/>
-                </a:solidFill>
-                <a:latin typeface="Aptos"/>
-              </a:rPr>
-              <a:t>Box straddles zero</a:t>
-            </a:r>
-            <a:r>
-              <a:rPr sz="1300">
-                <a:solidFill>
-                  <a:srgbClr val="F6F6F8"/>
-                </a:solidFill>
-                <a:latin typeface="Aptos"/>
-              </a:rPr>
-              <a:t> — fragile — can't distinguish from no signal.</a:t>
+              <a:rPr sz="1600" b="1">
+                <a:solidFill>
+                  <a:srgbClr val="D4A853"/>
+                </a:solidFill>
+                <a:latin typeface="Aptos"/>
+              </a:rPr>
+              <a:t>After 100 iterations</a:t>
+            </a:r>
+            <a:r>
+              <a:rPr sz="1600">
+                <a:solidFill>
+                  <a:srgbClr val="F6F6F8"/>
+                </a:solidFill>
+                <a:latin typeface="Aptos"/>
+              </a:rPr>
+              <a:t> — you have 100 K values per pavo variable — a distribution, not a point.</a:t>
             </a:r>
           </a:p>
           <a:p>
@@ -12498,7 +12577,7 @@
               </a:spcAft>
             </a:pPr>
             <a:r>
-              <a:rPr sz="1300">
+              <a:rPr sz="1600">
                 <a:solidFill>
                   <a:srgbClr val="D4A853"/>
                 </a:solidFill>
@@ -12507,56 +12586,22 @@
               <a:t>•  </a:t>
             </a:r>
             <a:r>
-              <a:rPr sz="1300" b="1">
-                <a:solidFill>
-                  <a:srgbClr val="D4A853"/>
-                </a:solidFill>
-                <a:latin typeface="Aptos"/>
-              </a:rPr>
-              <a:t>Gold outside the box</a:t>
-            </a:r>
-            <a:r>
-              <a:rPr sz="1300">
-                <a:solidFill>
-                  <a:srgbClr val="F6F6F8"/>
-                </a:solidFill>
-                <a:latin typeface="Aptos"/>
-              </a:rPr>
-              <a:t> — you got lucky — a different photo would have given a different K.</a:t>
-            </a:r>
-          </a:p>
-          <a:p>
-            <a:pPr algn="l">
-              <a:spcAft>
-                <a:spcPts val="960"/>
-              </a:spcAft>
-            </a:pPr>
-            <a:r>
-              <a:rPr sz="1300">
-                <a:solidFill>
-                  <a:srgbClr val="D4A853"/>
-                </a:solidFill>
-                <a:latin typeface="Aptos"/>
-              </a:rPr>
-              <a:t>•  </a:t>
-            </a:r>
-            <a:r>
-              <a:rPr sz="1300" b="1">
-                <a:solidFill>
-                  <a:srgbClr val="D4A853"/>
-                </a:solidFill>
-                <a:latin typeface="Aptos"/>
-              </a:rPr>
-              <a:t>For PGLS slopes</a:t>
-            </a:r>
-            <a:r>
-              <a:rPr sz="1300">
-                <a:solidFill>
-                  <a:srgbClr val="F6F6F8"/>
-                </a:solidFill>
-                <a:latin typeface="Aptos"/>
-              </a:rPr>
-              <a:t> — the test is whether zero lies inside the 95 % CI.</a:t>
+              <a:rPr sz="1600" b="1">
+                <a:solidFill>
+                  <a:srgbClr val="D4A853"/>
+                </a:solidFill>
+                <a:latin typeface="Aptos"/>
+              </a:rPr>
+              <a:t>Time cost</a:t>
+            </a:r>
+            <a:r>
+              <a:rPr sz="1600">
+                <a:solidFill>
+                  <a:srgbClr val="F6F6F8"/>
+                </a:solidFill>
+                <a:latin typeface="Aptos"/>
+              </a:rPr>
+              <a:t> — ~1.5–2 min for n_iter = 100, ~3–5 min for n_iter = 200.</a:t>
             </a:r>
           </a:p>
         </p:txBody>
@@ -12687,7 +12732,7 @@
                 </a:solidFill>
                 <a:latin typeface="Georgia"/>
               </a:rPr>
-              <a:t>Chaetodontidae K under noise</a:t>
+              <a:t>Reading the Monte Carlo boxplot</a:t>
             </a:r>
           </a:p>
         </p:txBody>
@@ -12722,14 +12767,14 @@
                 </a:solidFill>
                 <a:latin typeface="Aptos"/>
               </a:rPr>
-              <a:t>100 Monte Carlo re-fits  ·  gold dot = observed (Part 2)</a:t>
+              <a:t>the gold dot is the observed value from Part 2</a:t>
             </a:r>
           </a:p>
         </p:txBody>
       </p:sp>
       <p:pic>
         <p:nvPicPr>
-          <p:cNvPr id="5" name="Picture 4" descr="mc-K-plot-1.png"/>
+          <p:cNvPr id="5" name="Picture 4" descr="mc-box-reading.png"/>
           <p:cNvPicPr>
             <a:picLocks noChangeAspect="1"/>
           </p:cNvPicPr>
@@ -12743,8 +12788,8 @@
         </p:blipFill>
         <p:spPr>
           <a:xfrm>
-            <a:off x="758951" y="1463040"/>
-            <a:ext cx="7900416" cy="4937760"/>
+            <a:off x="411480" y="1858350"/>
+            <a:ext cx="7772400" cy="4421458"/>
           </a:xfrm>
           <a:prstGeom prst="rect">
             <a:avLst/>
@@ -12760,8 +12805,8 @@
         </p:nvSpPr>
         <p:spPr>
           <a:xfrm>
-            <a:off x="9006840" y="1828800"/>
-            <a:ext cx="2926080" cy="4480560"/>
+            <a:off x="8321040" y="1783080"/>
+            <a:ext cx="3566160" cy="4663440"/>
           </a:xfrm>
           <a:prstGeom prst="rect">
             <a:avLst/>
@@ -12776,11 +12821,11 @@
           <a:p>
             <a:pPr algn="l">
               <a:spcAft>
-                <a:spcPts val="1000"/>
+                <a:spcPts val="960"/>
               </a:spcAft>
             </a:pPr>
             <a:r>
-              <a:rPr sz="1400">
+              <a:rPr sz="1300">
                 <a:solidFill>
                   <a:srgbClr val="D4A853"/>
                 </a:solidFill>
@@ -12789,32 +12834,32 @@
               <a:t>•  </a:t>
             </a:r>
             <a:r>
-              <a:rPr sz="1400" b="1">
-                <a:solidFill>
-                  <a:srgbClr val="D4A853"/>
-                </a:solidFill>
-                <a:latin typeface="Aptos"/>
-              </a:rPr>
-              <a:t>A's K stays high</a:t>
-            </a:r>
-            <a:r>
-              <a:rPr sz="1400">
-                <a:solidFill>
-                  <a:srgbClr val="F6F6F8"/>
-                </a:solidFill>
-                <a:latin typeface="Aptos"/>
-              </a:rPr>
-              <a:t> — robust under noise — pattern orientation really is conserved.</a:t>
+              <a:rPr sz="1300" b="1">
+                <a:solidFill>
+                  <a:srgbClr val="D4A853"/>
+                </a:solidFill>
+                <a:latin typeface="Aptos"/>
+              </a:rPr>
+              <a:t>Gold inside the box</a:t>
+            </a:r>
+            <a:r>
+              <a:rPr sz="1300">
+                <a:solidFill>
+                  <a:srgbClr val="F6F6F8"/>
+                </a:solidFill>
+                <a:latin typeface="Aptos"/>
+              </a:rPr>
+              <a:t> — robust — your Part 2 conclusion holds.</a:t>
             </a:r>
           </a:p>
           <a:p>
             <a:pPr algn="l">
               <a:spcAft>
-                <a:spcPts val="1000"/>
+                <a:spcPts val="960"/>
               </a:spcAft>
             </a:pPr>
             <a:r>
-              <a:rPr sz="1400">
+              <a:rPr sz="1300">
                 <a:solidFill>
                   <a:srgbClr val="D4A853"/>
                 </a:solidFill>
@@ -12823,32 +12868,32 @@
               <a:t>•  </a:t>
             </a:r>
             <a:r>
-              <a:rPr sz="1400" b="1">
-                <a:solidFill>
-                  <a:srgbClr val="D4A853"/>
-                </a:solidFill>
-                <a:latin typeface="Aptos"/>
-              </a:rPr>
-              <a:t>Other 5</a:t>
-            </a:r>
-            <a:r>
-              <a:rPr sz="1400">
-                <a:solidFill>
-                  <a:srgbClr val="F6F6F8"/>
-                </a:solidFill>
-                <a:latin typeface="Aptos"/>
-              </a:rPr>
-              <a:t> — boxes hover near zero — consistent with the non-significant point estimates.</a:t>
+              <a:rPr sz="1300" b="1">
+                <a:solidFill>
+                  <a:srgbClr val="D4A853"/>
+                </a:solidFill>
+                <a:latin typeface="Aptos"/>
+              </a:rPr>
+              <a:t>Box centered at zero</a:t>
+            </a:r>
+            <a:r>
+              <a:rPr sz="1300">
+                <a:solidFill>
+                  <a:srgbClr val="F6F6F8"/>
+                </a:solidFill>
+                <a:latin typeface="Aptos"/>
+              </a:rPr>
+              <a:t> — no signal — fine if that was the claim.</a:t>
             </a:r>
           </a:p>
           <a:p>
             <a:pPr algn="l">
               <a:spcAft>
-                <a:spcPts val="1000"/>
+                <a:spcPts val="960"/>
               </a:spcAft>
             </a:pPr>
             <a:r>
-              <a:rPr sz="1400">
+              <a:rPr sz="1300">
                 <a:solidFill>
                   <a:srgbClr val="D4A853"/>
                 </a:solidFill>
@@ -12857,22 +12902,90 @@
               <a:t>•  </a:t>
             </a:r>
             <a:r>
-              <a:rPr sz="1400" b="1">
-                <a:solidFill>
-                  <a:srgbClr val="D4A853"/>
-                </a:solidFill>
-                <a:latin typeface="Aptos"/>
-              </a:rPr>
-              <a:t>Verdict</a:t>
-            </a:r>
-            <a:r>
-              <a:rPr sz="1400">
-                <a:solidFill>
-                  <a:srgbClr val="F6F6F8"/>
-                </a:solidFill>
-                <a:latin typeface="Aptos"/>
-              </a:rPr>
-              <a:t> — the headline result from Part 2 survives realistic measurement error.</a:t>
+              <a:rPr sz="1300" b="1">
+                <a:solidFill>
+                  <a:srgbClr val="D4A853"/>
+                </a:solidFill>
+                <a:latin typeface="Aptos"/>
+              </a:rPr>
+              <a:t>Box straddles zero</a:t>
+            </a:r>
+            <a:r>
+              <a:rPr sz="1300">
+                <a:solidFill>
+                  <a:srgbClr val="F6F6F8"/>
+                </a:solidFill>
+                <a:latin typeface="Aptos"/>
+              </a:rPr>
+              <a:t> — fragile — can't distinguish from no signal.</a:t>
+            </a:r>
+          </a:p>
+          <a:p>
+            <a:pPr algn="l">
+              <a:spcAft>
+                <a:spcPts val="960"/>
+              </a:spcAft>
+            </a:pPr>
+            <a:r>
+              <a:rPr sz="1300">
+                <a:solidFill>
+                  <a:srgbClr val="D4A853"/>
+                </a:solidFill>
+                <a:latin typeface="Aptos"/>
+              </a:rPr>
+              <a:t>•  </a:t>
+            </a:r>
+            <a:r>
+              <a:rPr sz="1300" b="1">
+                <a:solidFill>
+                  <a:srgbClr val="D4A853"/>
+                </a:solidFill>
+                <a:latin typeface="Aptos"/>
+              </a:rPr>
+              <a:t>Gold outside the box</a:t>
+            </a:r>
+            <a:r>
+              <a:rPr sz="1300">
+                <a:solidFill>
+                  <a:srgbClr val="F6F6F8"/>
+                </a:solidFill>
+                <a:latin typeface="Aptos"/>
+              </a:rPr>
+              <a:t> — you got lucky — a different photo would have given a different K.</a:t>
+            </a:r>
+          </a:p>
+          <a:p>
+            <a:pPr algn="l">
+              <a:spcAft>
+                <a:spcPts val="960"/>
+              </a:spcAft>
+            </a:pPr>
+            <a:r>
+              <a:rPr sz="1300">
+                <a:solidFill>
+                  <a:srgbClr val="D4A853"/>
+                </a:solidFill>
+                <a:latin typeface="Aptos"/>
+              </a:rPr>
+              <a:t>•  </a:t>
+            </a:r>
+            <a:r>
+              <a:rPr sz="1300" b="1">
+                <a:solidFill>
+                  <a:srgbClr val="D4A853"/>
+                </a:solidFill>
+                <a:latin typeface="Aptos"/>
+              </a:rPr>
+              <a:t>For PGLS slopes</a:t>
+            </a:r>
+            <a:r>
+              <a:rPr sz="1300">
+                <a:solidFill>
+                  <a:srgbClr val="F6F6F8"/>
+                </a:solidFill>
+                <a:latin typeface="Aptos"/>
+              </a:rPr>
+              <a:t> — the test is whether zero lies inside the 95 % CI.</a:t>
             </a:r>
           </a:p>
         </p:txBody>
@@ -13003,7 +13116,7 @@
                 </a:solidFill>
                 <a:latin typeface="Georgia"/>
               </a:rPr>
-              <a:t>Part 3 take-home</a:t>
+              <a:t>Chaetodontidae K under noise</a:t>
             </a:r>
           </a:p>
         </p:txBody>
@@ -13038,46 +13151,36 @@
                 </a:solidFill>
                 <a:latin typeface="Aptos"/>
               </a:rPr>
-              <a:t>what survives in Chaetodontidae</a:t>
-            </a:r>
-          </a:p>
-        </p:txBody>
-      </p:sp>
-      <p:sp>
-        <p:nvSpPr>
-          <p:cNvPr id="5" name="TextBox 4"/>
-          <p:cNvSpPr txBox="1"/>
-          <p:nvPr/>
-        </p:nvSpPr>
-        <p:spPr>
-          <a:xfrm>
-            <a:off x="502920" y="1508760"/>
-            <a:ext cx="11155680" cy="777240"/>
-          </a:xfrm>
-          <a:prstGeom prst="rect">
-            <a:avLst/>
-          </a:prstGeom>
-          <a:noFill/>
-        </p:spPr>
-        <p:txBody>
-          <a:bodyPr wrap="square" anchor="t">
-            <a:spAutoFit/>
-          </a:bodyPr>
-          <a:lstStyle/>
-          <a:p>
-            <a:pPr algn="l"/>
-            <a:r>
-              <a:rPr sz="2400" b="0" i="0">
-                <a:solidFill>
-                  <a:srgbClr val="F6F6F8"/>
-                </a:solidFill>
-                <a:latin typeface="Aptos"/>
-              </a:rPr>
-              <a:t>Once we admit one photograph isn't the truth, only A's signal still holds. Everything else stays labile.</a:t>
-            </a:r>
-          </a:p>
-        </p:txBody>
-      </p:sp>
+              <a:t>100 Monte Carlo re-fits  ·  gold dot = observed (Part 2)</a:t>
+            </a:r>
+          </a:p>
+        </p:txBody>
+      </p:sp>
+      <p:pic>
+        <p:nvPicPr>
+          <p:cNvPr id="5" name="Picture 4" descr="mc-K-plot-1.png"/>
+          <p:cNvPicPr>
+            <a:picLocks noChangeAspect="1"/>
+          </p:cNvPicPr>
+          <p:nvPr/>
+        </p:nvPicPr>
+        <p:blipFill>
+          <a:blip r:embed="rId2"/>
+          <a:stretch>
+            <a:fillRect/>
+          </a:stretch>
+        </p:blipFill>
+        <p:spPr>
+          <a:xfrm>
+            <a:off x="758951" y="1463040"/>
+            <a:ext cx="7900416" cy="4937760"/>
+          </a:xfrm>
+          <a:prstGeom prst="rect">
+            <a:avLst/>
+          </a:prstGeom>
+          <a:effectLst/>
+        </p:spPr>
+      </p:pic>
       <p:sp>
         <p:nvSpPr>
           <p:cNvPr id="6" name="TextBox 5"/>
@@ -13086,8 +13189,8 @@
         </p:nvSpPr>
         <p:spPr>
           <a:xfrm>
-            <a:off x="822960" y="2423160"/>
-            <a:ext cx="10972800" cy="3840480"/>
+            <a:off x="9006840" y="1828800"/>
+            <a:ext cx="2926080" cy="4480560"/>
           </a:xfrm>
           <a:prstGeom prst="rect">
             <a:avLst/>
@@ -13102,11 +13205,11 @@
           <a:p>
             <a:pPr algn="l">
               <a:spcAft>
-                <a:spcPts val="1120"/>
+                <a:spcPts val="1000"/>
               </a:spcAft>
             </a:pPr>
             <a:r>
-              <a:rPr sz="1900">
+              <a:rPr sz="1400">
                 <a:solidFill>
                   <a:srgbClr val="D4A853"/>
                 </a:solidFill>
@@ -13115,32 +13218,32 @@
               <a:t>•  </a:t>
             </a:r>
             <a:r>
-              <a:rPr sz="1900" b="1">
-                <a:solidFill>
-                  <a:srgbClr val="D4A853"/>
-                </a:solidFill>
-                <a:latin typeface="Aptos"/>
-              </a:rPr>
-              <a:t>Robust under noise</a:t>
-            </a:r>
-            <a:r>
-              <a:rPr sz="1900">
-                <a:solidFill>
-                  <a:srgbClr val="F6F6F8"/>
-                </a:solidFill>
-                <a:latin typeface="Aptos"/>
-              </a:rPr>
-              <a:t> — A — high K, tight MC distribution, gold dot inside the box.</a:t>
+              <a:rPr sz="1400" b="1">
+                <a:solidFill>
+                  <a:srgbClr val="D4A853"/>
+                </a:solidFill>
+                <a:latin typeface="Aptos"/>
+              </a:rPr>
+              <a:t>A's K stays high</a:t>
+            </a:r>
+            <a:r>
+              <a:rPr sz="1400">
+                <a:solidFill>
+                  <a:srgbClr val="F6F6F8"/>
+                </a:solidFill>
+                <a:latin typeface="Aptos"/>
+              </a:rPr>
+              <a:t> — robust under noise — pattern orientation really is conserved.</a:t>
             </a:r>
           </a:p>
           <a:p>
             <a:pPr algn="l">
               <a:spcAft>
-                <a:spcPts val="1120"/>
+                <a:spcPts val="1000"/>
               </a:spcAft>
             </a:pPr>
             <a:r>
-              <a:rPr sz="1900">
+              <a:rPr sz="1400">
                 <a:solidFill>
                   <a:srgbClr val="D4A853"/>
                 </a:solidFill>
@@ -13149,32 +13252,32 @@
               <a:t>•  </a:t>
             </a:r>
             <a:r>
-              <a:rPr sz="1900" b="1">
-                <a:solidFill>
-                  <a:srgbClr val="D4A853"/>
-                </a:solidFill>
-                <a:latin typeface="Aptos"/>
-              </a:rPr>
-              <a:t>Robust at no-signal</a:t>
-            </a:r>
-            <a:r>
-              <a:rPr sz="1900">
-                <a:solidFill>
-                  <a:srgbClr val="F6F6F8"/>
-                </a:solidFill>
-                <a:latin typeface="Aptos"/>
-              </a:rPr>
-              <a:t> — m, Jc, Jt, m_dS, m_dL — boxes near zero, gold dot inside.</a:t>
+              <a:rPr sz="1400" b="1">
+                <a:solidFill>
+                  <a:srgbClr val="D4A853"/>
+                </a:solidFill>
+                <a:latin typeface="Aptos"/>
+              </a:rPr>
+              <a:t>Other 5</a:t>
+            </a:r>
+            <a:r>
+              <a:rPr sz="1400">
+                <a:solidFill>
+                  <a:srgbClr val="F6F6F8"/>
+                </a:solidFill>
+                <a:latin typeface="Aptos"/>
+              </a:rPr>
+              <a:t> — boxes hover near zero — consistent with the non-significant point estimates.</a:t>
             </a:r>
           </a:p>
           <a:p>
             <a:pPr algn="l">
               <a:spcAft>
-                <a:spcPts val="1120"/>
+                <a:spcPts val="1000"/>
               </a:spcAft>
             </a:pPr>
             <a:r>
-              <a:rPr sz="1900">
+              <a:rPr sz="1400">
                 <a:solidFill>
                   <a:srgbClr val="D4A853"/>
                 </a:solidFill>
@@ -13183,56 +13286,22 @@
               <a:t>•  </a:t>
             </a:r>
             <a:r>
-              <a:rPr sz="1900" b="1">
-                <a:solidFill>
-                  <a:srgbClr val="D4A853"/>
-                </a:solidFill>
-                <a:latin typeface="Aptos"/>
-              </a:rPr>
-              <a:t>No PGLS slope flips</a:t>
-            </a:r>
-            <a:r>
-              <a:rPr sz="1900">
-                <a:solidFill>
-                  <a:srgbClr val="F6F6F8"/>
-                </a:solidFill>
-                <a:latin typeface="Aptos"/>
-              </a:rPr>
-              <a:t> — A ~ m stays flat under noise; m_dL ~ m_dS stays positive.</a:t>
-            </a:r>
-          </a:p>
-          <a:p>
-            <a:pPr algn="l">
-              <a:spcAft>
-                <a:spcPts val="1120"/>
-              </a:spcAft>
-            </a:pPr>
-            <a:r>
-              <a:rPr sz="1900">
-                <a:solidFill>
-                  <a:srgbClr val="D4A853"/>
-                </a:solidFill>
-                <a:latin typeface="Aptos"/>
-              </a:rPr>
-              <a:t>•  </a:t>
-            </a:r>
-            <a:r>
-              <a:rPr sz="1900" b="1">
-                <a:solidFill>
-                  <a:srgbClr val="D4A853"/>
-                </a:solidFill>
-                <a:latin typeface="Aptos"/>
-              </a:rPr>
-              <a:t>Lesson for your family</a:t>
-            </a:r>
-            <a:r>
-              <a:rPr sz="1900">
-                <a:solidFill>
-                  <a:srgbClr val="F6F6F8"/>
-                </a:solidFill>
-                <a:latin typeface="Aptos"/>
-              </a:rPr>
-              <a:t> — if your headline relies on a variable with wide MC spread, soften the claim.</a:t>
+              <a:rPr sz="1400" b="1">
+                <a:solidFill>
+                  <a:srgbClr val="D4A853"/>
+                </a:solidFill>
+                <a:latin typeface="Aptos"/>
+              </a:rPr>
+              <a:t>Verdict</a:t>
+            </a:r>
+            <a:r>
+              <a:rPr sz="1400">
+                <a:solidFill>
+                  <a:srgbClr val="F6F6F8"/>
+                </a:solidFill>
+                <a:latin typeface="Aptos"/>
+              </a:rPr>
+              <a:t> — the headline result from Part 2 survives realistic measurement error.</a:t>
             </a:r>
           </a:p>
         </p:txBody>
@@ -13363,7 +13432,7 @@
                 </a:solidFill>
                 <a:latin typeface="Georgia"/>
               </a:rPr>
-              <a:t>Now you build your own bundle</a:t>
+              <a:t>Part 3 take-home</a:t>
             </a:r>
           </a:p>
         </p:txBody>
@@ -13398,7 +13467,7 @@
                 </a:solidFill>
                 <a:latin typeface="Aptos"/>
               </a:rPr>
-              <a:t>15 min on FishView · same login as Demo 7</a:t>
+              <a:t>what survives in Chaetodontidae</a:t>
             </a:r>
           </a:p>
         </p:txBody>
@@ -13411,8 +13480,43 @@
         </p:nvSpPr>
         <p:spPr>
           <a:xfrm>
-            <a:off x="822960" y="1783080"/>
-            <a:ext cx="10515600" cy="3200400"/>
+            <a:off x="502920" y="1508760"/>
+            <a:ext cx="11155680" cy="777240"/>
+          </a:xfrm>
+          <a:prstGeom prst="rect">
+            <a:avLst/>
+          </a:prstGeom>
+          <a:noFill/>
+        </p:spPr>
+        <p:txBody>
+          <a:bodyPr wrap="square" anchor="t">
+            <a:spAutoFit/>
+          </a:bodyPr>
+          <a:lstStyle/>
+          <a:p>
+            <a:pPr algn="l"/>
+            <a:r>
+              <a:rPr sz="2400" b="0" i="0">
+                <a:solidFill>
+                  <a:srgbClr val="F6F6F8"/>
+                </a:solidFill>
+                <a:latin typeface="Aptos"/>
+              </a:rPr>
+              <a:t>Once we admit one photograph isn't the truth, only A's signal still holds. Everything else stays labile.</a:t>
+            </a:r>
+          </a:p>
+        </p:txBody>
+      </p:sp>
+      <p:sp>
+        <p:nvSpPr>
+          <p:cNvPr id="6" name="TextBox 5"/>
+          <p:cNvSpPr txBox="1"/>
+          <p:nvPr/>
+        </p:nvSpPr>
+        <p:spPr>
+          <a:xfrm>
+            <a:off x="822960" y="2423160"/>
+            <a:ext cx="10972800" cy="3840480"/>
           </a:xfrm>
           <a:prstGeom prst="rect">
             <a:avLst/>
@@ -13427,188 +13531,144 @@
           <a:p>
             <a:pPr algn="l">
               <a:spcAft>
-                <a:spcPts val="1200"/>
+                <a:spcPts val="1120"/>
               </a:spcAft>
-              <a:defRPr sz="2200">
-                <a:solidFill>
-                  <a:srgbClr val="F6F6F8"/>
-                </a:solidFill>
-                <a:latin typeface="Aptos"/>
-              </a:defRPr>
             </a:pPr>
             <a:r>
-              <a:t>Pick ≥ 15 species across ≥ 5 genera from your family</a:t>
+              <a:rPr sz="1900">
+                <a:solidFill>
+                  <a:srgbClr val="D4A853"/>
+                </a:solidFill>
+                <a:latin typeface="Aptos"/>
+              </a:rPr>
+              <a:t>•  </a:t>
+            </a:r>
+            <a:r>
+              <a:rPr sz="1900" b="1">
+                <a:solidFill>
+                  <a:srgbClr val="D4A853"/>
+                </a:solidFill>
+                <a:latin typeface="Aptos"/>
+              </a:rPr>
+              <a:t>Robust under noise</a:t>
+            </a:r>
+            <a:r>
+              <a:rPr sz="1900">
+                <a:solidFill>
+                  <a:srgbClr val="F6F6F8"/>
+                </a:solidFill>
+                <a:latin typeface="Aptos"/>
+              </a:rPr>
+              <a:t> — A — high K, tight MC distribution, gold dot inside the box.</a:t>
             </a:r>
           </a:p>
           <a:p>
             <a:pPr algn="l">
               <a:spcAft>
-                <a:spcPts val="1200"/>
+                <a:spcPts val="1120"/>
               </a:spcAft>
-              <a:defRPr sz="2200">
-                <a:solidFill>
-                  <a:srgbClr val="F6F6F8"/>
-                </a:solidFill>
-                <a:latin typeface="Aptos"/>
-              </a:defRPr>
             </a:pPr>
             <a:r>
-              <a:t>Star one exemplar image per species</a:t>
+              <a:rPr sz="1900">
+                <a:solidFill>
+                  <a:srgbClr val="D4A853"/>
+                </a:solidFill>
+                <a:latin typeface="Aptos"/>
+              </a:rPr>
+              <a:t>•  </a:t>
+            </a:r>
+            <a:r>
+              <a:rPr sz="1900" b="1">
+                <a:solidFill>
+                  <a:srgbClr val="D4A853"/>
+                </a:solidFill>
+                <a:latin typeface="Aptos"/>
+              </a:rPr>
+              <a:t>Robust at no-signal</a:t>
+            </a:r>
+            <a:r>
+              <a:rPr sz="1900">
+                <a:solidFill>
+                  <a:srgbClr val="F6F6F8"/>
+                </a:solidFill>
+                <a:latin typeface="Aptos"/>
+              </a:rPr>
+              <a:t> — m, Jc, Jt, m_dS, m_dL — boxes near zero, gold dot inside.</a:t>
             </a:r>
           </a:p>
           <a:p>
             <a:pPr algn="l">
               <a:spcAft>
-                <a:spcPts val="1200"/>
+                <a:spcPts val="1120"/>
               </a:spcAft>
-              <a:defRPr sz="2200">
-                <a:solidFill>
-                  <a:srgbClr val="F6F6F8"/>
-                </a:solidFill>
-                <a:latin typeface="Aptos"/>
-              </a:defRPr>
             </a:pPr>
             <a:r>
-              <a:t>Mark ONE species as the error-species → tick 5 images for it</a:t>
+              <a:rPr sz="1900">
+                <a:solidFill>
+                  <a:srgbClr val="D4A853"/>
+                </a:solidFill>
+                <a:latin typeface="Aptos"/>
+              </a:rPr>
+              <a:t>•  </a:t>
+            </a:r>
+            <a:r>
+              <a:rPr sz="1900" b="1">
+                <a:solidFill>
+                  <a:srgbClr val="D4A853"/>
+                </a:solidFill>
+                <a:latin typeface="Aptos"/>
+              </a:rPr>
+              <a:t>No PGLS slope flips</a:t>
+            </a:r>
+            <a:r>
+              <a:rPr sz="1900">
+                <a:solidFill>
+                  <a:srgbClr val="F6F6F8"/>
+                </a:solidFill>
+                <a:latin typeface="Aptos"/>
+              </a:rPr>
+              <a:t> — A ~ m stays flat under noise; m_dL ~ m_dS stays positive.</a:t>
             </a:r>
           </a:p>
           <a:p>
             <a:pPr algn="l">
               <a:spcAft>
-                <a:spcPts val="1200"/>
+                <a:spcPts val="1120"/>
               </a:spcAft>
-              <a:defRPr sz="2200">
-                <a:solidFill>
-                  <a:srgbClr val="F6F6F8"/>
-                </a:solidFill>
-                <a:latin typeface="Aptos"/>
-              </a:defRPr>
             </a:pPr>
             <a:r>
-              <a:t>Hit Export. Drop the ZIP next to your Chaetodontidae bundle.</a:t>
-            </a:r>
-          </a:p>
-        </p:txBody>
-      </p:sp>
-      <p:sp>
-        <p:nvSpPr>
-          <p:cNvPr id="6" name="TextBox 5"/>
-          <p:cNvSpPr txBox="1"/>
-          <p:nvPr/>
-        </p:nvSpPr>
-        <p:spPr>
-          <a:xfrm>
-            <a:off x="640080" y="5120640"/>
-            <a:ext cx="10972800" cy="502920"/>
-          </a:xfrm>
-          <a:prstGeom prst="rect">
-            <a:avLst/>
-          </a:prstGeom>
-          <a:noFill/>
-        </p:spPr>
-        <p:txBody>
-          <a:bodyPr wrap="square" anchor="t">
-            <a:spAutoFit/>
-          </a:bodyPr>
-          <a:lstStyle/>
-          <a:p>
-            <a:pPr algn="ctr"/>
-            <a:r>
-              <a:rPr sz="2200" b="0" i="1">
-                <a:solidFill>
-                  <a:srgbClr val="E07A5F"/>
-                </a:solidFill>
-                <a:latin typeface="Aptos"/>
-              </a:rPr>
-              <a:t>The choices you make here ARE the analysis.</a:t>
-            </a:r>
-          </a:p>
-        </p:txBody>
-      </p:sp>
-      <p:sp>
-        <p:nvSpPr>
-          <p:cNvPr id="7" name="Rounded Rectangle 6"/>
-          <p:cNvSpPr/>
-          <p:nvPr/>
-        </p:nvSpPr>
-        <p:spPr>
-          <a:xfrm>
-            <a:off x="822960" y="5715000"/>
-            <a:ext cx="10515600" cy="822960"/>
-          </a:xfrm>
-          <a:prstGeom prst="roundRect">
-            <a:avLst/>
-          </a:prstGeom>
-          <a:solidFill>
-            <a:srgbClr val="1C2032"/>
-          </a:solidFill>
-          <a:ln w="9525">
-            <a:solidFill>
-              <a:srgbClr val="9196A8"/>
-            </a:solidFill>
-          </a:ln>
-          <a:effectLst/>
-        </p:spPr>
-        <p:style>
-          <a:lnRef idx="1">
-            <a:schemeClr val="accent1"/>
-          </a:lnRef>
-          <a:fillRef idx="3">
-            <a:schemeClr val="accent1"/>
-          </a:fillRef>
-          <a:effectRef idx="2">
-            <a:schemeClr val="accent1"/>
-          </a:effectRef>
-          <a:fontRef idx="minor">
-            <a:schemeClr val="lt1"/>
-          </a:fontRef>
-        </p:style>
-        <p:txBody>
-          <a:bodyPr rtlCol="0" anchor="ctr"/>
-          <a:lstStyle/>
-          <a:p>
-            <a:pPr algn="ctr"/>
-          </a:p>
-        </p:txBody>
-      </p:sp>
-      <p:sp>
-        <p:nvSpPr>
-          <p:cNvPr id="8" name="TextBox 7"/>
-          <p:cNvSpPr txBox="1"/>
-          <p:nvPr/>
-        </p:nvSpPr>
-        <p:spPr>
-          <a:xfrm>
-            <a:off x="1005840" y="5806440"/>
-            <a:ext cx="10241280" cy="731520"/>
-          </a:xfrm>
-          <a:prstGeom prst="rect">
-            <a:avLst/>
-          </a:prstGeom>
-          <a:noFill/>
-        </p:spPr>
-        <p:txBody>
-          <a:bodyPr wrap="square" anchor="t">
-            <a:spAutoFit/>
-          </a:bodyPr>
-          <a:lstStyle/>
-          <a:p>
-            <a:pPr algn="l"/>
-            <a:r>
-              <a:rPr sz="1400" b="0" i="1">
-                <a:solidFill>
-                  <a:srgbClr val="C4C6D0"/>
-                </a:solidFill>
-                <a:latin typeface="Aptos"/>
-              </a:rPr>
-              <a:t>Frédérich-paper species are starred for Acanthuridae, Chaetodontidae, Pomacanthidae. The 4 Labrid groups + Balistoidea pick cold — your K estimates are the first for your clade.</a:t>
-            </a:r>
-          </a:p>
-        </p:txBody>
-      </p:sp>
-      <p:sp>
-        <p:nvSpPr>
-          <p:cNvPr id="9" name="TextBox 8"/>
+              <a:rPr sz="1900">
+                <a:solidFill>
+                  <a:srgbClr val="D4A853"/>
+                </a:solidFill>
+                <a:latin typeface="Aptos"/>
+              </a:rPr>
+              <a:t>•  </a:t>
+            </a:r>
+            <a:r>
+              <a:rPr sz="1900" b="1">
+                <a:solidFill>
+                  <a:srgbClr val="D4A853"/>
+                </a:solidFill>
+                <a:latin typeface="Aptos"/>
+              </a:rPr>
+              <a:t>Lesson for your family</a:t>
+            </a:r>
+            <a:r>
+              <a:rPr sz="1900">
+                <a:solidFill>
+                  <a:srgbClr val="F6F6F8"/>
+                </a:solidFill>
+                <a:latin typeface="Aptos"/>
+              </a:rPr>
+              <a:t> — if your headline relies on a variable with wide MC spread, soften the claim.</a:t>
+            </a:r>
+          </a:p>
+        </p:txBody>
+      </p:sp>
+      <p:sp>
+        <p:nvSpPr>
+          <p:cNvPr id="7" name="TextBox 6"/>
           <p:cNvSpPr txBox="1"/>
           <p:nvPr/>
         </p:nvSpPr>
@@ -13732,7 +13792,7 @@
                 </a:solidFill>
                 <a:latin typeface="Georgia"/>
               </a:rPr>
-              <a:t>What you turn in</a:t>
+              <a:t>Now you build your own bundle</a:t>
             </a:r>
           </a:p>
         </p:txBody>
@@ -13767,7 +13827,7 @@
                 </a:solidFill>
                 <a:latin typeface="Aptos"/>
               </a:rPr>
-              <a:t>BruinLearn · end of day Wednesday</a:t>
+              <a:t>15 min on FishView · same login as Demo 7</a:t>
             </a:r>
           </a:p>
         </p:txBody>
@@ -13780,7 +13840,7 @@
         </p:nvSpPr>
         <p:spPr>
           <a:xfrm>
-            <a:off x="822960" y="1691640"/>
+            <a:off x="822960" y="1783080"/>
             <a:ext cx="10515600" cy="3200400"/>
           </a:xfrm>
           <a:prstGeom prst="rect">
@@ -13806,7 +13866,7 @@
               </a:defRPr>
             </a:pPr>
             <a:r>
-              <a:t>1.  Part 1 PCA scatter — your family</a:t>
+              <a:t>Pick ≥ 15 species across ≥ 5 genera from your family</a:t>
             </a:r>
           </a:p>
           <a:p>
@@ -13822,7 +13882,7 @@
               </a:defRPr>
             </a:pPr>
             <a:r>
-              <a:t>2.  Part 2 K plot + one-line interpretation per pavo variable</a:t>
+              <a:t>Star one exemplar image per species</a:t>
             </a:r>
           </a:p>
           <a:p>
@@ -13838,7 +13898,7 @@
               </a:defRPr>
             </a:pPr>
             <a:r>
-              <a:t>3.  Part 3 Monte-Carlo boxplot on K (or one PGLS slope)</a:t>
+              <a:t>Mark ONE species as the error-species → tick 5 images for it</a:t>
             </a:r>
           </a:p>
           <a:p>
@@ -13854,21 +13914,56 @@
               </a:defRPr>
             </a:pPr>
             <a:r>
-              <a:t>4.  One paragraph (≤ 250 words) — branch by family:</a:t>
-            </a:r>
-          </a:p>
-        </p:txBody>
-      </p:sp>
-      <p:sp>
-        <p:nvSpPr>
-          <p:cNvPr id="6" name="Rounded Rectangle 5"/>
+              <a:t>Hit Export. Drop the ZIP next to your Chaetodontidae bundle.</a:t>
+            </a:r>
+          </a:p>
+        </p:txBody>
+      </p:sp>
+      <p:sp>
+        <p:nvSpPr>
+          <p:cNvPr id="6" name="TextBox 5"/>
+          <p:cNvSpPr txBox="1"/>
+          <p:nvPr/>
+        </p:nvSpPr>
+        <p:spPr>
+          <a:xfrm>
+            <a:off x="640080" y="5120640"/>
+            <a:ext cx="10972800" cy="502920"/>
+          </a:xfrm>
+          <a:prstGeom prst="rect">
+            <a:avLst/>
+          </a:prstGeom>
+          <a:noFill/>
+        </p:spPr>
+        <p:txBody>
+          <a:bodyPr wrap="square" anchor="t">
+            <a:spAutoFit/>
+          </a:bodyPr>
+          <a:lstStyle/>
+          <a:p>
+            <a:pPr algn="ctr"/>
+            <a:r>
+              <a:rPr sz="2200" b="0" i="1">
+                <a:solidFill>
+                  <a:srgbClr val="E07A5F"/>
+                </a:solidFill>
+                <a:latin typeface="Aptos"/>
+              </a:rPr>
+              <a:t>The choices you make here ARE the analysis.</a:t>
+            </a:r>
+          </a:p>
+        </p:txBody>
+      </p:sp>
+      <p:sp>
+        <p:nvSpPr>
+          <p:cNvPr id="7" name="Rounded Rectangle 6"/>
           <p:cNvSpPr/>
           <p:nvPr/>
         </p:nvSpPr>
         <p:spPr>
           <a:xfrm>
-            <a:off x="822960" y="4846320"/>
-            <a:ext cx="10607040" cy="1645920"/>
+            <a:off x="822960" y="5715000"/>
+            <a:ext cx="10515600" cy="822960"/>
           </a:xfrm>
           <a:prstGeom prst="roundRect">
             <a:avLst/>
@@ -13907,94 +14002,42 @@
       </p:sp>
       <p:sp>
         <p:nvSpPr>
-          <p:cNvPr id="7" name="TextBox 6"/>
-          <p:cNvSpPr txBox="1"/>
-          <p:nvPr/>
-        </p:nvSpPr>
-        <p:spPr>
-          <a:xfrm>
-            <a:off x="1005840" y="4983480"/>
-            <a:ext cx="10332720" cy="1554480"/>
-          </a:xfrm>
-          <a:prstGeom prst="rect">
-            <a:avLst/>
-          </a:prstGeom>
-          <a:noFill/>
-        </p:spPr>
-        <p:txBody>
-          <a:bodyPr wrap="square">
-            <a:spAutoFit/>
-          </a:bodyPr>
-          <a:lstStyle/>
-          <a:p>
-            <a:pPr algn="l">
-              <a:spcAft>
-                <a:spcPts val="1000"/>
-              </a:spcAft>
-              <a:defRPr sz="1400">
+          <p:cNvPr id="8" name="TextBox 7"/>
+          <p:cNvSpPr txBox="1"/>
+          <p:nvPr/>
+        </p:nvSpPr>
+        <p:spPr>
+          <a:xfrm>
+            <a:off x="1005840" y="5806440"/>
+            <a:ext cx="10241280" cy="731520"/>
+          </a:xfrm>
+          <a:prstGeom prst="rect">
+            <a:avLst/>
+          </a:prstGeom>
+          <a:noFill/>
+        </p:spPr>
+        <p:txBody>
+          <a:bodyPr wrap="square" anchor="t">
+            <a:spAutoFit/>
+          </a:bodyPr>
+          <a:lstStyle/>
+          <a:p>
+            <a:pPr algn="l"/>
+            <a:r>
+              <a:rPr sz="1400" b="0" i="1">
                 <a:solidFill>
                   <a:srgbClr val="C4C6D0"/>
                 </a:solidFill>
                 <a:latin typeface="Aptos"/>
-              </a:defRPr>
-            </a:pPr>
-            <a:r>
-              <a:t>If your family is in Frédérich (Acanthuridae, Pomacanthidae):</a:t>
-            </a:r>
-          </a:p>
-          <a:p>
-            <a:pPr algn="l">
-              <a:spcAft>
-                <a:spcPts val="1000"/>
-              </a:spcAft>
-              <a:defRPr sz="1400">
-                <a:solidFill>
-                  <a:srgbClr val="C4C6D0"/>
-                </a:solidFill>
-                <a:latin typeface="Aptos"/>
-              </a:defRPr>
-            </a:pPr>
-            <a:r>
-              <a:t>    compare your per-variable Ks to their published multivariate K.</a:t>
-            </a:r>
-          </a:p>
-          <a:p>
-            <a:pPr algn="l">
-              <a:spcAft>
-                <a:spcPts val="1000"/>
-              </a:spcAft>
-              <a:defRPr sz="1400">
-                <a:solidFill>
-                  <a:srgbClr val="C4C6D0"/>
-                </a:solidFill>
-                <a:latin typeface="Aptos"/>
-              </a:defRPr>
-            </a:pPr>
-            <a:r>
-              <a:t>If your family is NOT in Frédérich (4 Labrid groups, Balistoidea):</a:t>
-            </a:r>
-          </a:p>
-          <a:p>
-            <a:pPr algn="l">
-              <a:spcAft>
-                <a:spcPts val="1000"/>
-              </a:spcAft>
-              <a:defRPr sz="1400">
-                <a:solidFill>
-                  <a:srgbClr val="C4C6D0"/>
-                </a:solidFill>
-                <a:latin typeface="Aptos"/>
-              </a:defRPr>
-            </a:pPr>
-            <a:r>
-              <a:t>    these are the first reported Ks for your clade — describe the pattern.</a:t>
-            </a:r>
-          </a:p>
-        </p:txBody>
-      </p:sp>
-      <p:sp>
-        <p:nvSpPr>
-          <p:cNvPr id="8" name="TextBox 7"/>
+              </a:rPr>
+              <a:t>Frédérich-paper species are starred for Acanthuridae, Chaetodontidae, Pomacanthidae. The 4 Labrid groups + Balistoidea pick cold — your K estimates are the first for your clade.</a:t>
+            </a:r>
+          </a:p>
+        </p:txBody>
+      </p:sp>
+      <p:sp>
+        <p:nvSpPr>
+          <p:cNvPr id="9" name="TextBox 8"/>
           <p:cNvSpPr txBox="1"/>
           <p:nvPr/>
         </p:nvSpPr>
@@ -14118,7 +14161,7 @@
                 </a:solidFill>
                 <a:latin typeface="Georgia"/>
               </a:rPr>
-              <a:t>Tonight</a:t>
+              <a:t>What you turn in</a:t>
             </a:r>
           </a:p>
         </p:txBody>
@@ -14153,7 +14196,7 @@
                 </a:solidFill>
                 <a:latin typeface="Aptos"/>
               </a:rPr>
-              <a:t>prep page  ·  ~20 minutes</a:t>
+              <a:t>BruinLearn · end of day Wednesday</a:t>
             </a:r>
           </a:p>
         </p:txBody>
@@ -14166,8 +14209,8 @@
         </p:nvSpPr>
         <p:spPr>
           <a:xfrm>
-            <a:off x="822960" y="1828800"/>
-            <a:ext cx="10515600" cy="3657600"/>
+            <a:off x="822960" y="1691640"/>
+            <a:ext cx="10515600" cy="3200400"/>
           </a:xfrm>
           <a:prstGeom prst="rect">
             <a:avLst/>
@@ -14184,7 +14227,7 @@
               <a:spcAft>
                 <a:spcPts val="1200"/>
               </a:spcAft>
-              <a:defRPr sz="2400">
+              <a:defRPr sz="2200">
                 <a:solidFill>
                   <a:srgbClr val="F6F6F8"/>
                 </a:solidFill>
@@ -14192,7 +14235,7 @@
               </a:defRPr>
             </a:pPr>
             <a:r>
-              <a:t>1.  Install R packages (one chunk on the prep page)</a:t>
+              <a:t>1.  Part 1 PCA scatter — your family</a:t>
             </a:r>
           </a:p>
           <a:p>
@@ -14200,7 +14243,7 @@
               <a:spcAft>
                 <a:spcPts val="1200"/>
               </a:spcAft>
-              <a:defRPr sz="2400">
+              <a:defRPr sz="2200">
                 <a:solidFill>
                   <a:srgbClr val="F6F6F8"/>
                 </a:solidFill>
@@ -14208,7 +14251,7 @@
               </a:defRPr>
             </a:pPr>
             <a:r>
-              <a:t>2.  Download the Chaetodontidae walkthrough bundle</a:t>
+              <a:t>2.  Part 2 K plot + one-line interpretation per pavo variable</a:t>
             </a:r>
           </a:p>
           <a:p>
@@ -14216,7 +14259,7 @@
               <a:spcAft>
                 <a:spcPts val="1200"/>
               </a:spcAft>
-              <a:defRPr sz="2400">
+              <a:defRPr sz="2200">
                 <a:solidFill>
                   <a:srgbClr val="F6F6F8"/>
                 </a:solidFill>
@@ -14224,7 +14267,7 @@
               </a:defRPr>
             </a:pPr>
             <a:r>
-              <a:t>3.  Run the readiness check until it prints PASS</a:t>
+              <a:t>3.  Part 3 Monte-Carlo boxplot on K (or one PGLS slope)</a:t>
             </a:r>
           </a:p>
           <a:p>
@@ -14232,7 +14275,7 @@
               <a:spcAft>
                 <a:spcPts val="1200"/>
               </a:spcAft>
-              <a:defRPr sz="2400">
+              <a:defRPr sz="2200">
                 <a:solidFill>
                   <a:srgbClr val="F6F6F8"/>
                 </a:solidFill>
@@ -14240,49 +14283,147 @@
               </a:defRPr>
             </a:pPr>
             <a:r>
-              <a:t>4.  Confirm your Demo 7 FishView login still works</a:t>
-            </a:r>
-          </a:p>
-        </p:txBody>
-      </p:sp>
-      <p:sp>
-        <p:nvSpPr>
-          <p:cNvPr id="6" name="TextBox 5"/>
-          <p:cNvSpPr txBox="1"/>
-          <p:nvPr/>
-        </p:nvSpPr>
-        <p:spPr>
-          <a:xfrm>
-            <a:off x="822960" y="5760720"/>
-            <a:ext cx="10972800" cy="457200"/>
-          </a:xfrm>
-          <a:prstGeom prst="rect">
-            <a:avLst/>
-          </a:prstGeom>
-          <a:noFill/>
-        </p:spPr>
-        <p:txBody>
-          <a:bodyPr wrap="square" anchor="t">
-            <a:spAutoFit/>
-          </a:bodyPr>
-          <a:lstStyle/>
-          <a:p>
-            <a:pPr algn="l"/>
-            <a:r>
-              <a:rPr sz="2200" b="0" i="0">
-                <a:solidFill>
-                  <a:srgbClr val="D4A853"/>
-                </a:solidFill>
-                <a:latin typeface="Aptos"/>
-              </a:rPr>
-              <a:t>michaelalfaro.github.io/eeb187-demos/demo8/demo8-prep.html</a:t>
-            </a:r>
+              <a:t>4.  One paragraph (≤ 250 words) — branch by family:</a:t>
+            </a:r>
+          </a:p>
+        </p:txBody>
+      </p:sp>
+      <p:sp>
+        <p:nvSpPr>
+          <p:cNvPr id="6" name="Rounded Rectangle 5"/>
+          <p:cNvSpPr/>
+          <p:nvPr/>
+        </p:nvSpPr>
+        <p:spPr>
+          <a:xfrm>
+            <a:off x="822960" y="4846320"/>
+            <a:ext cx="10607040" cy="1645920"/>
+          </a:xfrm>
+          <a:prstGeom prst="roundRect">
+            <a:avLst/>
+          </a:prstGeom>
+          <a:solidFill>
+            <a:srgbClr val="1C2032"/>
+          </a:solidFill>
+          <a:ln w="9525">
+            <a:solidFill>
+              <a:srgbClr val="9196A8"/>
+            </a:solidFill>
+          </a:ln>
+          <a:effectLst/>
+        </p:spPr>
+        <p:style>
+          <a:lnRef idx="1">
+            <a:schemeClr val="accent1"/>
+          </a:lnRef>
+          <a:fillRef idx="3">
+            <a:schemeClr val="accent1"/>
+          </a:fillRef>
+          <a:effectRef idx="2">
+            <a:schemeClr val="accent1"/>
+          </a:effectRef>
+          <a:fontRef idx="minor">
+            <a:schemeClr val="lt1"/>
+          </a:fontRef>
+        </p:style>
+        <p:txBody>
+          <a:bodyPr rtlCol="0" anchor="ctr"/>
+          <a:lstStyle/>
+          <a:p>
+            <a:pPr algn="ctr"/>
           </a:p>
         </p:txBody>
       </p:sp>
       <p:sp>
         <p:nvSpPr>
           <p:cNvPr id="7" name="TextBox 6"/>
+          <p:cNvSpPr txBox="1"/>
+          <p:nvPr/>
+        </p:nvSpPr>
+        <p:spPr>
+          <a:xfrm>
+            <a:off x="1005840" y="4983480"/>
+            <a:ext cx="10332720" cy="1554480"/>
+          </a:xfrm>
+          <a:prstGeom prst="rect">
+            <a:avLst/>
+          </a:prstGeom>
+          <a:noFill/>
+        </p:spPr>
+        <p:txBody>
+          <a:bodyPr wrap="square">
+            <a:spAutoFit/>
+          </a:bodyPr>
+          <a:lstStyle/>
+          <a:p>
+            <a:pPr algn="l">
+              <a:spcAft>
+                <a:spcPts val="1000"/>
+              </a:spcAft>
+              <a:defRPr sz="1400">
+                <a:solidFill>
+                  <a:srgbClr val="C4C6D0"/>
+                </a:solidFill>
+                <a:latin typeface="Aptos"/>
+              </a:defRPr>
+            </a:pPr>
+            <a:r>
+              <a:t>If your family is in Frédérich (Acanthuridae, Pomacanthidae):</a:t>
+            </a:r>
+          </a:p>
+          <a:p>
+            <a:pPr algn="l">
+              <a:spcAft>
+                <a:spcPts val="1000"/>
+              </a:spcAft>
+              <a:defRPr sz="1400">
+                <a:solidFill>
+                  <a:srgbClr val="C4C6D0"/>
+                </a:solidFill>
+                <a:latin typeface="Aptos"/>
+              </a:defRPr>
+            </a:pPr>
+            <a:r>
+              <a:t>    compare your per-variable Ks to their published multivariate K.</a:t>
+            </a:r>
+          </a:p>
+          <a:p>
+            <a:pPr algn="l">
+              <a:spcAft>
+                <a:spcPts val="1000"/>
+              </a:spcAft>
+              <a:defRPr sz="1400">
+                <a:solidFill>
+                  <a:srgbClr val="C4C6D0"/>
+                </a:solidFill>
+                <a:latin typeface="Aptos"/>
+              </a:defRPr>
+            </a:pPr>
+            <a:r>
+              <a:t>If your family is NOT in Frédérich (4 Labrid groups, Balistoidea):</a:t>
+            </a:r>
+          </a:p>
+          <a:p>
+            <a:pPr algn="l">
+              <a:spcAft>
+                <a:spcPts val="1000"/>
+              </a:spcAft>
+              <a:defRPr sz="1400">
+                <a:solidFill>
+                  <a:srgbClr val="C4C6D0"/>
+                </a:solidFill>
+                <a:latin typeface="Aptos"/>
+              </a:defRPr>
+            </a:pPr>
+            <a:r>
+              <a:t>    these are the first reported Ks for your clade — describe the pattern.</a:t>
+            </a:r>
+          </a:p>
+        </p:txBody>
+      </p:sp>
+      <p:sp>
+        <p:nvSpPr>
+          <p:cNvPr id="8" name="TextBox 7"/>
           <p:cNvSpPr txBox="1"/>
           <p:nvPr/>
         </p:nvSpPr>
@@ -14384,8 +14525,8 @@
         </p:nvSpPr>
         <p:spPr>
           <a:xfrm>
-            <a:off x="640080" y="2743200"/>
-            <a:ext cx="10972800" cy="914400"/>
+            <a:off x="502920" y="201168"/>
+            <a:ext cx="11338560" cy="868680"/>
           </a:xfrm>
           <a:prstGeom prst="rect">
             <a:avLst/>
@@ -14398,15 +14539,15 @@
           </a:bodyPr>
           <a:lstStyle/>
           <a:p>
-            <a:pPr algn="ctr"/>
-            <a:r>
-              <a:rPr sz="6400" b="1" i="0">
+            <a:pPr algn="l"/>
+            <a:r>
+              <a:rPr sz="3200" b="1" i="0">
                 <a:solidFill>
                   <a:srgbClr val="F6F6F8"/>
                 </a:solidFill>
                 <a:latin typeface="Georgia"/>
               </a:rPr>
-              <a:t>See you Wednesday.</a:t>
+              <a:t>Tonight</a:t>
             </a:r>
           </a:p>
         </p:txBody>
@@ -14419,7 +14560,129 @@
         </p:nvSpPr>
         <p:spPr>
           <a:xfrm>
-            <a:off x="640080" y="3840480"/>
+            <a:off x="530352" y="1005840"/>
+            <a:ext cx="10972800" cy="365760"/>
+          </a:xfrm>
+          <a:prstGeom prst="rect">
+            <a:avLst/>
+          </a:prstGeom>
+          <a:noFill/>
+        </p:spPr>
+        <p:txBody>
+          <a:bodyPr wrap="square" anchor="t">
+            <a:spAutoFit/>
+          </a:bodyPr>
+          <a:lstStyle/>
+          <a:p>
+            <a:pPr algn="l"/>
+            <a:r>
+              <a:rPr sz="1600" b="0" i="0">
+                <a:solidFill>
+                  <a:srgbClr val="D4A853"/>
+                </a:solidFill>
+                <a:latin typeface="Aptos"/>
+              </a:rPr>
+              <a:t>prep page  ·  ~20 minutes</a:t>
+            </a:r>
+          </a:p>
+        </p:txBody>
+      </p:sp>
+      <p:sp>
+        <p:nvSpPr>
+          <p:cNvPr id="5" name="TextBox 4"/>
+          <p:cNvSpPr txBox="1"/>
+          <p:nvPr/>
+        </p:nvSpPr>
+        <p:spPr>
+          <a:xfrm>
+            <a:off x="822960" y="1828800"/>
+            <a:ext cx="10515600" cy="3657600"/>
+          </a:xfrm>
+          <a:prstGeom prst="rect">
+            <a:avLst/>
+          </a:prstGeom>
+          <a:noFill/>
+        </p:spPr>
+        <p:txBody>
+          <a:bodyPr wrap="square">
+            <a:spAutoFit/>
+          </a:bodyPr>
+          <a:lstStyle/>
+          <a:p>
+            <a:pPr algn="l">
+              <a:spcAft>
+                <a:spcPts val="1200"/>
+              </a:spcAft>
+              <a:defRPr sz="2400">
+                <a:solidFill>
+                  <a:srgbClr val="F6F6F8"/>
+                </a:solidFill>
+                <a:latin typeface="Aptos"/>
+              </a:defRPr>
+            </a:pPr>
+            <a:r>
+              <a:t>1.  Install R packages (one chunk on the prep page)</a:t>
+            </a:r>
+          </a:p>
+          <a:p>
+            <a:pPr algn="l">
+              <a:spcAft>
+                <a:spcPts val="1200"/>
+              </a:spcAft>
+              <a:defRPr sz="2400">
+                <a:solidFill>
+                  <a:srgbClr val="F6F6F8"/>
+                </a:solidFill>
+                <a:latin typeface="Aptos"/>
+              </a:defRPr>
+            </a:pPr>
+            <a:r>
+              <a:t>2.  Download the Chaetodontidae walkthrough bundle</a:t>
+            </a:r>
+          </a:p>
+          <a:p>
+            <a:pPr algn="l">
+              <a:spcAft>
+                <a:spcPts val="1200"/>
+              </a:spcAft>
+              <a:defRPr sz="2400">
+                <a:solidFill>
+                  <a:srgbClr val="F6F6F8"/>
+                </a:solidFill>
+                <a:latin typeface="Aptos"/>
+              </a:defRPr>
+            </a:pPr>
+            <a:r>
+              <a:t>3.  Run the readiness check until it prints PASS</a:t>
+            </a:r>
+          </a:p>
+          <a:p>
+            <a:pPr algn="l">
+              <a:spcAft>
+                <a:spcPts val="1200"/>
+              </a:spcAft>
+              <a:defRPr sz="2400">
+                <a:solidFill>
+                  <a:srgbClr val="F6F6F8"/>
+                </a:solidFill>
+                <a:latin typeface="Aptos"/>
+              </a:defRPr>
+            </a:pPr>
+            <a:r>
+              <a:t>4.  Confirm your Demo 7 FishView login still works</a:t>
+            </a:r>
+          </a:p>
+        </p:txBody>
+      </p:sp>
+      <p:sp>
+        <p:nvSpPr>
+          <p:cNvPr id="6" name="TextBox 5"/>
+          <p:cNvSpPr txBox="1"/>
+          <p:nvPr/>
+        </p:nvSpPr>
+        <p:spPr>
+          <a:xfrm>
+            <a:off x="822960" y="5760720"/>
             <a:ext cx="10972800" cy="457200"/>
           </a:xfrm>
           <a:prstGeom prst="rect">
@@ -14433,22 +14696,22 @@
           </a:bodyPr>
           <a:lstStyle/>
           <a:p>
-            <a:pPr algn="ctr"/>
-            <a:r>
-              <a:rPr sz="2400" b="0" i="1">
-                <a:solidFill>
-                  <a:srgbClr val="D4A853"/>
-                </a:solidFill>
-                <a:latin typeface="Aptos"/>
-              </a:rPr>
-              <a:t>Bring questions. We will move slowly.</a:t>
-            </a:r>
-          </a:p>
-        </p:txBody>
-      </p:sp>
-      <p:sp>
-        <p:nvSpPr>
-          <p:cNvPr id="5" name="TextBox 4"/>
+            <a:pPr algn="l"/>
+            <a:r>
+              <a:rPr sz="2200" b="0" i="0">
+                <a:solidFill>
+                  <a:srgbClr val="D4A853"/>
+                </a:solidFill>
+                <a:latin typeface="Aptos"/>
+              </a:rPr>
+              <a:t>michaelalfaro.github.io/eeb187-demos/demo8/demo8-prep.html</a:t>
+            </a:r>
+          </a:p>
+        </p:txBody>
+      </p:sp>
+      <p:sp>
+        <p:nvSpPr>
+          <p:cNvPr id="7" name="TextBox 6"/>
           <p:cNvSpPr txBox="1"/>
           <p:nvPr/>
         </p:nvSpPr>
@@ -14877,6 +15140,172 @@
       <p:sp>
         <p:nvSpPr>
           <p:cNvPr id="7" name="TextBox 6"/>
+          <p:cNvSpPr txBox="1"/>
+          <p:nvPr/>
+        </p:nvSpPr>
+        <p:spPr>
+          <a:xfrm>
+            <a:off x="502920" y="6510528"/>
+            <a:ext cx="6400800" cy="201168"/>
+          </a:xfrm>
+          <a:prstGeom prst="rect">
+            <a:avLst/>
+          </a:prstGeom>
+          <a:noFill/>
+        </p:spPr>
+        <p:txBody>
+          <a:bodyPr wrap="square" anchor="t">
+            <a:spAutoFit/>
+          </a:bodyPr>
+          <a:lstStyle/>
+          <a:p>
+            <a:pPr algn="l"/>
+            <a:r>
+              <a:rPr sz="1000" b="0" i="0">
+                <a:solidFill>
+                  <a:srgbClr val="9196A8"/>
+                </a:solidFill>
+                <a:latin typeface="Aptos"/>
+              </a:rPr>
+              <a:t>EEB 187 · Demo 8 walkthrough · May 20 2026</a:t>
+            </a:r>
+          </a:p>
+        </p:txBody>
+      </p:sp>
+    </p:spTree>
+  </p:cSld>
+  <p:clrMapOvr>
+    <a:masterClrMapping/>
+  </p:clrMapOvr>
+</p:sld>
+</file>
+
+<file path=ppt/slides/slide40.xml><?xml version="1.0" encoding="utf-8"?>
+<p:sld xmlns:a="http://schemas.openxmlformats.org/drawingml/2006/main" xmlns:p="http://schemas.openxmlformats.org/presentationml/2006/main" xmlns:r="http://schemas.openxmlformats.org/officeDocument/2006/relationships">
+  <p:cSld>
+    <p:spTree>
+      <p:nvGrpSpPr>
+        <p:cNvPr id="1" name=""/>
+        <p:cNvGrpSpPr/>
+        <p:nvPr/>
+      </p:nvGrpSpPr>
+      <p:grpSpPr/>
+      <p:sp>
+        <p:nvSpPr>
+          <p:cNvPr id="2" name="Rectangle 1"/>
+          <p:cNvSpPr/>
+          <p:nvPr/>
+        </p:nvSpPr>
+        <p:spPr>
+          <a:xfrm>
+            <a:off x="0" y="0"/>
+            <a:ext cx="12191695" cy="6858000"/>
+          </a:xfrm>
+          <a:prstGeom prst="rect">
+            <a:avLst/>
+          </a:prstGeom>
+          <a:solidFill>
+            <a:srgbClr val="181B2B"/>
+          </a:solidFill>
+          <a:ln>
+            <a:noFill/>
+          </a:ln>
+        </p:spPr>
+        <p:style>
+          <a:lnRef idx="1">
+            <a:schemeClr val="accent1"/>
+          </a:lnRef>
+          <a:fillRef idx="3">
+            <a:schemeClr val="accent1"/>
+          </a:fillRef>
+          <a:effectRef idx="2">
+            <a:schemeClr val="accent1"/>
+          </a:effectRef>
+          <a:fontRef idx="minor">
+            <a:schemeClr val="lt1"/>
+          </a:fontRef>
+        </p:style>
+        <p:txBody>
+          <a:bodyPr rtlCol="0" anchor="ctr"/>
+          <a:lstStyle/>
+          <a:p>
+            <a:pPr algn="ctr"/>
+          </a:p>
+        </p:txBody>
+      </p:sp>
+      <p:sp>
+        <p:nvSpPr>
+          <p:cNvPr id="3" name="TextBox 2"/>
+          <p:cNvSpPr txBox="1"/>
+          <p:nvPr/>
+        </p:nvSpPr>
+        <p:spPr>
+          <a:xfrm>
+            <a:off x="640080" y="2743200"/>
+            <a:ext cx="10972800" cy="914400"/>
+          </a:xfrm>
+          <a:prstGeom prst="rect">
+            <a:avLst/>
+          </a:prstGeom>
+          <a:noFill/>
+        </p:spPr>
+        <p:txBody>
+          <a:bodyPr wrap="square" anchor="t">
+            <a:spAutoFit/>
+          </a:bodyPr>
+          <a:lstStyle/>
+          <a:p>
+            <a:pPr algn="ctr"/>
+            <a:r>
+              <a:rPr sz="6400" b="1" i="0">
+                <a:solidFill>
+                  <a:srgbClr val="F6F6F8"/>
+                </a:solidFill>
+                <a:latin typeface="Georgia"/>
+              </a:rPr>
+              <a:t>See you Wednesday.</a:t>
+            </a:r>
+          </a:p>
+        </p:txBody>
+      </p:sp>
+      <p:sp>
+        <p:nvSpPr>
+          <p:cNvPr id="4" name="TextBox 3"/>
+          <p:cNvSpPr txBox="1"/>
+          <p:nvPr/>
+        </p:nvSpPr>
+        <p:spPr>
+          <a:xfrm>
+            <a:off x="640080" y="3840480"/>
+            <a:ext cx="10972800" cy="457200"/>
+          </a:xfrm>
+          <a:prstGeom prst="rect">
+            <a:avLst/>
+          </a:prstGeom>
+          <a:noFill/>
+        </p:spPr>
+        <p:txBody>
+          <a:bodyPr wrap="square" anchor="t">
+            <a:spAutoFit/>
+          </a:bodyPr>
+          <a:lstStyle/>
+          <a:p>
+            <a:pPr algn="ctr"/>
+            <a:r>
+              <a:rPr sz="2400" b="0" i="1">
+                <a:solidFill>
+                  <a:srgbClr val="D4A853"/>
+                </a:solidFill>
+                <a:latin typeface="Aptos"/>
+              </a:rPr>
+              <a:t>Bring questions. We will move slowly.</a:t>
+            </a:r>
+          </a:p>
+        </p:txBody>
+      </p:sp>
+      <p:sp>
+        <p:nvSpPr>
+          <p:cNvPr id="5" name="TextBox 4"/>
           <p:cNvSpPr txBox="1"/>
           <p:nvPr/>
         </p:nvSpPr>
